--- a/docs/pptx/whole/jx-linsubhr-sens-death.pptx
+++ b/docs/pptx/whole/jx-linsubhr-sens-death.pptx
@@ -5207,7 +5207,7 @@
           <p:spPr>
             <a:xfrm>
               <a:off x="817517" y="1896563"/>
-              <a:ext cx="6051864" cy="82021"/>
+              <a:ext cx="6715627" cy="82021"/>
             </a:xfrm>
             <a:prstGeom prst="rect">
               <a:avLst/>
@@ -5239,7 +5239,7 @@
                   <a:latin typeface="Helvetica"/>
                   <a:cs typeface="Helvetica"/>
                 </a:rPr>
-                <a:t>HR per 0.1 ratio decline: 1.68 (1.33-2.12), p = &lt;0.001  |  per IQR decline (Δ = 0.27): 4.16 (2.21-7.82)  |  IQR: [0.71, 0.98]</a:t>
+                <a:t>HR per 0.1 ratio decline: 1.68 (1.33-2.12), p_Bonf = &lt;0.001 (n = 6)  |  per IQR decline (Δ = 0.27): 4.16 (2.21-7.82)  |  IQR: [0.71, 0.98]</a:t>
               </a:r>
             </a:p>
           </p:txBody>

--- a/docs/pptx/whole/jx-linsubhr-sens-death.pptx
+++ b/docs/pptx/whole/jx-linsubhr-sens-death.pptx
@@ -4930,8 +4930,8 @@
           </p:nvSpPr>
           <p:spPr>
             <a:xfrm>
-              <a:off x="1980137" y="5785772"/>
-              <a:ext cx="155356" cy="80101"/>
+              <a:off x="1977028" y="5785772"/>
+              <a:ext cx="161574" cy="80101"/>
             </a:xfrm>
             <a:prstGeom prst="rect">
               <a:avLst/>
@@ -4963,7 +4963,7 @@
                   <a:latin typeface="Helvetica"/>
                   <a:cs typeface="Helvetica"/>
                 </a:rPr>
-                <a:t>0.6</a:t>
+                <a:t>-40</a:t>
               </a:r>
             </a:p>
           </p:txBody>
@@ -4976,8 +4976,8 @@
           </p:nvSpPr>
           <p:spPr>
             <a:xfrm>
-              <a:off x="3731922" y="5785772"/>
-              <a:ext cx="155356" cy="80101"/>
+              <a:off x="3728813" y="5785772"/>
+              <a:ext cx="161574" cy="80101"/>
             </a:xfrm>
             <a:prstGeom prst="rect">
               <a:avLst/>
@@ -5009,7 +5009,7 @@
                   <a:latin typeface="Helvetica"/>
                   <a:cs typeface="Helvetica"/>
                 </a:rPr>
-                <a:t>0.8</a:t>
+                <a:t>-20</a:t>
               </a:r>
             </a:p>
           </p:txBody>
@@ -5022,8 +5022,8 @@
           </p:nvSpPr>
           <p:spPr>
             <a:xfrm>
-              <a:off x="5483707" y="5785772"/>
-              <a:ext cx="155356" cy="80101"/>
+              <a:off x="5530296" y="5785772"/>
+              <a:ext cx="62179" cy="80101"/>
             </a:xfrm>
             <a:prstGeom prst="rect">
               <a:avLst/>
@@ -5055,7 +5055,7 @@
                   <a:latin typeface="Helvetica"/>
                   <a:cs typeface="Helvetica"/>
                 </a:rPr>
-                <a:t>1.0</a:t>
+                <a:t>0</a:t>
               </a:r>
             </a:p>
           </p:txBody>
@@ -5068,8 +5068,8 @@
           </p:nvSpPr>
           <p:spPr>
             <a:xfrm>
-              <a:off x="7235493" y="5785772"/>
-              <a:ext cx="155356" cy="80101"/>
+              <a:off x="7250992" y="5785772"/>
+              <a:ext cx="124358" cy="80101"/>
             </a:xfrm>
             <a:prstGeom prst="rect">
               <a:avLst/>
@@ -5101,7 +5101,7 @@
                   <a:latin typeface="Helvetica"/>
                   <a:cs typeface="Helvetica"/>
                 </a:rPr>
-                <a:t>1.2</a:t>
+                <a:t>20</a:t>
               </a:r>
             </a:p>
           </p:txBody>
@@ -5114,8 +5114,8 @@
           </p:nvSpPr>
           <p:spPr>
             <a:xfrm>
-              <a:off x="2691419" y="5925448"/>
-              <a:ext cx="4051889" cy="100218"/>
+              <a:off x="1561815" y="5925448"/>
+              <a:ext cx="6311097" cy="100218"/>
             </a:xfrm>
             <a:prstGeom prst="rect">
               <a:avLst/>
@@ -5147,7 +5147,7 @@
                   <a:latin typeface="Helvetica"/>
                   <a:cs typeface="Helvetica"/>
                 </a:rPr>
-                <a:t>Sensitivity eGFR Ratio (CKD-EPI 2012 CysC / CKD-EPI 2021 Cr)</a:t>
+                <a:t>Sensitivity eGFR Difference (%): 100 × (CKD-EPI 2012 CysC − CKD-EPI 2021 Cr) / CKD-EPI 2021 Cr</a:t>
               </a:r>
             </a:p>
           </p:txBody>
@@ -5207,7 +5207,7 @@
           <p:spPr>
             <a:xfrm>
               <a:off x="817517" y="1896563"/>
-              <a:ext cx="6715627" cy="82021"/>
+              <a:ext cx="6842363" cy="82021"/>
             </a:xfrm>
             <a:prstGeom prst="rect">
               <a:avLst/>
@@ -5239,7 +5239,7 @@
                   <a:latin typeface="Helvetica"/>
                   <a:cs typeface="Helvetica"/>
                 </a:rPr>
-                <a:t>HR per 0.1 ratio decline: 1.68 (1.33-2.12), p_Bonf = &lt;0.001 (n = 6)  |  per IQR decline (Δ = 0.27): 4.16 (2.21-7.82)  |  IQR: [0.71, 0.98]</a:t>
+                <a:t>HR per 10 % decline: 1.68 (1.33-2.12), p_Bonf = &lt;0.001 (n = 6)  |  per IQR decline (Δ = 27.5 %): 4.16 (2.21-7.82)  |  IQR: [-29.1, -1.6] %</a:t>
               </a:r>
             </a:p>
           </p:txBody>

--- a/docs/pptx/whole/jx-linsubhr-sens-death.pptx
+++ b/docs/pptx/whole/jx-linsubhr-sens-death.pptx
@@ -2265,34 +2265,26 @@
         </p:sp>
         <p:sp>
           <p:nvSpPr>
-            <p:cNvPr id="4" name="pl4"/>
+            <p:cNvPr id="4" name="rc4"/>
             <p:cNvSpPr/>
             <p:nvPr/>
           </p:nvSpPr>
           <p:spPr>
             <a:xfrm>
-              <a:off x="817517" y="5142518"/>
-              <a:ext cx="7799693" cy="0"/>
+              <a:off x="457200" y="1600200"/>
+              <a:ext cx="8229600" cy="4525962"/>
             </a:xfrm>
-            <a:custGeom>
+            <a:prstGeom prst="rect">
               <a:avLst/>
-              <a:pathLst>
-                <a:path w="7799693" h="0">
-                  <a:moveTo>
-                    <a:pt x="0" y="0"/>
-                  </a:moveTo>
-                  <a:lnTo>
-                    <a:pt x="7799693" y="0"/>
-                  </a:lnTo>
-                  <a:lnTo>
-                    <a:pt x="7799693" y="0"/>
-                  </a:lnTo>
-                </a:path>
-              </a:pathLst>
-            </a:custGeom>
-            <a:ln w="6775" cap="flat">
+            </a:prstGeom>
+            <a:solidFill>
+              <a:srgbClr val="FFFFFF">
+                <a:alpha val="100000"/>
+              </a:srgbClr>
+            </a:solidFill>
+            <a:ln w="13550" cap="rnd">
               <a:solidFill>
-                <a:srgbClr val="EBEBEB">
+                <a:srgbClr val="FFFFFF">
                   <a:alpha val="100000"/>
                 </a:srgbClr>
               </a:solidFill>
@@ -2314,21 +2306,21 @@
           </p:nvSpPr>
           <p:spPr>
             <a:xfrm>
-              <a:off x="817517" y="4313054"/>
-              <a:ext cx="7799693" cy="0"/>
+              <a:off x="887106" y="3250627"/>
+              <a:ext cx="7660515" cy="0"/>
             </a:xfrm>
             <a:custGeom>
               <a:avLst/>
               <a:pathLst>
-                <a:path w="7799693" h="0">
+                <a:path w="7660515" h="0">
                   <a:moveTo>
                     <a:pt x="0" y="0"/>
                   </a:moveTo>
                   <a:lnTo>
-                    <a:pt x="7799693" y="0"/>
-                  </a:lnTo>
-                  <a:lnTo>
-                    <a:pt x="7799693" y="0"/>
+                    <a:pt x="7660515" y="0"/>
+                  </a:lnTo>
+                  <a:lnTo>
+                    <a:pt x="7660515" y="0"/>
                   </a:lnTo>
                 </a:path>
               </a:pathLst>
@@ -2357,21 +2349,21 @@
           </p:nvSpPr>
           <p:spPr>
             <a:xfrm>
-              <a:off x="817517" y="3483591"/>
-              <a:ext cx="7799693" cy="0"/>
+              <a:off x="887106" y="2951293"/>
+              <a:ext cx="7660515" cy="0"/>
             </a:xfrm>
             <a:custGeom>
               <a:avLst/>
               <a:pathLst>
-                <a:path w="7799693" h="0">
+                <a:path w="7660515" h="0">
                   <a:moveTo>
                     <a:pt x="0" y="0"/>
                   </a:moveTo>
                   <a:lnTo>
-                    <a:pt x="7799693" y="0"/>
-                  </a:lnTo>
-                  <a:lnTo>
-                    <a:pt x="7799693" y="0"/>
+                    <a:pt x="7660515" y="0"/>
+                  </a:lnTo>
+                  <a:lnTo>
+                    <a:pt x="7660515" y="0"/>
                   </a:lnTo>
                 </a:path>
               </a:pathLst>
@@ -2400,21 +2392,21 @@
           </p:nvSpPr>
           <p:spPr>
             <a:xfrm>
-              <a:off x="817517" y="2654127"/>
-              <a:ext cx="7799693" cy="0"/>
+              <a:off x="887106" y="2651959"/>
+              <a:ext cx="7660515" cy="0"/>
             </a:xfrm>
             <a:custGeom>
               <a:avLst/>
               <a:pathLst>
-                <a:path w="7799693" h="0">
+                <a:path w="7660515" h="0">
                   <a:moveTo>
                     <a:pt x="0" y="0"/>
                   </a:moveTo>
                   <a:lnTo>
-                    <a:pt x="7799693" y="0"/>
-                  </a:lnTo>
-                  <a:lnTo>
-                    <a:pt x="7799693" y="0"/>
+                    <a:pt x="7660515" y="0"/>
+                  </a:lnTo>
+                  <a:lnTo>
+                    <a:pt x="7660515" y="0"/>
                   </a:lnTo>
                 </a:path>
               </a:pathLst>
@@ -2443,21 +2435,21 @@
           </p:nvSpPr>
           <p:spPr>
             <a:xfrm>
-              <a:off x="1181923" y="2073503"/>
-              <a:ext cx="0" cy="3649639"/>
+              <a:off x="887106" y="2352625"/>
+              <a:ext cx="7660515" cy="0"/>
             </a:xfrm>
             <a:custGeom>
               <a:avLst/>
               <a:pathLst>
-                <a:path w="0" h="3649639">
+                <a:path w="7660515" h="0">
                   <a:moveTo>
-                    <a:pt x="0" y="3649639"/>
+                    <a:pt x="0" y="0"/>
                   </a:moveTo>
                   <a:lnTo>
-                    <a:pt x="0" y="0"/>
-                  </a:lnTo>
-                  <a:lnTo>
-                    <a:pt x="0" y="0"/>
+                    <a:pt x="7660515" y="0"/>
+                  </a:lnTo>
+                  <a:lnTo>
+                    <a:pt x="7660515" y="0"/>
                   </a:lnTo>
                 </a:path>
               </a:pathLst>
@@ -2486,15 +2478,15 @@
           </p:nvSpPr>
           <p:spPr>
             <a:xfrm>
-              <a:off x="2933708" y="2073503"/>
-              <a:ext cx="0" cy="3649639"/>
+              <a:off x="1245010" y="2143092"/>
+              <a:ext cx="0" cy="1317069"/>
             </a:xfrm>
             <a:custGeom>
               <a:avLst/>
               <a:pathLst>
-                <a:path w="0" h="3649639">
+                <a:path w="0" h="1317069">
                   <a:moveTo>
-                    <a:pt x="0" y="3649639"/>
+                    <a:pt x="0" y="1317069"/>
                   </a:moveTo>
                   <a:lnTo>
                     <a:pt x="0" y="0"/>
@@ -2529,15 +2521,15 @@
           </p:nvSpPr>
           <p:spPr>
             <a:xfrm>
-              <a:off x="4685493" y="2073503"/>
-              <a:ext cx="0" cy="3649639"/>
+              <a:off x="2965536" y="2143092"/>
+              <a:ext cx="0" cy="1317069"/>
             </a:xfrm>
             <a:custGeom>
               <a:avLst/>
               <a:pathLst>
-                <a:path w="0" h="3649639">
+                <a:path w="0" h="1317069">
                   <a:moveTo>
-                    <a:pt x="0" y="3649639"/>
+                    <a:pt x="0" y="1317069"/>
                   </a:moveTo>
                   <a:lnTo>
                     <a:pt x="0" y="0"/>
@@ -2572,15 +2564,15 @@
           </p:nvSpPr>
           <p:spPr>
             <a:xfrm>
-              <a:off x="6437278" y="2073503"/>
-              <a:ext cx="0" cy="3649639"/>
+              <a:off x="4686062" y="2143092"/>
+              <a:ext cx="0" cy="1317069"/>
             </a:xfrm>
             <a:custGeom>
               <a:avLst/>
               <a:pathLst>
-                <a:path w="0" h="3649639">
+                <a:path w="0" h="1317069">
                   <a:moveTo>
-                    <a:pt x="0" y="3649639"/>
+                    <a:pt x="0" y="1317069"/>
                   </a:moveTo>
                   <a:lnTo>
                     <a:pt x="0" y="0"/>
@@ -2615,15 +2607,15 @@
           </p:nvSpPr>
           <p:spPr>
             <a:xfrm>
-              <a:off x="8189063" y="2073503"/>
-              <a:ext cx="0" cy="3649639"/>
+              <a:off x="6406588" y="2143092"/>
+              <a:ext cx="0" cy="1317069"/>
             </a:xfrm>
             <a:custGeom>
               <a:avLst/>
               <a:pathLst>
-                <a:path w="0" h="3649639">
+                <a:path w="0" h="1317069">
                   <a:moveTo>
-                    <a:pt x="0" y="3649639"/>
+                    <a:pt x="0" y="1317069"/>
                   </a:moveTo>
                   <a:lnTo>
                     <a:pt x="0" y="0"/>
@@ -2658,26 +2650,26 @@
           </p:nvSpPr>
           <p:spPr>
             <a:xfrm>
-              <a:off x="817517" y="5557249"/>
-              <a:ext cx="7799693" cy="0"/>
+              <a:off x="8127114" y="2143092"/>
+              <a:ext cx="0" cy="1317069"/>
             </a:xfrm>
             <a:custGeom>
               <a:avLst/>
               <a:pathLst>
-                <a:path w="7799693" h="0">
+                <a:path w="0" h="1317069">
                   <a:moveTo>
+                    <a:pt x="0" y="1317069"/>
+                  </a:moveTo>
+                  <a:lnTo>
                     <a:pt x="0" y="0"/>
-                  </a:moveTo>
-                  <a:lnTo>
-                    <a:pt x="7799693" y="0"/>
-                  </a:lnTo>
-                  <a:lnTo>
-                    <a:pt x="7799693" y="0"/>
+                  </a:lnTo>
+                  <a:lnTo>
+                    <a:pt x="0" y="0"/>
                   </a:lnTo>
                 </a:path>
               </a:pathLst>
             </a:custGeom>
-            <a:ln w="13550" cap="flat">
+            <a:ln w="6775" cap="flat">
               <a:solidFill>
                 <a:srgbClr val="EBEBEB">
                   <a:alpha val="100000"/>
@@ -2701,21 +2693,21 @@
           </p:nvSpPr>
           <p:spPr>
             <a:xfrm>
-              <a:off x="817517" y="4727786"/>
-              <a:ext cx="7799693" cy="0"/>
+              <a:off x="887106" y="3400294"/>
+              <a:ext cx="7660515" cy="0"/>
             </a:xfrm>
             <a:custGeom>
               <a:avLst/>
               <a:pathLst>
-                <a:path w="7799693" h="0">
+                <a:path w="7660515" h="0">
                   <a:moveTo>
                     <a:pt x="0" y="0"/>
                   </a:moveTo>
                   <a:lnTo>
-                    <a:pt x="7799693" y="0"/>
-                  </a:lnTo>
-                  <a:lnTo>
-                    <a:pt x="7799693" y="0"/>
+                    <a:pt x="7660515" y="0"/>
+                  </a:lnTo>
+                  <a:lnTo>
+                    <a:pt x="7660515" y="0"/>
                   </a:lnTo>
                 </a:path>
               </a:pathLst>
@@ -2744,21 +2736,21 @@
           </p:nvSpPr>
           <p:spPr>
             <a:xfrm>
-              <a:off x="817517" y="3898322"/>
-              <a:ext cx="7799693" cy="0"/>
+              <a:off x="887106" y="3100960"/>
+              <a:ext cx="7660515" cy="0"/>
             </a:xfrm>
             <a:custGeom>
               <a:avLst/>
               <a:pathLst>
-                <a:path w="7799693" h="0">
+                <a:path w="7660515" h="0">
                   <a:moveTo>
                     <a:pt x="0" y="0"/>
                   </a:moveTo>
                   <a:lnTo>
-                    <a:pt x="7799693" y="0"/>
-                  </a:lnTo>
-                  <a:lnTo>
-                    <a:pt x="7799693" y="0"/>
+                    <a:pt x="7660515" y="0"/>
+                  </a:lnTo>
+                  <a:lnTo>
+                    <a:pt x="7660515" y="0"/>
                   </a:lnTo>
                 </a:path>
               </a:pathLst>
@@ -2787,21 +2779,21 @@
           </p:nvSpPr>
           <p:spPr>
             <a:xfrm>
-              <a:off x="817517" y="3068859"/>
-              <a:ext cx="7799693" cy="0"/>
+              <a:off x="887106" y="2801626"/>
+              <a:ext cx="7660515" cy="0"/>
             </a:xfrm>
             <a:custGeom>
               <a:avLst/>
               <a:pathLst>
-                <a:path w="7799693" h="0">
+                <a:path w="7660515" h="0">
                   <a:moveTo>
                     <a:pt x="0" y="0"/>
                   </a:moveTo>
                   <a:lnTo>
-                    <a:pt x="7799693" y="0"/>
-                  </a:lnTo>
-                  <a:lnTo>
-                    <a:pt x="7799693" y="0"/>
+                    <a:pt x="7660515" y="0"/>
+                  </a:lnTo>
+                  <a:lnTo>
+                    <a:pt x="7660515" y="0"/>
                   </a:lnTo>
                 </a:path>
               </a:pathLst>
@@ -2830,21 +2822,21 @@
           </p:nvSpPr>
           <p:spPr>
             <a:xfrm>
-              <a:off x="817517" y="2239395"/>
-              <a:ext cx="7799693" cy="0"/>
+              <a:off x="887106" y="2502292"/>
+              <a:ext cx="7660515" cy="0"/>
             </a:xfrm>
             <a:custGeom>
               <a:avLst/>
               <a:pathLst>
-                <a:path w="7799693" h="0">
+                <a:path w="7660515" h="0">
                   <a:moveTo>
                     <a:pt x="0" y="0"/>
                   </a:moveTo>
                   <a:lnTo>
-                    <a:pt x="7799693" y="0"/>
-                  </a:lnTo>
-                  <a:lnTo>
-                    <a:pt x="7799693" y="0"/>
+                    <a:pt x="7660515" y="0"/>
+                  </a:lnTo>
+                  <a:lnTo>
+                    <a:pt x="7660515" y="0"/>
                   </a:lnTo>
                 </a:path>
               </a:pathLst>
@@ -2873,21 +2865,21 @@
           </p:nvSpPr>
           <p:spPr>
             <a:xfrm>
-              <a:off x="2057816" y="2073503"/>
-              <a:ext cx="0" cy="3649639"/>
+              <a:off x="887106" y="2202958"/>
+              <a:ext cx="7660515" cy="0"/>
             </a:xfrm>
             <a:custGeom>
               <a:avLst/>
               <a:pathLst>
-                <a:path w="0" h="3649639">
+                <a:path w="7660515" h="0">
                   <a:moveTo>
-                    <a:pt x="0" y="3649639"/>
+                    <a:pt x="0" y="0"/>
                   </a:moveTo>
                   <a:lnTo>
-                    <a:pt x="0" y="0"/>
-                  </a:lnTo>
-                  <a:lnTo>
-                    <a:pt x="0" y="0"/>
+                    <a:pt x="7660515" y="0"/>
+                  </a:lnTo>
+                  <a:lnTo>
+                    <a:pt x="7660515" y="0"/>
                   </a:lnTo>
                 </a:path>
               </a:pathLst>
@@ -2916,15 +2908,15 @@
           </p:nvSpPr>
           <p:spPr>
             <a:xfrm>
-              <a:off x="3809601" y="2073503"/>
-              <a:ext cx="0" cy="3649639"/>
+              <a:off x="2105273" y="2143092"/>
+              <a:ext cx="0" cy="1317069"/>
             </a:xfrm>
             <a:custGeom>
               <a:avLst/>
               <a:pathLst>
-                <a:path w="0" h="3649639">
+                <a:path w="0" h="1317069">
                   <a:moveTo>
-                    <a:pt x="0" y="3649639"/>
+                    <a:pt x="0" y="1317069"/>
                   </a:moveTo>
                   <a:lnTo>
                     <a:pt x="0" y="0"/>
@@ -2959,15 +2951,15 @@
           </p:nvSpPr>
           <p:spPr>
             <a:xfrm>
-              <a:off x="5561386" y="2073503"/>
-              <a:ext cx="0" cy="3649639"/>
+              <a:off x="3825799" y="2143092"/>
+              <a:ext cx="0" cy="1317069"/>
             </a:xfrm>
             <a:custGeom>
               <a:avLst/>
               <a:pathLst>
-                <a:path w="0" h="3649639">
+                <a:path w="0" h="1317069">
                   <a:moveTo>
-                    <a:pt x="0" y="3649639"/>
+                    <a:pt x="0" y="1317069"/>
                   </a:moveTo>
                   <a:lnTo>
                     <a:pt x="0" y="0"/>
@@ -3002,15 +2994,15 @@
           </p:nvSpPr>
           <p:spPr>
             <a:xfrm>
-              <a:off x="7313171" y="2073503"/>
-              <a:ext cx="0" cy="3649639"/>
+              <a:off x="5546325" y="2143092"/>
+              <a:ext cx="0" cy="1317069"/>
             </a:xfrm>
             <a:custGeom>
               <a:avLst/>
               <a:pathLst>
-                <a:path w="0" h="3649639">
+                <a:path w="0" h="1317069">
                   <a:moveTo>
-                    <a:pt x="0" y="3649639"/>
+                    <a:pt x="0" y="1317069"/>
                   </a:moveTo>
                   <a:lnTo>
                     <a:pt x="0" y="0"/>
@@ -3039,564 +3031,607 @@
         </p:sp>
         <p:sp>
           <p:nvSpPr>
-            <p:cNvPr id="22" name="pg22"/>
+            <p:cNvPr id="22" name="pl22"/>
             <p:cNvSpPr/>
             <p:nvPr/>
           </p:nvSpPr>
           <p:spPr>
             <a:xfrm>
-              <a:off x="1172049" y="2073503"/>
-              <a:ext cx="7090630" cy="3457919"/>
+              <a:off x="7266851" y="2143092"/>
+              <a:ext cx="0" cy="1317069"/>
             </a:xfrm>
             <a:custGeom>
               <a:avLst/>
               <a:pathLst>
-                <a:path w="7090630" h="3457919">
+                <a:path w="0" h="1317069">
                   <a:moveTo>
-                    <a:pt x="1356024" y="0"/>
+                    <a:pt x="0" y="1317069"/>
                   </a:moveTo>
                   <a:lnTo>
-                    <a:pt x="1360827" y="14697"/>
-                  </a:lnTo>
-                  <a:lnTo>
-                    <a:pt x="1432450" y="220808"/>
-                  </a:lnTo>
-                  <a:lnTo>
-                    <a:pt x="1504073" y="414674"/>
-                  </a:lnTo>
-                  <a:lnTo>
-                    <a:pt x="1575695" y="597021"/>
-                  </a:lnTo>
-                  <a:lnTo>
-                    <a:pt x="1647318" y="768534"/>
-                  </a:lnTo>
-                  <a:lnTo>
-                    <a:pt x="1718940" y="929856"/>
-                  </a:lnTo>
-                  <a:lnTo>
-                    <a:pt x="1790563" y="1081594"/>
-                  </a:lnTo>
-                  <a:lnTo>
-                    <a:pt x="1862185" y="1224317"/>
-                  </a:lnTo>
-                  <a:lnTo>
-                    <a:pt x="1933808" y="1358559"/>
-                  </a:lnTo>
-                  <a:lnTo>
-                    <a:pt x="2005430" y="1484826"/>
-                  </a:lnTo>
-                  <a:lnTo>
-                    <a:pt x="2077053" y="1603590"/>
-                  </a:lnTo>
-                  <a:lnTo>
-                    <a:pt x="2148675" y="1715299"/>
-                  </a:lnTo>
-                  <a:lnTo>
-                    <a:pt x="2220298" y="1820370"/>
-                  </a:lnTo>
-                  <a:lnTo>
-                    <a:pt x="2291920" y="1919198"/>
-                  </a:lnTo>
-                  <a:lnTo>
-                    <a:pt x="2363543" y="2012155"/>
-                  </a:lnTo>
-                  <a:lnTo>
-                    <a:pt x="2435165" y="2099589"/>
-                  </a:lnTo>
-                  <a:lnTo>
-                    <a:pt x="2506788" y="2181827"/>
-                  </a:lnTo>
-                  <a:lnTo>
-                    <a:pt x="2578410" y="2259180"/>
-                  </a:lnTo>
-                  <a:lnTo>
-                    <a:pt x="2650033" y="2331937"/>
-                  </a:lnTo>
-                  <a:lnTo>
-                    <a:pt x="2721655" y="2400371"/>
-                  </a:lnTo>
-                  <a:lnTo>
-                    <a:pt x="2793278" y="2464739"/>
-                  </a:lnTo>
-                  <a:lnTo>
-                    <a:pt x="2864901" y="2525283"/>
-                  </a:lnTo>
-                  <a:lnTo>
-                    <a:pt x="2936523" y="2582229"/>
-                  </a:lnTo>
-                  <a:lnTo>
-                    <a:pt x="3008146" y="2635792"/>
-                  </a:lnTo>
-                  <a:lnTo>
-                    <a:pt x="3079768" y="2666732"/>
-                  </a:lnTo>
-                  <a:lnTo>
-                    <a:pt x="3151391" y="2685808"/>
-                  </a:lnTo>
-                  <a:lnTo>
-                    <a:pt x="3223013" y="2704439"/>
-                  </a:lnTo>
-                  <a:lnTo>
-                    <a:pt x="3294636" y="2722635"/>
-                  </a:lnTo>
-                  <a:lnTo>
-                    <a:pt x="3366258" y="2740407"/>
-                  </a:lnTo>
-                  <a:lnTo>
-                    <a:pt x="3437881" y="2757763"/>
-                  </a:lnTo>
-                  <a:lnTo>
-                    <a:pt x="3509503" y="2774714"/>
-                  </a:lnTo>
-                  <a:lnTo>
-                    <a:pt x="3581126" y="2791269"/>
-                  </a:lnTo>
-                  <a:lnTo>
-                    <a:pt x="3652748" y="2807438"/>
-                  </a:lnTo>
-                  <a:lnTo>
-                    <a:pt x="3724371" y="2823229"/>
-                  </a:lnTo>
-                  <a:lnTo>
-                    <a:pt x="3795993" y="2838651"/>
-                  </a:lnTo>
-                  <a:lnTo>
-                    <a:pt x="3867616" y="2853714"/>
-                  </a:lnTo>
-                  <a:lnTo>
-                    <a:pt x="3939238" y="2868424"/>
-                  </a:lnTo>
-                  <a:lnTo>
-                    <a:pt x="4010861" y="2882792"/>
-                  </a:lnTo>
-                  <a:lnTo>
-                    <a:pt x="4082483" y="2896823"/>
-                  </a:lnTo>
-                  <a:lnTo>
-                    <a:pt x="4154106" y="2910528"/>
-                  </a:lnTo>
-                  <a:lnTo>
-                    <a:pt x="4225729" y="2923912"/>
-                  </a:lnTo>
-                  <a:lnTo>
-                    <a:pt x="4297351" y="2936983"/>
-                  </a:lnTo>
-                  <a:lnTo>
-                    <a:pt x="4368974" y="2949750"/>
-                  </a:lnTo>
-                  <a:lnTo>
-                    <a:pt x="4440596" y="2962218"/>
-                  </a:lnTo>
-                  <a:lnTo>
-                    <a:pt x="4512219" y="2974395"/>
-                  </a:lnTo>
-                  <a:lnTo>
-                    <a:pt x="4583841" y="2986288"/>
-                  </a:lnTo>
-                  <a:lnTo>
-                    <a:pt x="4655464" y="2997903"/>
-                  </a:lnTo>
-                  <a:lnTo>
-                    <a:pt x="4727086" y="3009247"/>
-                  </a:lnTo>
-                  <a:lnTo>
-                    <a:pt x="4798709" y="3020326"/>
-                  </a:lnTo>
-                  <a:lnTo>
-                    <a:pt x="4870331" y="3031147"/>
-                  </a:lnTo>
-                  <a:lnTo>
-                    <a:pt x="4941954" y="3041715"/>
-                  </a:lnTo>
-                  <a:lnTo>
-                    <a:pt x="5013576" y="3052036"/>
-                  </a:lnTo>
-                  <a:lnTo>
-                    <a:pt x="5085199" y="3062116"/>
-                  </a:lnTo>
-                  <a:lnTo>
-                    <a:pt x="5156821" y="3071960"/>
-                  </a:lnTo>
-                  <a:lnTo>
-                    <a:pt x="5228444" y="3081575"/>
-                  </a:lnTo>
-                  <a:lnTo>
-                    <a:pt x="5300066" y="3090965"/>
-                  </a:lnTo>
-                  <a:lnTo>
-                    <a:pt x="5371689" y="3100136"/>
-                  </a:lnTo>
-                  <a:lnTo>
-                    <a:pt x="5443311" y="3109093"/>
-                  </a:lnTo>
-                  <a:lnTo>
-                    <a:pt x="5514934" y="3117841"/>
-                  </a:lnTo>
-                  <a:lnTo>
-                    <a:pt x="5586557" y="3126385"/>
-                  </a:lnTo>
-                  <a:lnTo>
-                    <a:pt x="5658179" y="3134729"/>
-                  </a:lnTo>
-                  <a:lnTo>
-                    <a:pt x="5729802" y="3142878"/>
-                  </a:lnTo>
-                  <a:lnTo>
-                    <a:pt x="5801424" y="3150837"/>
-                  </a:lnTo>
-                  <a:lnTo>
-                    <a:pt x="5873047" y="3158610"/>
-                  </a:lnTo>
-                  <a:lnTo>
-                    <a:pt x="5944669" y="3166202"/>
-                  </a:lnTo>
-                  <a:lnTo>
-                    <a:pt x="6016292" y="3173616"/>
-                  </a:lnTo>
-                  <a:lnTo>
-                    <a:pt x="6087914" y="3180857"/>
-                  </a:lnTo>
-                  <a:lnTo>
-                    <a:pt x="6159537" y="3187930"/>
-                  </a:lnTo>
-                  <a:lnTo>
-                    <a:pt x="6231159" y="3194837"/>
-                  </a:lnTo>
-                  <a:lnTo>
-                    <a:pt x="6302782" y="3201582"/>
-                  </a:lnTo>
-                  <a:lnTo>
-                    <a:pt x="6374404" y="3208171"/>
-                  </a:lnTo>
-                  <a:lnTo>
-                    <a:pt x="6446027" y="3214605"/>
-                  </a:lnTo>
-                  <a:lnTo>
-                    <a:pt x="6517649" y="3220889"/>
-                  </a:lnTo>
-                  <a:lnTo>
-                    <a:pt x="6589272" y="3227027"/>
-                  </a:lnTo>
-                  <a:lnTo>
-                    <a:pt x="6660894" y="3233021"/>
-                  </a:lnTo>
-                  <a:lnTo>
-                    <a:pt x="6732517" y="3238875"/>
-                  </a:lnTo>
-                  <a:lnTo>
-                    <a:pt x="6804139" y="3244593"/>
-                  </a:lnTo>
-                  <a:lnTo>
-                    <a:pt x="6875762" y="3250177"/>
-                  </a:lnTo>
-                  <a:lnTo>
-                    <a:pt x="6947385" y="3255630"/>
-                  </a:lnTo>
-                  <a:lnTo>
-                    <a:pt x="7019007" y="3260957"/>
-                  </a:lnTo>
-                  <a:lnTo>
-                    <a:pt x="7090630" y="3266158"/>
-                  </a:lnTo>
-                  <a:lnTo>
-                    <a:pt x="7090630" y="3457919"/>
-                  </a:lnTo>
-                  <a:lnTo>
-                    <a:pt x="7019007" y="3456288"/>
-                  </a:lnTo>
-                  <a:lnTo>
-                    <a:pt x="6947385" y="3454553"/>
-                  </a:lnTo>
-                  <a:lnTo>
-                    <a:pt x="6875762" y="3452709"/>
-                  </a:lnTo>
-                  <a:lnTo>
-                    <a:pt x="6804139" y="3450749"/>
-                  </a:lnTo>
-                  <a:lnTo>
-                    <a:pt x="6732517" y="3448664"/>
-                  </a:lnTo>
-                  <a:lnTo>
-                    <a:pt x="6660894" y="3446448"/>
-                  </a:lnTo>
-                  <a:lnTo>
-                    <a:pt x="6589272" y="3444092"/>
-                  </a:lnTo>
-                  <a:lnTo>
-                    <a:pt x="6517649" y="3441587"/>
-                  </a:lnTo>
-                  <a:lnTo>
-                    <a:pt x="6446027" y="3438924"/>
-                  </a:lnTo>
-                  <a:lnTo>
-                    <a:pt x="6374404" y="3436093"/>
-                  </a:lnTo>
-                  <a:lnTo>
-                    <a:pt x="6302782" y="3433083"/>
-                  </a:lnTo>
-                  <a:lnTo>
-                    <a:pt x="6231159" y="3429883"/>
-                  </a:lnTo>
-                  <a:lnTo>
-                    <a:pt x="6159537" y="3426480"/>
-                  </a:lnTo>
-                  <a:lnTo>
-                    <a:pt x="6087914" y="3422863"/>
-                  </a:lnTo>
-                  <a:lnTo>
-                    <a:pt x="6016292" y="3419017"/>
-                  </a:lnTo>
-                  <a:lnTo>
-                    <a:pt x="5944669" y="3414928"/>
-                  </a:lnTo>
-                  <a:lnTo>
-                    <a:pt x="5873047" y="3410581"/>
-                  </a:lnTo>
-                  <a:lnTo>
-                    <a:pt x="5801424" y="3405959"/>
-                  </a:lnTo>
-                  <a:lnTo>
-                    <a:pt x="5729802" y="3401046"/>
-                  </a:lnTo>
-                  <a:lnTo>
-                    <a:pt x="5658179" y="3395822"/>
-                  </a:lnTo>
-                  <a:lnTo>
-                    <a:pt x="5586557" y="3390268"/>
-                  </a:lnTo>
-                  <a:lnTo>
-                    <a:pt x="5514934" y="3384363"/>
-                  </a:lnTo>
-                  <a:lnTo>
-                    <a:pt x="5443311" y="3378085"/>
-                  </a:lnTo>
-                  <a:lnTo>
-                    <a:pt x="5371689" y="3371411"/>
-                  </a:lnTo>
-                  <a:lnTo>
-                    <a:pt x="5300066" y="3364315"/>
-                  </a:lnTo>
-                  <a:lnTo>
-                    <a:pt x="5228444" y="3356771"/>
-                  </a:lnTo>
-                  <a:lnTo>
-                    <a:pt x="5156821" y="3348750"/>
-                  </a:lnTo>
-                  <a:lnTo>
-                    <a:pt x="5085199" y="3340223"/>
-                  </a:lnTo>
-                  <a:lnTo>
-                    <a:pt x="5013576" y="3331156"/>
-                  </a:lnTo>
-                  <a:lnTo>
-                    <a:pt x="4941954" y="3321518"/>
-                  </a:lnTo>
-                  <a:lnTo>
-                    <a:pt x="4870331" y="3311270"/>
-                  </a:lnTo>
-                  <a:lnTo>
-                    <a:pt x="4798709" y="3300375"/>
-                  </a:lnTo>
-                  <a:lnTo>
-                    <a:pt x="4727086" y="3288792"/>
-                  </a:lnTo>
-                  <a:lnTo>
-                    <a:pt x="4655464" y="3276477"/>
-                  </a:lnTo>
-                  <a:lnTo>
-                    <a:pt x="4583841" y="3263385"/>
-                  </a:lnTo>
-                  <a:lnTo>
-                    <a:pt x="4512219" y="3249465"/>
-                  </a:lnTo>
-                  <a:lnTo>
-                    <a:pt x="4440596" y="3234666"/>
-                  </a:lnTo>
-                  <a:lnTo>
-                    <a:pt x="4368974" y="3218932"/>
-                  </a:lnTo>
-                  <a:lnTo>
-                    <a:pt x="4297351" y="3202205"/>
-                  </a:lnTo>
-                  <a:lnTo>
-                    <a:pt x="4225729" y="3184421"/>
-                  </a:lnTo>
-                  <a:lnTo>
-                    <a:pt x="4154106" y="3165513"/>
-                  </a:lnTo>
-                  <a:lnTo>
-                    <a:pt x="4082483" y="3145411"/>
-                  </a:lnTo>
-                  <a:lnTo>
-                    <a:pt x="4010861" y="3124039"/>
-                  </a:lnTo>
-                  <a:lnTo>
-                    <a:pt x="3939238" y="3101317"/>
-                  </a:lnTo>
-                  <a:lnTo>
-                    <a:pt x="3867616" y="3077160"/>
-                  </a:lnTo>
-                  <a:lnTo>
-                    <a:pt x="3795993" y="3051477"/>
-                  </a:lnTo>
-                  <a:lnTo>
-                    <a:pt x="3724371" y="3024172"/>
-                  </a:lnTo>
-                  <a:lnTo>
-                    <a:pt x="3652748" y="2995142"/>
-                  </a:lnTo>
-                  <a:lnTo>
-                    <a:pt x="3581126" y="2964278"/>
-                  </a:lnTo>
-                  <a:lnTo>
-                    <a:pt x="3509503" y="2931465"/>
-                  </a:lnTo>
-                  <a:lnTo>
-                    <a:pt x="3437881" y="2896578"/>
-                  </a:lnTo>
-                  <a:lnTo>
-                    <a:pt x="3366258" y="2859489"/>
-                  </a:lnTo>
-                  <a:lnTo>
-                    <a:pt x="3294636" y="2820056"/>
-                  </a:lnTo>
-                  <a:lnTo>
-                    <a:pt x="3223013" y="2778132"/>
-                  </a:lnTo>
-                  <a:lnTo>
-                    <a:pt x="3151391" y="2733560"/>
-                  </a:lnTo>
-                  <a:lnTo>
-                    <a:pt x="3079768" y="2686173"/>
-                  </a:lnTo>
-                  <a:lnTo>
-                    <a:pt x="3008146" y="2647199"/>
-                  </a:lnTo>
-                  <a:lnTo>
-                    <a:pt x="2936523" y="2627200"/>
-                  </a:lnTo>
-                  <a:lnTo>
-                    <a:pt x="2864901" y="2606722"/>
-                  </a:lnTo>
-                  <a:lnTo>
-                    <a:pt x="2793278" y="2585755"/>
-                  </a:lnTo>
-                  <a:lnTo>
-                    <a:pt x="2721655" y="2564286"/>
-                  </a:lnTo>
-                  <a:lnTo>
-                    <a:pt x="2650033" y="2542304"/>
-                  </a:lnTo>
-                  <a:lnTo>
-                    <a:pt x="2578410" y="2519797"/>
-                  </a:lnTo>
-                  <a:lnTo>
-                    <a:pt x="2506788" y="2496752"/>
-                  </a:lnTo>
-                  <a:lnTo>
-                    <a:pt x="2435165" y="2473155"/>
-                  </a:lnTo>
-                  <a:lnTo>
-                    <a:pt x="2363543" y="2448995"/>
-                  </a:lnTo>
-                  <a:lnTo>
-                    <a:pt x="2291920" y="2424257"/>
-                  </a:lnTo>
-                  <a:lnTo>
-                    <a:pt x="2220298" y="2398927"/>
-                  </a:lnTo>
-                  <a:lnTo>
-                    <a:pt x="2148675" y="2372992"/>
-                  </a:lnTo>
-                  <a:lnTo>
-                    <a:pt x="2077053" y="2346437"/>
-                  </a:lnTo>
-                  <a:lnTo>
-                    <a:pt x="2005430" y="2319247"/>
-                  </a:lnTo>
-                  <a:lnTo>
-                    <a:pt x="1933808" y="2291407"/>
-                  </a:lnTo>
-                  <a:lnTo>
-                    <a:pt x="1862185" y="2262901"/>
-                  </a:lnTo>
-                  <a:lnTo>
-                    <a:pt x="1790563" y="2233714"/>
-                  </a:lnTo>
-                  <a:lnTo>
-                    <a:pt x="1718940" y="2203829"/>
-                  </a:lnTo>
-                  <a:lnTo>
-                    <a:pt x="1647318" y="2173230"/>
-                  </a:lnTo>
-                  <a:lnTo>
-                    <a:pt x="1575695" y="2141899"/>
-                  </a:lnTo>
-                  <a:lnTo>
-                    <a:pt x="1504073" y="2109819"/>
-                  </a:lnTo>
-                  <a:lnTo>
-                    <a:pt x="1432450" y="2076973"/>
-                  </a:lnTo>
-                  <a:lnTo>
-                    <a:pt x="1360827" y="2043340"/>
-                  </a:lnTo>
-                  <a:lnTo>
-                    <a:pt x="1289205" y="2008904"/>
-                  </a:lnTo>
-                  <a:lnTo>
-                    <a:pt x="1217582" y="1973645"/>
-                  </a:lnTo>
-                  <a:lnTo>
-                    <a:pt x="1145960" y="1937542"/>
-                  </a:lnTo>
-                  <a:lnTo>
-                    <a:pt x="1074337" y="1900577"/>
-                  </a:lnTo>
-                  <a:lnTo>
-                    <a:pt x="1002715" y="1862728"/>
-                  </a:lnTo>
-                  <a:lnTo>
-                    <a:pt x="931092" y="1823973"/>
-                  </a:lnTo>
-                  <a:lnTo>
-                    <a:pt x="859470" y="1784293"/>
-                  </a:lnTo>
-                  <a:lnTo>
-                    <a:pt x="787847" y="1743664"/>
-                  </a:lnTo>
-                  <a:lnTo>
-                    <a:pt x="716225" y="1702063"/>
-                  </a:lnTo>
-                  <a:lnTo>
-                    <a:pt x="644602" y="1659468"/>
-                  </a:lnTo>
-                  <a:lnTo>
-                    <a:pt x="572980" y="1615854"/>
-                  </a:lnTo>
-                  <a:lnTo>
-                    <a:pt x="501357" y="1571198"/>
-                  </a:lnTo>
-                  <a:lnTo>
-                    <a:pt x="429735" y="1525474"/>
-                  </a:lnTo>
-                  <a:lnTo>
-                    <a:pt x="358112" y="1478657"/>
-                  </a:lnTo>
-                  <a:lnTo>
-                    <a:pt x="286490" y="1430721"/>
-                  </a:lnTo>
-                  <a:lnTo>
-                    <a:pt x="214867" y="1381639"/>
-                  </a:lnTo>
-                  <a:lnTo>
-                    <a:pt x="143245" y="1331383"/>
-                  </a:lnTo>
-                  <a:lnTo>
-                    <a:pt x="71622" y="1279926"/>
-                  </a:lnTo>
-                  <a:lnTo>
-                    <a:pt x="0" y="1227239"/>
+                    <a:pt x="0" y="0"/>
+                  </a:lnTo>
+                  <a:lnTo>
+                    <a:pt x="0" y="0"/>
+                  </a:lnTo>
+                </a:path>
+              </a:pathLst>
+            </a:custGeom>
+            <a:ln w="13550" cap="flat">
+              <a:solidFill>
+                <a:srgbClr val="EBEBEB">
+                  <a:alpha val="100000"/>
+                </a:srgbClr>
+              </a:solidFill>
+              <a:prstDash val="solid"/>
+              <a:round/>
+            </a:ln>
+          </p:spPr>
+          <p:txBody>
+            <a:bodyPr/>
+            <a:lstStyle/>
+            <a:p/>
+          </p:txBody>
+        </p:sp>
+        <p:sp>
+          <p:nvSpPr>
+            <p:cNvPr id="23" name="pg23"/>
+            <p:cNvSpPr/>
+            <p:nvPr/>
+          </p:nvSpPr>
+          <p:spPr>
+            <a:xfrm>
+              <a:off x="1235312" y="2143092"/>
+              <a:ext cx="6964104" cy="1247881"/>
+            </a:xfrm>
+            <a:custGeom>
+              <a:avLst/>
+              <a:pathLst>
+                <a:path w="6964104" h="1247881">
+                  <a:moveTo>
+                    <a:pt x="1331827" y="0"/>
+                  </a:moveTo>
+                  <a:lnTo>
+                    <a:pt x="1336545" y="5303"/>
+                  </a:lnTo>
+                  <a:lnTo>
+                    <a:pt x="1406889" y="79684"/>
+                  </a:lnTo>
+                  <a:lnTo>
+                    <a:pt x="1477234" y="149646"/>
+                  </a:lnTo>
+                  <a:lnTo>
+                    <a:pt x="1547578" y="215450"/>
+                  </a:lnTo>
+                  <a:lnTo>
+                    <a:pt x="1617923" y="277345"/>
+                  </a:lnTo>
+                  <a:lnTo>
+                    <a:pt x="1688267" y="335563"/>
+                  </a:lnTo>
+                  <a:lnTo>
+                    <a:pt x="1758612" y="390322"/>
+                  </a:lnTo>
+                  <a:lnTo>
+                    <a:pt x="1828956" y="441827"/>
+                  </a:lnTo>
+                  <a:lnTo>
+                    <a:pt x="1899301" y="490272"/>
+                  </a:lnTo>
+                  <a:lnTo>
+                    <a:pt x="1969645" y="535838"/>
+                  </a:lnTo>
+                  <a:lnTo>
+                    <a:pt x="2039990" y="578698"/>
+                  </a:lnTo>
+                  <a:lnTo>
+                    <a:pt x="2110334" y="619011"/>
+                  </a:lnTo>
+                  <a:lnTo>
+                    <a:pt x="2180679" y="656928"/>
+                  </a:lnTo>
+                  <a:lnTo>
+                    <a:pt x="2251023" y="692593"/>
+                  </a:lnTo>
+                  <a:lnTo>
+                    <a:pt x="2321368" y="726139"/>
+                  </a:lnTo>
+                  <a:lnTo>
+                    <a:pt x="2391712" y="757692"/>
+                  </a:lnTo>
+                  <a:lnTo>
+                    <a:pt x="2462057" y="787370"/>
+                  </a:lnTo>
+                  <a:lnTo>
+                    <a:pt x="2532401" y="815285"/>
+                  </a:lnTo>
+                  <a:lnTo>
+                    <a:pt x="2602746" y="841541"/>
+                  </a:lnTo>
+                  <a:lnTo>
+                    <a:pt x="2673090" y="866237"/>
+                  </a:lnTo>
+                  <a:lnTo>
+                    <a:pt x="2743435" y="889466"/>
+                  </a:lnTo>
+                  <a:lnTo>
+                    <a:pt x="2813779" y="911315"/>
+                  </a:lnTo>
+                  <a:lnTo>
+                    <a:pt x="2884124" y="931865"/>
+                  </a:lnTo>
+                  <a:lnTo>
+                    <a:pt x="2954468" y="951195"/>
+                  </a:lnTo>
+                  <a:lnTo>
+                    <a:pt x="3024813" y="962360"/>
+                  </a:lnTo>
+                  <a:lnTo>
+                    <a:pt x="3095157" y="969245"/>
+                  </a:lnTo>
+                  <a:lnTo>
+                    <a:pt x="3165502" y="975968"/>
+                  </a:lnTo>
+                  <a:lnTo>
+                    <a:pt x="3235846" y="982535"/>
+                  </a:lnTo>
+                  <a:lnTo>
+                    <a:pt x="3306191" y="988948"/>
+                  </a:lnTo>
+                  <a:lnTo>
+                    <a:pt x="3376535" y="995211"/>
+                  </a:lnTo>
+                  <a:lnTo>
+                    <a:pt x="3446880" y="1001329"/>
+                  </a:lnTo>
+                  <a:lnTo>
+                    <a:pt x="3517224" y="1007303"/>
+                  </a:lnTo>
+                  <a:lnTo>
+                    <a:pt x="3587569" y="1013138"/>
+                  </a:lnTo>
+                  <a:lnTo>
+                    <a:pt x="3657913" y="1018837"/>
+                  </a:lnTo>
+                  <a:lnTo>
+                    <a:pt x="3728257" y="1024402"/>
+                  </a:lnTo>
+                  <a:lnTo>
+                    <a:pt x="3798602" y="1029838"/>
+                  </a:lnTo>
+                  <a:lnTo>
+                    <a:pt x="3868946" y="1035147"/>
+                  </a:lnTo>
+                  <a:lnTo>
+                    <a:pt x="3939291" y="1040331"/>
+                  </a:lnTo>
+                  <a:lnTo>
+                    <a:pt x="4009635" y="1045395"/>
+                  </a:lnTo>
+                  <a:lnTo>
+                    <a:pt x="4079980" y="1050341"/>
+                  </a:lnTo>
+                  <a:lnTo>
+                    <a:pt x="4150324" y="1055171"/>
+                  </a:lnTo>
+                  <a:lnTo>
+                    <a:pt x="4220669" y="1059888"/>
+                  </a:lnTo>
+                  <a:lnTo>
+                    <a:pt x="4291013" y="1064495"/>
+                  </a:lnTo>
+                  <a:lnTo>
+                    <a:pt x="4361358" y="1068994"/>
+                  </a:lnTo>
+                  <a:lnTo>
+                    <a:pt x="4431702" y="1073389"/>
+                  </a:lnTo>
+                  <a:lnTo>
+                    <a:pt x="4502047" y="1077681"/>
+                  </a:lnTo>
+                  <a:lnTo>
+                    <a:pt x="4572391" y="1081872"/>
+                  </a:lnTo>
+                  <a:lnTo>
+                    <a:pt x="4642736" y="1085966"/>
+                  </a:lnTo>
+                  <a:lnTo>
+                    <a:pt x="4713080" y="1089964"/>
+                  </a:lnTo>
+                  <a:lnTo>
+                    <a:pt x="4783425" y="1093869"/>
+                  </a:lnTo>
+                  <a:lnTo>
+                    <a:pt x="4853769" y="1097683"/>
+                  </a:lnTo>
+                  <a:lnTo>
+                    <a:pt x="4924114" y="1101408"/>
+                  </a:lnTo>
+                  <a:lnTo>
+                    <a:pt x="4994458" y="1105045"/>
+                  </a:lnTo>
+                  <a:lnTo>
+                    <a:pt x="5064803" y="1108598"/>
+                  </a:lnTo>
+                  <a:lnTo>
+                    <a:pt x="5135147" y="1112068"/>
+                  </a:lnTo>
+                  <a:lnTo>
+                    <a:pt x="5205492" y="1115456"/>
+                  </a:lnTo>
+                  <a:lnTo>
+                    <a:pt x="5275836" y="1118766"/>
+                  </a:lnTo>
+                  <a:lnTo>
+                    <a:pt x="5346181" y="1121998"/>
+                  </a:lnTo>
+                  <a:lnTo>
+                    <a:pt x="5416525" y="1125155"/>
+                  </a:lnTo>
+                  <a:lnTo>
+                    <a:pt x="5486870" y="1128238"/>
+                  </a:lnTo>
+                  <a:lnTo>
+                    <a:pt x="5557214" y="1131250"/>
+                  </a:lnTo>
+                  <a:lnTo>
+                    <a:pt x="5627559" y="1134190"/>
+                  </a:lnTo>
+                  <a:lnTo>
+                    <a:pt x="5697903" y="1137063"/>
+                  </a:lnTo>
+                  <a:lnTo>
+                    <a:pt x="5768248" y="1139868"/>
+                  </a:lnTo>
+                  <a:lnTo>
+                    <a:pt x="5838592" y="1142607"/>
+                  </a:lnTo>
+                  <a:lnTo>
+                    <a:pt x="5908937" y="1145283"/>
+                  </a:lnTo>
+                  <a:lnTo>
+                    <a:pt x="5979281" y="1147896"/>
+                  </a:lnTo>
+                  <a:lnTo>
+                    <a:pt x="6049626" y="1150448"/>
+                  </a:lnTo>
+                  <a:lnTo>
+                    <a:pt x="6119970" y="1152941"/>
+                  </a:lnTo>
+                  <a:lnTo>
+                    <a:pt x="6190315" y="1155375"/>
+                  </a:lnTo>
+                  <a:lnTo>
+                    <a:pt x="6260659" y="1157753"/>
+                  </a:lnTo>
+                  <a:lnTo>
+                    <a:pt x="6331004" y="1160075"/>
+                  </a:lnTo>
+                  <a:lnTo>
+                    <a:pt x="6401348" y="1162343"/>
+                  </a:lnTo>
+                  <a:lnTo>
+                    <a:pt x="6471693" y="1164558"/>
+                  </a:lnTo>
+                  <a:lnTo>
+                    <a:pt x="6542037" y="1166721"/>
+                  </a:lnTo>
+                  <a:lnTo>
+                    <a:pt x="6612382" y="1168833"/>
+                  </a:lnTo>
+                  <a:lnTo>
+                    <a:pt x="6682726" y="1170897"/>
+                  </a:lnTo>
+                  <a:lnTo>
+                    <a:pt x="6753071" y="1172912"/>
+                  </a:lnTo>
+                  <a:lnTo>
+                    <a:pt x="6823415" y="1174880"/>
+                  </a:lnTo>
+                  <a:lnTo>
+                    <a:pt x="6893760" y="1176802"/>
+                  </a:lnTo>
+                  <a:lnTo>
+                    <a:pt x="6964104" y="1178679"/>
+                  </a:lnTo>
+                  <a:lnTo>
+                    <a:pt x="6964104" y="1247881"/>
+                  </a:lnTo>
+                  <a:lnTo>
+                    <a:pt x="6893760" y="1247293"/>
+                  </a:lnTo>
+                  <a:lnTo>
+                    <a:pt x="6823415" y="1246667"/>
+                  </a:lnTo>
+                  <a:lnTo>
+                    <a:pt x="6753071" y="1246001"/>
+                  </a:lnTo>
+                  <a:lnTo>
+                    <a:pt x="6682726" y="1245294"/>
+                  </a:lnTo>
+                  <a:lnTo>
+                    <a:pt x="6612382" y="1244541"/>
+                  </a:lnTo>
+                  <a:lnTo>
+                    <a:pt x="6542037" y="1243742"/>
+                  </a:lnTo>
+                  <a:lnTo>
+                    <a:pt x="6471693" y="1242892"/>
+                  </a:lnTo>
+                  <a:lnTo>
+                    <a:pt x="6401348" y="1241988"/>
+                  </a:lnTo>
+                  <a:lnTo>
+                    <a:pt x="6331004" y="1241027"/>
+                  </a:lnTo>
+                  <a:lnTo>
+                    <a:pt x="6260659" y="1240005"/>
+                  </a:lnTo>
+                  <a:lnTo>
+                    <a:pt x="6190315" y="1238919"/>
+                  </a:lnTo>
+                  <a:lnTo>
+                    <a:pt x="6119970" y="1237764"/>
+                  </a:lnTo>
+                  <a:lnTo>
+                    <a:pt x="6049626" y="1236536"/>
+                  </a:lnTo>
+                  <a:lnTo>
+                    <a:pt x="5979281" y="1235230"/>
+                  </a:lnTo>
+                  <a:lnTo>
+                    <a:pt x="5908937" y="1233842"/>
+                  </a:lnTo>
+                  <a:lnTo>
+                    <a:pt x="5838592" y="1232367"/>
+                  </a:lnTo>
+                  <a:lnTo>
+                    <a:pt x="5768248" y="1230798"/>
+                  </a:lnTo>
+                  <a:lnTo>
+                    <a:pt x="5697903" y="1229130"/>
+                  </a:lnTo>
+                  <a:lnTo>
+                    <a:pt x="5627559" y="1227357"/>
+                  </a:lnTo>
+                  <a:lnTo>
+                    <a:pt x="5557214" y="1225472"/>
+                  </a:lnTo>
+                  <a:lnTo>
+                    <a:pt x="5486870" y="1223468"/>
+                  </a:lnTo>
+                  <a:lnTo>
+                    <a:pt x="5416525" y="1221337"/>
+                  </a:lnTo>
+                  <a:lnTo>
+                    <a:pt x="5346181" y="1219071"/>
+                  </a:lnTo>
+                  <a:lnTo>
+                    <a:pt x="5275836" y="1216663"/>
+                  </a:lnTo>
+                  <a:lnTo>
+                    <a:pt x="5205492" y="1214102"/>
+                  </a:lnTo>
+                  <a:lnTo>
+                    <a:pt x="5135147" y="1211379"/>
+                  </a:lnTo>
+                  <a:lnTo>
+                    <a:pt x="5064803" y="1208485"/>
+                  </a:lnTo>
+                  <a:lnTo>
+                    <a:pt x="4994458" y="1205407"/>
+                  </a:lnTo>
+                  <a:lnTo>
+                    <a:pt x="4924114" y="1202136"/>
+                  </a:lnTo>
+                  <a:lnTo>
+                    <a:pt x="4853769" y="1198657"/>
+                  </a:lnTo>
+                  <a:lnTo>
+                    <a:pt x="4783425" y="1194959"/>
+                  </a:lnTo>
+                  <a:lnTo>
+                    <a:pt x="4713080" y="1191027"/>
+                  </a:lnTo>
+                  <a:lnTo>
+                    <a:pt x="4642736" y="1186847"/>
+                  </a:lnTo>
+                  <a:lnTo>
+                    <a:pt x="4572391" y="1182403"/>
+                  </a:lnTo>
+                  <a:lnTo>
+                    <a:pt x="4502047" y="1177679"/>
+                  </a:lnTo>
+                  <a:lnTo>
+                    <a:pt x="4431702" y="1172655"/>
+                  </a:lnTo>
+                  <a:lnTo>
+                    <a:pt x="4361358" y="1167315"/>
+                  </a:lnTo>
+                  <a:lnTo>
+                    <a:pt x="4291013" y="1161637"/>
+                  </a:lnTo>
+                  <a:lnTo>
+                    <a:pt x="4220669" y="1155600"/>
+                  </a:lnTo>
+                  <a:lnTo>
+                    <a:pt x="4150324" y="1149182"/>
+                  </a:lnTo>
+                  <a:lnTo>
+                    <a:pt x="4079980" y="1142359"/>
+                  </a:lnTo>
+                  <a:lnTo>
+                    <a:pt x="4009635" y="1135105"/>
+                  </a:lnTo>
+                  <a:lnTo>
+                    <a:pt x="3939291" y="1127392"/>
+                  </a:lnTo>
+                  <a:lnTo>
+                    <a:pt x="3868946" y="1119192"/>
+                  </a:lnTo>
+                  <a:lnTo>
+                    <a:pt x="3798602" y="1110474"/>
+                  </a:lnTo>
+                  <a:lnTo>
+                    <a:pt x="3728257" y="1101206"/>
+                  </a:lnTo>
+                  <a:lnTo>
+                    <a:pt x="3657913" y="1091352"/>
+                  </a:lnTo>
+                  <a:lnTo>
+                    <a:pt x="3587569" y="1080876"/>
+                  </a:lnTo>
+                  <a:lnTo>
+                    <a:pt x="3517224" y="1069738"/>
+                  </a:lnTo>
+                  <a:lnTo>
+                    <a:pt x="3446880" y="1057896"/>
+                  </a:lnTo>
+                  <a:lnTo>
+                    <a:pt x="3376535" y="1045307"/>
+                  </a:lnTo>
+                  <a:lnTo>
+                    <a:pt x="3306191" y="1031922"/>
+                  </a:lnTo>
+                  <a:lnTo>
+                    <a:pt x="3235846" y="1017691"/>
+                  </a:lnTo>
+                  <a:lnTo>
+                    <a:pt x="3165502" y="1002562"/>
+                  </a:lnTo>
+                  <a:lnTo>
+                    <a:pt x="3095157" y="986477"/>
+                  </a:lnTo>
+                  <a:lnTo>
+                    <a:pt x="3024813" y="969376"/>
+                  </a:lnTo>
+                  <a:lnTo>
+                    <a:pt x="2954468" y="955312"/>
+                  </a:lnTo>
+                  <a:lnTo>
+                    <a:pt x="2884124" y="948094"/>
+                  </a:lnTo>
+                  <a:lnTo>
+                    <a:pt x="2813779" y="940704"/>
+                  </a:lnTo>
+                  <a:lnTo>
+                    <a:pt x="2743435" y="933138"/>
+                  </a:lnTo>
+                  <a:lnTo>
+                    <a:pt x="2673090" y="925390"/>
+                  </a:lnTo>
+                  <a:lnTo>
+                    <a:pt x="2602746" y="917457"/>
+                  </a:lnTo>
+                  <a:lnTo>
+                    <a:pt x="2532401" y="909335"/>
+                  </a:lnTo>
+                  <a:lnTo>
+                    <a:pt x="2462057" y="901019"/>
+                  </a:lnTo>
+                  <a:lnTo>
+                    <a:pt x="2391712" y="892503"/>
+                  </a:lnTo>
+                  <a:lnTo>
+                    <a:pt x="2321368" y="883784"/>
+                  </a:lnTo>
+                  <a:lnTo>
+                    <a:pt x="2251023" y="874857"/>
+                  </a:lnTo>
+                  <a:lnTo>
+                    <a:pt x="2180679" y="865716"/>
+                  </a:lnTo>
+                  <a:lnTo>
+                    <a:pt x="2110334" y="856357"/>
+                  </a:lnTo>
+                  <a:lnTo>
+                    <a:pt x="2039990" y="846774"/>
+                  </a:lnTo>
+                  <a:lnTo>
+                    <a:pt x="1969645" y="836961"/>
+                  </a:lnTo>
+                  <a:lnTo>
+                    <a:pt x="1899301" y="826915"/>
+                  </a:lnTo>
+                  <a:lnTo>
+                    <a:pt x="1828956" y="816628"/>
+                  </a:lnTo>
+                  <a:lnTo>
+                    <a:pt x="1758612" y="806095"/>
+                  </a:lnTo>
+                  <a:lnTo>
+                    <a:pt x="1688267" y="795310"/>
+                  </a:lnTo>
+                  <a:lnTo>
+                    <a:pt x="1617923" y="784267"/>
+                  </a:lnTo>
+                  <a:lnTo>
+                    <a:pt x="1547578" y="772961"/>
+                  </a:lnTo>
+                  <a:lnTo>
+                    <a:pt x="1477234" y="761384"/>
+                  </a:lnTo>
+                  <a:lnTo>
+                    <a:pt x="1406889" y="749530"/>
+                  </a:lnTo>
+                  <a:lnTo>
+                    <a:pt x="1336545" y="737393"/>
+                  </a:lnTo>
+                  <a:lnTo>
+                    <a:pt x="1266200" y="724966"/>
+                  </a:lnTo>
+                  <a:lnTo>
+                    <a:pt x="1195856" y="712242"/>
+                  </a:lnTo>
+                  <a:lnTo>
+                    <a:pt x="1125511" y="699213"/>
+                  </a:lnTo>
+                  <a:lnTo>
+                    <a:pt x="1055167" y="685873"/>
+                  </a:lnTo>
+                  <a:lnTo>
+                    <a:pt x="984822" y="672214"/>
+                  </a:lnTo>
+                  <a:lnTo>
+                    <a:pt x="914478" y="658229"/>
+                  </a:lnTo>
+                  <a:lnTo>
+                    <a:pt x="844133" y="643909"/>
+                  </a:lnTo>
+                  <a:lnTo>
+                    <a:pt x="773789" y="629247"/>
+                  </a:lnTo>
+                  <a:lnTo>
+                    <a:pt x="703444" y="614234"/>
+                  </a:lnTo>
+                  <a:lnTo>
+                    <a:pt x="633100" y="598863"/>
+                  </a:lnTo>
+                  <a:lnTo>
+                    <a:pt x="562755" y="583123"/>
+                  </a:lnTo>
+                  <a:lnTo>
+                    <a:pt x="492411" y="567008"/>
+                  </a:lnTo>
+                  <a:lnTo>
+                    <a:pt x="422066" y="550507"/>
+                  </a:lnTo>
+                  <a:lnTo>
+                    <a:pt x="351722" y="533612"/>
+                  </a:lnTo>
+                  <a:lnTo>
+                    <a:pt x="281377" y="516313"/>
+                  </a:lnTo>
+                  <a:lnTo>
+                    <a:pt x="211033" y="498601"/>
+                  </a:lnTo>
+                  <a:lnTo>
+                    <a:pt x="140688" y="480465"/>
+                  </a:lnTo>
+                  <a:lnTo>
+                    <a:pt x="70344" y="461895"/>
+                  </a:lnTo>
+                  <a:lnTo>
+                    <a:pt x="0" y="442881"/>
                   </a:lnTo>
                   <a:close/>
                 </a:path>
@@ -3616,589 +3651,264 @@
         </p:sp>
         <p:sp>
           <p:nvSpPr>
-            <p:cNvPr id="23" name="pl23"/>
-            <p:cNvSpPr/>
-            <p:nvPr/>
-          </p:nvSpPr>
-          <p:spPr>
-            <a:xfrm>
-              <a:off x="2528073" y="2073503"/>
-              <a:ext cx="5734605" cy="3266158"/>
-            </a:xfrm>
-            <a:custGeom>
-              <a:avLst/>
-              <a:pathLst>
-                <a:path w="5734605" h="3266158">
-                  <a:moveTo>
-                    <a:pt x="0" y="0"/>
-                  </a:moveTo>
-                  <a:lnTo>
-                    <a:pt x="4803" y="14697"/>
-                  </a:lnTo>
-                  <a:lnTo>
-                    <a:pt x="76426" y="220808"/>
-                  </a:lnTo>
-                  <a:lnTo>
-                    <a:pt x="148048" y="414674"/>
-                  </a:lnTo>
-                  <a:lnTo>
-                    <a:pt x="219671" y="597021"/>
-                  </a:lnTo>
-                  <a:lnTo>
-                    <a:pt x="291293" y="768534"/>
-                  </a:lnTo>
-                  <a:lnTo>
-                    <a:pt x="362916" y="929856"/>
-                  </a:lnTo>
-                  <a:lnTo>
-                    <a:pt x="434539" y="1081594"/>
-                  </a:lnTo>
-                  <a:lnTo>
-                    <a:pt x="506161" y="1224317"/>
-                  </a:lnTo>
-                  <a:lnTo>
-                    <a:pt x="577784" y="1358559"/>
-                  </a:lnTo>
-                  <a:lnTo>
-                    <a:pt x="649406" y="1484826"/>
-                  </a:lnTo>
-                  <a:lnTo>
-                    <a:pt x="721029" y="1603590"/>
-                  </a:lnTo>
-                  <a:lnTo>
-                    <a:pt x="792651" y="1715299"/>
-                  </a:lnTo>
-                  <a:lnTo>
-                    <a:pt x="864274" y="1820370"/>
-                  </a:lnTo>
-                  <a:lnTo>
-                    <a:pt x="935896" y="1919198"/>
-                  </a:lnTo>
-                  <a:lnTo>
-                    <a:pt x="1007519" y="2012155"/>
-                  </a:lnTo>
-                  <a:lnTo>
-                    <a:pt x="1079141" y="2099589"/>
-                  </a:lnTo>
-                  <a:lnTo>
-                    <a:pt x="1150764" y="2181827"/>
-                  </a:lnTo>
-                  <a:lnTo>
-                    <a:pt x="1222386" y="2259180"/>
-                  </a:lnTo>
-                  <a:lnTo>
-                    <a:pt x="1294009" y="2331937"/>
-                  </a:lnTo>
-                  <a:lnTo>
-                    <a:pt x="1365631" y="2400371"/>
-                  </a:lnTo>
-                  <a:lnTo>
-                    <a:pt x="1437254" y="2464739"/>
-                  </a:lnTo>
-                  <a:lnTo>
-                    <a:pt x="1508876" y="2525283"/>
-                  </a:lnTo>
-                  <a:lnTo>
-                    <a:pt x="1580499" y="2582229"/>
-                  </a:lnTo>
-                  <a:lnTo>
-                    <a:pt x="1652121" y="2635792"/>
-                  </a:lnTo>
-                  <a:lnTo>
-                    <a:pt x="1723744" y="2666732"/>
-                  </a:lnTo>
-                  <a:lnTo>
-                    <a:pt x="1795367" y="2685808"/>
-                  </a:lnTo>
-                  <a:lnTo>
-                    <a:pt x="1866989" y="2704439"/>
-                  </a:lnTo>
-                  <a:lnTo>
-                    <a:pt x="1938612" y="2722635"/>
-                  </a:lnTo>
-                  <a:lnTo>
-                    <a:pt x="2010234" y="2740407"/>
-                  </a:lnTo>
-                  <a:lnTo>
-                    <a:pt x="2081857" y="2757763"/>
-                  </a:lnTo>
-                  <a:lnTo>
-                    <a:pt x="2153479" y="2774714"/>
-                  </a:lnTo>
-                  <a:lnTo>
-                    <a:pt x="2225102" y="2791269"/>
-                  </a:lnTo>
-                  <a:lnTo>
-                    <a:pt x="2296724" y="2807438"/>
-                  </a:lnTo>
-                  <a:lnTo>
-                    <a:pt x="2368347" y="2823229"/>
-                  </a:lnTo>
-                  <a:lnTo>
-                    <a:pt x="2439969" y="2838651"/>
-                  </a:lnTo>
-                  <a:lnTo>
-                    <a:pt x="2511592" y="2853714"/>
-                  </a:lnTo>
-                  <a:lnTo>
-                    <a:pt x="2583214" y="2868424"/>
-                  </a:lnTo>
-                  <a:lnTo>
-                    <a:pt x="2654837" y="2882792"/>
-                  </a:lnTo>
-                  <a:lnTo>
-                    <a:pt x="2726459" y="2896823"/>
-                  </a:lnTo>
-                  <a:lnTo>
-                    <a:pt x="2798082" y="2910528"/>
-                  </a:lnTo>
-                  <a:lnTo>
-                    <a:pt x="2869704" y="2923912"/>
-                  </a:lnTo>
-                  <a:lnTo>
-                    <a:pt x="2941327" y="2936983"/>
-                  </a:lnTo>
-                  <a:lnTo>
-                    <a:pt x="3012949" y="2949750"/>
-                  </a:lnTo>
-                  <a:lnTo>
-                    <a:pt x="3084572" y="2962218"/>
-                  </a:lnTo>
-                  <a:lnTo>
-                    <a:pt x="3156195" y="2974395"/>
-                  </a:lnTo>
-                  <a:lnTo>
-                    <a:pt x="3227817" y="2986288"/>
-                  </a:lnTo>
-                  <a:lnTo>
-                    <a:pt x="3299440" y="2997903"/>
-                  </a:lnTo>
-                  <a:lnTo>
-                    <a:pt x="3371062" y="3009247"/>
-                  </a:lnTo>
-                  <a:lnTo>
-                    <a:pt x="3442685" y="3020326"/>
-                  </a:lnTo>
-                  <a:lnTo>
-                    <a:pt x="3514307" y="3031147"/>
-                  </a:lnTo>
-                  <a:lnTo>
-                    <a:pt x="3585930" y="3041715"/>
-                  </a:lnTo>
-                  <a:lnTo>
-                    <a:pt x="3657552" y="3052036"/>
-                  </a:lnTo>
-                  <a:lnTo>
-                    <a:pt x="3729175" y="3062116"/>
-                  </a:lnTo>
-                  <a:lnTo>
-                    <a:pt x="3800797" y="3071960"/>
-                  </a:lnTo>
-                  <a:lnTo>
-                    <a:pt x="3872420" y="3081575"/>
-                  </a:lnTo>
-                  <a:lnTo>
-                    <a:pt x="3944042" y="3090965"/>
-                  </a:lnTo>
-                  <a:lnTo>
-                    <a:pt x="4015665" y="3100136"/>
-                  </a:lnTo>
-                  <a:lnTo>
-                    <a:pt x="4087287" y="3109093"/>
-                  </a:lnTo>
-                  <a:lnTo>
-                    <a:pt x="4158910" y="3117841"/>
-                  </a:lnTo>
-                  <a:lnTo>
-                    <a:pt x="4230532" y="3126385"/>
-                  </a:lnTo>
-                  <a:lnTo>
-                    <a:pt x="4302155" y="3134729"/>
-                  </a:lnTo>
-                  <a:lnTo>
-                    <a:pt x="4373777" y="3142878"/>
-                  </a:lnTo>
-                  <a:lnTo>
-                    <a:pt x="4445400" y="3150837"/>
-                  </a:lnTo>
-                  <a:lnTo>
-                    <a:pt x="4517022" y="3158610"/>
-                  </a:lnTo>
-                  <a:lnTo>
-                    <a:pt x="4588645" y="3166202"/>
-                  </a:lnTo>
-                  <a:lnTo>
-                    <a:pt x="4660268" y="3173616"/>
-                  </a:lnTo>
-                  <a:lnTo>
-                    <a:pt x="4731890" y="3180857"/>
-                  </a:lnTo>
-                  <a:lnTo>
-                    <a:pt x="4803513" y="3187930"/>
-                  </a:lnTo>
-                  <a:lnTo>
-                    <a:pt x="4875135" y="3194837"/>
-                  </a:lnTo>
-                  <a:lnTo>
-                    <a:pt x="4946758" y="3201582"/>
-                  </a:lnTo>
-                  <a:lnTo>
-                    <a:pt x="5018380" y="3208171"/>
-                  </a:lnTo>
-                  <a:lnTo>
-                    <a:pt x="5090003" y="3214605"/>
-                  </a:lnTo>
-                  <a:lnTo>
-                    <a:pt x="5161625" y="3220889"/>
-                  </a:lnTo>
-                  <a:lnTo>
-                    <a:pt x="5233248" y="3227027"/>
-                  </a:lnTo>
-                  <a:lnTo>
-                    <a:pt x="5304870" y="3233021"/>
-                  </a:lnTo>
-                  <a:lnTo>
-                    <a:pt x="5376493" y="3238875"/>
-                  </a:lnTo>
-                  <a:lnTo>
-                    <a:pt x="5448115" y="3244593"/>
-                  </a:lnTo>
-                  <a:lnTo>
-                    <a:pt x="5519738" y="3250177"/>
-                  </a:lnTo>
-                  <a:lnTo>
-                    <a:pt x="5591360" y="3255630"/>
-                  </a:lnTo>
-                  <a:lnTo>
-                    <a:pt x="5662983" y="3260957"/>
-                  </a:lnTo>
-                  <a:lnTo>
-                    <a:pt x="5734605" y="3266158"/>
-                  </a:lnTo>
-                </a:path>
-              </a:pathLst>
-            </a:custGeom>
-          </p:spPr>
-          <p:txBody>
-            <a:bodyPr/>
-            <a:lstStyle/>
-            <a:p/>
-          </p:txBody>
-        </p:sp>
-        <p:sp>
-          <p:nvSpPr>
             <p:cNvPr id="24" name="pl24"/>
             <p:cNvSpPr/>
             <p:nvPr/>
           </p:nvSpPr>
           <p:spPr>
             <a:xfrm>
-              <a:off x="1172049" y="3300742"/>
-              <a:ext cx="7090630" cy="2230680"/>
+              <a:off x="2567139" y="2143092"/>
+              <a:ext cx="5632277" cy="1178679"/>
             </a:xfrm>
             <a:custGeom>
               <a:avLst/>
               <a:pathLst>
-                <a:path w="7090630" h="2230680">
+                <a:path w="5632277" h="1178679">
                   <a:moveTo>
-                    <a:pt x="7090630" y="2230680"/>
+                    <a:pt x="0" y="0"/>
                   </a:moveTo>
                   <a:lnTo>
-                    <a:pt x="7019007" y="2229049"/>
-                  </a:lnTo>
-                  <a:lnTo>
-                    <a:pt x="6947385" y="2227314"/>
-                  </a:lnTo>
-                  <a:lnTo>
-                    <a:pt x="6875762" y="2225470"/>
-                  </a:lnTo>
-                  <a:lnTo>
-                    <a:pt x="6804139" y="2223509"/>
-                  </a:lnTo>
-                  <a:lnTo>
-                    <a:pt x="6732517" y="2221425"/>
-                  </a:lnTo>
-                  <a:lnTo>
-                    <a:pt x="6660894" y="2219209"/>
-                  </a:lnTo>
-                  <a:lnTo>
-                    <a:pt x="6589272" y="2216853"/>
-                  </a:lnTo>
-                  <a:lnTo>
-                    <a:pt x="6517649" y="2214348"/>
-                  </a:lnTo>
-                  <a:lnTo>
-                    <a:pt x="6446027" y="2211685"/>
-                  </a:lnTo>
-                  <a:lnTo>
-                    <a:pt x="6374404" y="2208854"/>
-                  </a:lnTo>
-                  <a:lnTo>
-                    <a:pt x="6302782" y="2205844"/>
-                  </a:lnTo>
-                  <a:lnTo>
-                    <a:pt x="6231159" y="2202643"/>
-                  </a:lnTo>
-                  <a:lnTo>
-                    <a:pt x="6159537" y="2199241"/>
-                  </a:lnTo>
-                  <a:lnTo>
-                    <a:pt x="6087914" y="2195624"/>
-                  </a:lnTo>
-                  <a:lnTo>
-                    <a:pt x="6016292" y="2191778"/>
-                  </a:lnTo>
-                  <a:lnTo>
-                    <a:pt x="5944669" y="2187689"/>
-                  </a:lnTo>
-                  <a:lnTo>
-                    <a:pt x="5873047" y="2183342"/>
-                  </a:lnTo>
-                  <a:lnTo>
-                    <a:pt x="5801424" y="2178720"/>
-                  </a:lnTo>
-                  <a:lnTo>
-                    <a:pt x="5729802" y="2173807"/>
-                  </a:lnTo>
-                  <a:lnTo>
-                    <a:pt x="5658179" y="2168583"/>
-                  </a:lnTo>
-                  <a:lnTo>
-                    <a:pt x="5586557" y="2163029"/>
-                  </a:lnTo>
-                  <a:lnTo>
-                    <a:pt x="5514934" y="2157124"/>
-                  </a:lnTo>
-                  <a:lnTo>
-                    <a:pt x="5443311" y="2150846"/>
-                  </a:lnTo>
-                  <a:lnTo>
-                    <a:pt x="5371689" y="2144172"/>
-                  </a:lnTo>
-                  <a:lnTo>
-                    <a:pt x="5300066" y="2137076"/>
-                  </a:lnTo>
-                  <a:lnTo>
-                    <a:pt x="5228444" y="2129531"/>
-                  </a:lnTo>
-                  <a:lnTo>
-                    <a:pt x="5156821" y="2121511"/>
-                  </a:lnTo>
-                  <a:lnTo>
-                    <a:pt x="5085199" y="2112983"/>
-                  </a:lnTo>
-                  <a:lnTo>
-                    <a:pt x="5013576" y="2103917"/>
-                  </a:lnTo>
-                  <a:lnTo>
-                    <a:pt x="4941954" y="2094279"/>
-                  </a:lnTo>
-                  <a:lnTo>
-                    <a:pt x="4870331" y="2084031"/>
-                  </a:lnTo>
-                  <a:lnTo>
-                    <a:pt x="4798709" y="2073136"/>
-                  </a:lnTo>
-                  <a:lnTo>
-                    <a:pt x="4727086" y="2061553"/>
-                  </a:lnTo>
-                  <a:lnTo>
-                    <a:pt x="4655464" y="2049238"/>
-                  </a:lnTo>
-                  <a:lnTo>
-                    <a:pt x="4583841" y="2036146"/>
-                  </a:lnTo>
-                  <a:lnTo>
-                    <a:pt x="4512219" y="2022226"/>
-                  </a:lnTo>
-                  <a:lnTo>
-                    <a:pt x="4440596" y="2007427"/>
-                  </a:lnTo>
-                  <a:lnTo>
-                    <a:pt x="4368974" y="1991693"/>
-                  </a:lnTo>
-                  <a:lnTo>
-                    <a:pt x="4297351" y="1974966"/>
-                  </a:lnTo>
-                  <a:lnTo>
-                    <a:pt x="4225729" y="1957181"/>
-                  </a:lnTo>
-                  <a:lnTo>
-                    <a:pt x="4154106" y="1938274"/>
-                  </a:lnTo>
-                  <a:lnTo>
-                    <a:pt x="4082483" y="1918172"/>
-                  </a:lnTo>
-                  <a:lnTo>
-                    <a:pt x="4010861" y="1896800"/>
-                  </a:lnTo>
-                  <a:lnTo>
-                    <a:pt x="3939238" y="1874078"/>
-                  </a:lnTo>
-                  <a:lnTo>
-                    <a:pt x="3867616" y="1849921"/>
-                  </a:lnTo>
-                  <a:lnTo>
-                    <a:pt x="3795993" y="1824238"/>
-                  </a:lnTo>
-                  <a:lnTo>
-                    <a:pt x="3724371" y="1796933"/>
-                  </a:lnTo>
-                  <a:lnTo>
-                    <a:pt x="3652748" y="1767903"/>
-                  </a:lnTo>
-                  <a:lnTo>
-                    <a:pt x="3581126" y="1737039"/>
-                  </a:lnTo>
-                  <a:lnTo>
-                    <a:pt x="3509503" y="1704225"/>
-                  </a:lnTo>
-                  <a:lnTo>
-                    <a:pt x="3437881" y="1669339"/>
-                  </a:lnTo>
-                  <a:lnTo>
-                    <a:pt x="3366258" y="1632249"/>
-                  </a:lnTo>
-                  <a:lnTo>
-                    <a:pt x="3294636" y="1592817"/>
-                  </a:lnTo>
-                  <a:lnTo>
-                    <a:pt x="3223013" y="1550893"/>
-                  </a:lnTo>
-                  <a:lnTo>
-                    <a:pt x="3151391" y="1506321"/>
-                  </a:lnTo>
-                  <a:lnTo>
-                    <a:pt x="3079768" y="1458934"/>
-                  </a:lnTo>
-                  <a:lnTo>
-                    <a:pt x="3008146" y="1419960"/>
-                  </a:lnTo>
-                  <a:lnTo>
-                    <a:pt x="2936523" y="1399960"/>
-                  </a:lnTo>
-                  <a:lnTo>
-                    <a:pt x="2864901" y="1379483"/>
-                  </a:lnTo>
-                  <a:lnTo>
-                    <a:pt x="2793278" y="1358515"/>
-                  </a:lnTo>
-                  <a:lnTo>
-                    <a:pt x="2721655" y="1337047"/>
-                  </a:lnTo>
-                  <a:lnTo>
-                    <a:pt x="2650033" y="1315065"/>
-                  </a:lnTo>
-                  <a:lnTo>
-                    <a:pt x="2578410" y="1292558"/>
-                  </a:lnTo>
-                  <a:lnTo>
-                    <a:pt x="2506788" y="1269512"/>
-                  </a:lnTo>
-                  <a:lnTo>
-                    <a:pt x="2435165" y="1245916"/>
-                  </a:lnTo>
-                  <a:lnTo>
-                    <a:pt x="2363543" y="1221756"/>
-                  </a:lnTo>
-                  <a:lnTo>
-                    <a:pt x="2291920" y="1197017"/>
-                  </a:lnTo>
-                  <a:lnTo>
-                    <a:pt x="2220298" y="1171688"/>
-                  </a:lnTo>
-                  <a:lnTo>
-                    <a:pt x="2148675" y="1145753"/>
-                  </a:lnTo>
-                  <a:lnTo>
-                    <a:pt x="2077053" y="1119198"/>
-                  </a:lnTo>
-                  <a:lnTo>
-                    <a:pt x="2005430" y="1092008"/>
-                  </a:lnTo>
-                  <a:lnTo>
-                    <a:pt x="1933808" y="1064168"/>
-                  </a:lnTo>
-                  <a:lnTo>
-                    <a:pt x="1862185" y="1035662"/>
-                  </a:lnTo>
-                  <a:lnTo>
-                    <a:pt x="1790563" y="1006475"/>
-                  </a:lnTo>
-                  <a:lnTo>
-                    <a:pt x="1718940" y="976590"/>
-                  </a:lnTo>
-                  <a:lnTo>
-                    <a:pt x="1647318" y="945991"/>
-                  </a:lnTo>
-                  <a:lnTo>
-                    <a:pt x="1575695" y="914660"/>
-                  </a:lnTo>
-                  <a:lnTo>
-                    <a:pt x="1504073" y="882580"/>
-                  </a:lnTo>
-                  <a:lnTo>
-                    <a:pt x="1432450" y="849733"/>
-                  </a:lnTo>
-                  <a:lnTo>
-                    <a:pt x="1360827" y="816101"/>
-                  </a:lnTo>
-                  <a:lnTo>
-                    <a:pt x="1289205" y="781665"/>
-                  </a:lnTo>
-                  <a:lnTo>
-                    <a:pt x="1217582" y="746406"/>
-                  </a:lnTo>
-                  <a:lnTo>
-                    <a:pt x="1145960" y="710303"/>
-                  </a:lnTo>
-                  <a:lnTo>
-                    <a:pt x="1074337" y="673338"/>
-                  </a:lnTo>
-                  <a:lnTo>
-                    <a:pt x="1002715" y="635488"/>
-                  </a:lnTo>
-                  <a:lnTo>
-                    <a:pt x="931092" y="596734"/>
-                  </a:lnTo>
-                  <a:lnTo>
-                    <a:pt x="859470" y="557054"/>
-                  </a:lnTo>
-                  <a:lnTo>
-                    <a:pt x="787847" y="516424"/>
-                  </a:lnTo>
-                  <a:lnTo>
-                    <a:pt x="716225" y="474824"/>
-                  </a:lnTo>
-                  <a:lnTo>
-                    <a:pt x="644602" y="432229"/>
-                  </a:lnTo>
-                  <a:lnTo>
-                    <a:pt x="572980" y="388615"/>
-                  </a:lnTo>
-                  <a:lnTo>
-                    <a:pt x="501357" y="343959"/>
-                  </a:lnTo>
-                  <a:lnTo>
-                    <a:pt x="429735" y="298235"/>
-                  </a:lnTo>
-                  <a:lnTo>
-                    <a:pt x="358112" y="251418"/>
-                  </a:lnTo>
-                  <a:lnTo>
-                    <a:pt x="286490" y="203482"/>
-                  </a:lnTo>
-                  <a:lnTo>
-                    <a:pt x="214867" y="154400"/>
-                  </a:lnTo>
-                  <a:lnTo>
-                    <a:pt x="143245" y="104144"/>
-                  </a:lnTo>
-                  <a:lnTo>
-                    <a:pt x="71622" y="52687"/>
-                  </a:lnTo>
-                  <a:lnTo>
-                    <a:pt x="0" y="0"/>
+                    <a:pt x="4718" y="5303"/>
+                  </a:lnTo>
+                  <a:lnTo>
+                    <a:pt x="75062" y="79684"/>
+                  </a:lnTo>
+                  <a:lnTo>
+                    <a:pt x="145407" y="149646"/>
+                  </a:lnTo>
+                  <a:lnTo>
+                    <a:pt x="215751" y="215450"/>
+                  </a:lnTo>
+                  <a:lnTo>
+                    <a:pt x="286096" y="277345"/>
+                  </a:lnTo>
+                  <a:lnTo>
+                    <a:pt x="356440" y="335563"/>
+                  </a:lnTo>
+                  <a:lnTo>
+                    <a:pt x="426785" y="390322"/>
+                  </a:lnTo>
+                  <a:lnTo>
+                    <a:pt x="497129" y="441827"/>
+                  </a:lnTo>
+                  <a:lnTo>
+                    <a:pt x="567474" y="490272"/>
+                  </a:lnTo>
+                  <a:lnTo>
+                    <a:pt x="637818" y="535838"/>
+                  </a:lnTo>
+                  <a:lnTo>
+                    <a:pt x="708163" y="578698"/>
+                  </a:lnTo>
+                  <a:lnTo>
+                    <a:pt x="778507" y="619011"/>
+                  </a:lnTo>
+                  <a:lnTo>
+                    <a:pt x="848852" y="656928"/>
+                  </a:lnTo>
+                  <a:lnTo>
+                    <a:pt x="919196" y="692593"/>
+                  </a:lnTo>
+                  <a:lnTo>
+                    <a:pt x="989540" y="726139"/>
+                  </a:lnTo>
+                  <a:lnTo>
+                    <a:pt x="1059885" y="757692"/>
+                  </a:lnTo>
+                  <a:lnTo>
+                    <a:pt x="1130229" y="787370"/>
+                  </a:lnTo>
+                  <a:lnTo>
+                    <a:pt x="1200574" y="815285"/>
+                  </a:lnTo>
+                  <a:lnTo>
+                    <a:pt x="1270918" y="841541"/>
+                  </a:lnTo>
+                  <a:lnTo>
+                    <a:pt x="1341263" y="866237"/>
+                  </a:lnTo>
+                  <a:lnTo>
+                    <a:pt x="1411607" y="889466"/>
+                  </a:lnTo>
+                  <a:lnTo>
+                    <a:pt x="1481952" y="911315"/>
+                  </a:lnTo>
+                  <a:lnTo>
+                    <a:pt x="1552296" y="931865"/>
+                  </a:lnTo>
+                  <a:lnTo>
+                    <a:pt x="1622641" y="951195"/>
+                  </a:lnTo>
+                  <a:lnTo>
+                    <a:pt x="1692985" y="962360"/>
+                  </a:lnTo>
+                  <a:lnTo>
+                    <a:pt x="1763330" y="969245"/>
+                  </a:lnTo>
+                  <a:lnTo>
+                    <a:pt x="1833674" y="975968"/>
+                  </a:lnTo>
+                  <a:lnTo>
+                    <a:pt x="1904019" y="982535"/>
+                  </a:lnTo>
+                  <a:lnTo>
+                    <a:pt x="1974363" y="988948"/>
+                  </a:lnTo>
+                  <a:lnTo>
+                    <a:pt x="2044708" y="995211"/>
+                  </a:lnTo>
+                  <a:lnTo>
+                    <a:pt x="2115052" y="1001329"/>
+                  </a:lnTo>
+                  <a:lnTo>
+                    <a:pt x="2185397" y="1007303"/>
+                  </a:lnTo>
+                  <a:lnTo>
+                    <a:pt x="2255741" y="1013138"/>
+                  </a:lnTo>
+                  <a:lnTo>
+                    <a:pt x="2326086" y="1018837"/>
+                  </a:lnTo>
+                  <a:lnTo>
+                    <a:pt x="2396430" y="1024402"/>
+                  </a:lnTo>
+                  <a:lnTo>
+                    <a:pt x="2466775" y="1029838"/>
+                  </a:lnTo>
+                  <a:lnTo>
+                    <a:pt x="2537119" y="1035147"/>
+                  </a:lnTo>
+                  <a:lnTo>
+                    <a:pt x="2607464" y="1040331"/>
+                  </a:lnTo>
+                  <a:lnTo>
+                    <a:pt x="2677808" y="1045395"/>
+                  </a:lnTo>
+                  <a:lnTo>
+                    <a:pt x="2748153" y="1050341"/>
+                  </a:lnTo>
+                  <a:lnTo>
+                    <a:pt x="2818497" y="1055171"/>
+                  </a:lnTo>
+                  <a:lnTo>
+                    <a:pt x="2888842" y="1059888"/>
+                  </a:lnTo>
+                  <a:lnTo>
+                    <a:pt x="2959186" y="1064495"/>
+                  </a:lnTo>
+                  <a:lnTo>
+                    <a:pt x="3029531" y="1068994"/>
+                  </a:lnTo>
+                  <a:lnTo>
+                    <a:pt x="3099875" y="1073389"/>
+                  </a:lnTo>
+                  <a:lnTo>
+                    <a:pt x="3170220" y="1077681"/>
+                  </a:lnTo>
+                  <a:lnTo>
+                    <a:pt x="3240564" y="1081872"/>
+                  </a:lnTo>
+                  <a:lnTo>
+                    <a:pt x="3310909" y="1085966"/>
+                  </a:lnTo>
+                  <a:lnTo>
+                    <a:pt x="3381253" y="1089964"/>
+                  </a:lnTo>
+                  <a:lnTo>
+                    <a:pt x="3451598" y="1093869"/>
+                  </a:lnTo>
+                  <a:lnTo>
+                    <a:pt x="3521942" y="1097683"/>
+                  </a:lnTo>
+                  <a:lnTo>
+                    <a:pt x="3592287" y="1101408"/>
+                  </a:lnTo>
+                  <a:lnTo>
+                    <a:pt x="3662631" y="1105045"/>
+                  </a:lnTo>
+                  <a:lnTo>
+                    <a:pt x="3732976" y="1108598"/>
+                  </a:lnTo>
+                  <a:lnTo>
+                    <a:pt x="3803320" y="1112068"/>
+                  </a:lnTo>
+                  <a:lnTo>
+                    <a:pt x="3873665" y="1115456"/>
+                  </a:lnTo>
+                  <a:lnTo>
+                    <a:pt x="3944009" y="1118766"/>
+                  </a:lnTo>
+                  <a:lnTo>
+                    <a:pt x="4014354" y="1121998"/>
+                  </a:lnTo>
+                  <a:lnTo>
+                    <a:pt x="4084698" y="1125155"/>
+                  </a:lnTo>
+                  <a:lnTo>
+                    <a:pt x="4155043" y="1128238"/>
+                  </a:lnTo>
+                  <a:lnTo>
+                    <a:pt x="4225387" y="1131250"/>
+                  </a:lnTo>
+                  <a:lnTo>
+                    <a:pt x="4295732" y="1134190"/>
+                  </a:lnTo>
+                  <a:lnTo>
+                    <a:pt x="4366076" y="1137063"/>
+                  </a:lnTo>
+                  <a:lnTo>
+                    <a:pt x="4436421" y="1139868"/>
+                  </a:lnTo>
+                  <a:lnTo>
+                    <a:pt x="4506765" y="1142607"/>
+                  </a:lnTo>
+                  <a:lnTo>
+                    <a:pt x="4577110" y="1145283"/>
+                  </a:lnTo>
+                  <a:lnTo>
+                    <a:pt x="4647454" y="1147896"/>
+                  </a:lnTo>
+                  <a:lnTo>
+                    <a:pt x="4717798" y="1150448"/>
+                  </a:lnTo>
+                  <a:lnTo>
+                    <a:pt x="4788143" y="1152941"/>
+                  </a:lnTo>
+                  <a:lnTo>
+                    <a:pt x="4858487" y="1155375"/>
+                  </a:lnTo>
+                  <a:lnTo>
+                    <a:pt x="4928832" y="1157753"/>
+                  </a:lnTo>
+                  <a:lnTo>
+                    <a:pt x="4999176" y="1160075"/>
+                  </a:lnTo>
+                  <a:lnTo>
+                    <a:pt x="5069521" y="1162343"/>
+                  </a:lnTo>
+                  <a:lnTo>
+                    <a:pt x="5139865" y="1164558"/>
+                  </a:lnTo>
+                  <a:lnTo>
+                    <a:pt x="5210210" y="1166721"/>
+                  </a:lnTo>
+                  <a:lnTo>
+                    <a:pt x="5280554" y="1168833"/>
+                  </a:lnTo>
+                  <a:lnTo>
+                    <a:pt x="5350899" y="1170897"/>
+                  </a:lnTo>
+                  <a:lnTo>
+                    <a:pt x="5421243" y="1172912"/>
+                  </a:lnTo>
+                  <a:lnTo>
+                    <a:pt x="5491588" y="1174880"/>
+                  </a:lnTo>
+                  <a:lnTo>
+                    <a:pt x="5561932" y="1176802"/>
+                  </a:lnTo>
+                  <a:lnTo>
+                    <a:pt x="5632277" y="1178679"/>
                   </a:lnTo>
                 </a:path>
               </a:pathLst>
@@ -4218,288 +3928,613 @@
           </p:nvSpPr>
           <p:spPr>
             <a:xfrm>
-              <a:off x="1784435" y="2073503"/>
-              <a:ext cx="6478244" cy="3408782"/>
+              <a:off x="1235312" y="2585973"/>
+              <a:ext cx="6964104" cy="805000"/>
             </a:xfrm>
             <a:custGeom>
               <a:avLst/>
               <a:pathLst>
-                <a:path w="6478244" h="3408782">
+                <a:path w="6964104" h="805000">
+                  <a:moveTo>
+                    <a:pt x="6964104" y="805000"/>
+                  </a:moveTo>
+                  <a:lnTo>
+                    <a:pt x="6893760" y="804411"/>
+                  </a:lnTo>
+                  <a:lnTo>
+                    <a:pt x="6823415" y="803785"/>
+                  </a:lnTo>
+                  <a:lnTo>
+                    <a:pt x="6753071" y="803119"/>
+                  </a:lnTo>
+                  <a:lnTo>
+                    <a:pt x="6682726" y="802412"/>
+                  </a:lnTo>
+                  <a:lnTo>
+                    <a:pt x="6612382" y="801660"/>
+                  </a:lnTo>
+                  <a:lnTo>
+                    <a:pt x="6542037" y="800860"/>
+                  </a:lnTo>
+                  <a:lnTo>
+                    <a:pt x="6471693" y="800010"/>
+                  </a:lnTo>
+                  <a:lnTo>
+                    <a:pt x="6401348" y="799106"/>
+                  </a:lnTo>
+                  <a:lnTo>
+                    <a:pt x="6331004" y="798145"/>
+                  </a:lnTo>
+                  <a:lnTo>
+                    <a:pt x="6260659" y="797123"/>
+                  </a:lnTo>
+                  <a:lnTo>
+                    <a:pt x="6190315" y="796037"/>
+                  </a:lnTo>
+                  <a:lnTo>
+                    <a:pt x="6119970" y="794882"/>
+                  </a:lnTo>
+                  <a:lnTo>
+                    <a:pt x="6049626" y="793654"/>
+                  </a:lnTo>
+                  <a:lnTo>
+                    <a:pt x="5979281" y="792349"/>
+                  </a:lnTo>
+                  <a:lnTo>
+                    <a:pt x="5908937" y="790961"/>
+                  </a:lnTo>
+                  <a:lnTo>
+                    <a:pt x="5838592" y="789485"/>
+                  </a:lnTo>
+                  <a:lnTo>
+                    <a:pt x="5768248" y="787916"/>
+                  </a:lnTo>
+                  <a:lnTo>
+                    <a:pt x="5697903" y="786249"/>
+                  </a:lnTo>
+                  <a:lnTo>
+                    <a:pt x="5627559" y="784475"/>
+                  </a:lnTo>
+                  <a:lnTo>
+                    <a:pt x="5557214" y="782590"/>
+                  </a:lnTo>
+                  <a:lnTo>
+                    <a:pt x="5486870" y="780586"/>
+                  </a:lnTo>
+                  <a:lnTo>
+                    <a:pt x="5416525" y="778455"/>
+                  </a:lnTo>
+                  <a:lnTo>
+                    <a:pt x="5346181" y="776189"/>
+                  </a:lnTo>
+                  <a:lnTo>
+                    <a:pt x="5275836" y="773781"/>
+                  </a:lnTo>
+                  <a:lnTo>
+                    <a:pt x="5205492" y="771220"/>
+                  </a:lnTo>
+                  <a:lnTo>
+                    <a:pt x="5135147" y="768497"/>
+                  </a:lnTo>
+                  <a:lnTo>
+                    <a:pt x="5064803" y="765603"/>
+                  </a:lnTo>
+                  <a:lnTo>
+                    <a:pt x="4994458" y="762526"/>
+                  </a:lnTo>
+                  <a:lnTo>
+                    <a:pt x="4924114" y="759254"/>
+                  </a:lnTo>
+                  <a:lnTo>
+                    <a:pt x="4853769" y="755776"/>
+                  </a:lnTo>
+                  <a:lnTo>
+                    <a:pt x="4783425" y="752077"/>
+                  </a:lnTo>
+                  <a:lnTo>
+                    <a:pt x="4713080" y="748146"/>
+                  </a:lnTo>
+                  <a:lnTo>
+                    <a:pt x="4642736" y="743966"/>
+                  </a:lnTo>
+                  <a:lnTo>
+                    <a:pt x="4572391" y="739522"/>
+                  </a:lnTo>
+                  <a:lnTo>
+                    <a:pt x="4502047" y="734797"/>
+                  </a:lnTo>
+                  <a:lnTo>
+                    <a:pt x="4431702" y="729773"/>
+                  </a:lnTo>
+                  <a:lnTo>
+                    <a:pt x="4361358" y="724433"/>
+                  </a:lnTo>
+                  <a:lnTo>
+                    <a:pt x="4291013" y="718755"/>
+                  </a:lnTo>
+                  <a:lnTo>
+                    <a:pt x="4220669" y="712718"/>
+                  </a:lnTo>
+                  <a:lnTo>
+                    <a:pt x="4150324" y="706300"/>
+                  </a:lnTo>
+                  <a:lnTo>
+                    <a:pt x="4079980" y="699477"/>
+                  </a:lnTo>
+                  <a:lnTo>
+                    <a:pt x="4009635" y="692223"/>
+                  </a:lnTo>
+                  <a:lnTo>
+                    <a:pt x="3939291" y="684510"/>
+                  </a:lnTo>
+                  <a:lnTo>
+                    <a:pt x="3868946" y="676310"/>
+                  </a:lnTo>
+                  <a:lnTo>
+                    <a:pt x="3798602" y="667593"/>
+                  </a:lnTo>
+                  <a:lnTo>
+                    <a:pt x="3728257" y="658324"/>
+                  </a:lnTo>
+                  <a:lnTo>
+                    <a:pt x="3657913" y="648470"/>
+                  </a:lnTo>
+                  <a:lnTo>
+                    <a:pt x="3587569" y="637994"/>
+                  </a:lnTo>
+                  <a:lnTo>
+                    <a:pt x="3517224" y="626856"/>
+                  </a:lnTo>
+                  <a:lnTo>
+                    <a:pt x="3446880" y="615015"/>
+                  </a:lnTo>
+                  <a:lnTo>
+                    <a:pt x="3376535" y="602425"/>
+                  </a:lnTo>
+                  <a:lnTo>
+                    <a:pt x="3306191" y="589040"/>
+                  </a:lnTo>
+                  <a:lnTo>
+                    <a:pt x="3235846" y="574810"/>
+                  </a:lnTo>
+                  <a:lnTo>
+                    <a:pt x="3165502" y="559680"/>
+                  </a:lnTo>
+                  <a:lnTo>
+                    <a:pt x="3095157" y="543596"/>
+                  </a:lnTo>
+                  <a:lnTo>
+                    <a:pt x="3024813" y="526495"/>
+                  </a:lnTo>
+                  <a:lnTo>
+                    <a:pt x="2954468" y="512430"/>
+                  </a:lnTo>
+                  <a:lnTo>
+                    <a:pt x="2884124" y="505212"/>
+                  </a:lnTo>
+                  <a:lnTo>
+                    <a:pt x="2813779" y="497823"/>
+                  </a:lnTo>
+                  <a:lnTo>
+                    <a:pt x="2743435" y="490256"/>
+                  </a:lnTo>
+                  <a:lnTo>
+                    <a:pt x="2673090" y="482508"/>
+                  </a:lnTo>
+                  <a:lnTo>
+                    <a:pt x="2602746" y="474576"/>
+                  </a:lnTo>
+                  <a:lnTo>
+                    <a:pt x="2532401" y="466453"/>
+                  </a:lnTo>
+                  <a:lnTo>
+                    <a:pt x="2462057" y="458137"/>
+                  </a:lnTo>
+                  <a:lnTo>
+                    <a:pt x="2391712" y="449621"/>
+                  </a:lnTo>
+                  <a:lnTo>
+                    <a:pt x="2321368" y="440902"/>
+                  </a:lnTo>
+                  <a:lnTo>
+                    <a:pt x="2251023" y="431975"/>
+                  </a:lnTo>
+                  <a:lnTo>
+                    <a:pt x="2180679" y="422834"/>
+                  </a:lnTo>
+                  <a:lnTo>
+                    <a:pt x="2110334" y="413475"/>
+                  </a:lnTo>
+                  <a:lnTo>
+                    <a:pt x="2039990" y="403892"/>
+                  </a:lnTo>
+                  <a:lnTo>
+                    <a:pt x="1969645" y="394080"/>
+                  </a:lnTo>
+                  <a:lnTo>
+                    <a:pt x="1899301" y="384033"/>
+                  </a:lnTo>
+                  <a:lnTo>
+                    <a:pt x="1828956" y="373746"/>
+                  </a:lnTo>
+                  <a:lnTo>
+                    <a:pt x="1758612" y="363213"/>
+                  </a:lnTo>
+                  <a:lnTo>
+                    <a:pt x="1688267" y="352428"/>
+                  </a:lnTo>
+                  <a:lnTo>
+                    <a:pt x="1617923" y="341386"/>
+                  </a:lnTo>
+                  <a:lnTo>
+                    <a:pt x="1547578" y="330079"/>
+                  </a:lnTo>
+                  <a:lnTo>
+                    <a:pt x="1477234" y="318502"/>
+                  </a:lnTo>
+                  <a:lnTo>
+                    <a:pt x="1406889" y="306648"/>
+                  </a:lnTo>
+                  <a:lnTo>
+                    <a:pt x="1336545" y="294511"/>
+                  </a:lnTo>
+                  <a:lnTo>
+                    <a:pt x="1266200" y="282084"/>
+                  </a:lnTo>
+                  <a:lnTo>
+                    <a:pt x="1195856" y="269360"/>
+                  </a:lnTo>
+                  <a:lnTo>
+                    <a:pt x="1125511" y="256331"/>
+                  </a:lnTo>
+                  <a:lnTo>
+                    <a:pt x="1055167" y="242991"/>
+                  </a:lnTo>
+                  <a:lnTo>
+                    <a:pt x="984822" y="229332"/>
+                  </a:lnTo>
+                  <a:lnTo>
+                    <a:pt x="914478" y="215347"/>
+                  </a:lnTo>
+                  <a:lnTo>
+                    <a:pt x="844133" y="201027"/>
+                  </a:lnTo>
+                  <a:lnTo>
+                    <a:pt x="773789" y="186365"/>
+                  </a:lnTo>
+                  <a:lnTo>
+                    <a:pt x="703444" y="171352"/>
+                  </a:lnTo>
+                  <a:lnTo>
+                    <a:pt x="633100" y="155981"/>
+                  </a:lnTo>
+                  <a:lnTo>
+                    <a:pt x="562755" y="140242"/>
+                  </a:lnTo>
+                  <a:lnTo>
+                    <a:pt x="492411" y="124126"/>
+                  </a:lnTo>
+                  <a:lnTo>
+                    <a:pt x="422066" y="107626"/>
+                  </a:lnTo>
+                  <a:lnTo>
+                    <a:pt x="351722" y="90731"/>
+                  </a:lnTo>
+                  <a:lnTo>
+                    <a:pt x="281377" y="73431"/>
+                  </a:lnTo>
+                  <a:lnTo>
+                    <a:pt x="211033" y="55719"/>
+                  </a:lnTo>
+                  <a:lnTo>
+                    <a:pt x="140688" y="37583"/>
+                  </a:lnTo>
+                  <a:lnTo>
+                    <a:pt x="70344" y="19013"/>
+                  </a:lnTo>
+                  <a:lnTo>
+                    <a:pt x="0" y="0"/>
+                  </a:lnTo>
+                </a:path>
+              </a:pathLst>
+            </a:custGeom>
+          </p:spPr>
+          <p:txBody>
+            <a:bodyPr/>
+            <a:lstStyle/>
+            <a:p/>
+          </p:txBody>
+        </p:sp>
+        <p:sp>
+          <p:nvSpPr>
+            <p:cNvPr id="26" name="pl26"/>
+            <p:cNvSpPr/>
+            <p:nvPr/>
+          </p:nvSpPr>
+          <p:spPr>
+            <a:xfrm>
+              <a:off x="1836770" y="2143092"/>
+              <a:ext cx="6362645" cy="1230149"/>
+            </a:xfrm>
+            <a:custGeom>
+              <a:avLst/>
+              <a:pathLst>
+                <a:path w="6362645" h="1230149">
                   <a:moveTo>
                     <a:pt x="0" y="0"/>
                   </a:moveTo>
                   <a:lnTo>
-                    <a:pt x="32216" y="66635"/>
-                  </a:lnTo>
-                  <a:lnTo>
-                    <a:pt x="103839" y="208621"/>
-                  </a:lnTo>
-                  <a:lnTo>
-                    <a:pt x="175461" y="344706"/>
-                  </a:lnTo>
-                  <a:lnTo>
-                    <a:pt x="247084" y="475138"/>
-                  </a:lnTo>
-                  <a:lnTo>
-                    <a:pt x="318706" y="600149"/>
-                  </a:lnTo>
-                  <a:lnTo>
-                    <a:pt x="390329" y="719967"/>
-                  </a:lnTo>
-                  <a:lnTo>
-                    <a:pt x="461951" y="834805"/>
-                  </a:lnTo>
-                  <a:lnTo>
-                    <a:pt x="533574" y="944872"/>
-                  </a:lnTo>
-                  <a:lnTo>
-                    <a:pt x="605196" y="1050366"/>
-                  </a:lnTo>
-                  <a:lnTo>
-                    <a:pt x="676819" y="1151476"/>
-                  </a:lnTo>
-                  <a:lnTo>
-                    <a:pt x="748441" y="1248385"/>
-                  </a:lnTo>
-                  <a:lnTo>
-                    <a:pt x="820064" y="1341267"/>
-                  </a:lnTo>
-                  <a:lnTo>
-                    <a:pt x="891686" y="1430290"/>
-                  </a:lnTo>
-                  <a:lnTo>
-                    <a:pt x="963309" y="1515614"/>
-                  </a:lnTo>
-                  <a:lnTo>
-                    <a:pt x="1034932" y="1597393"/>
-                  </a:lnTo>
-                  <a:lnTo>
-                    <a:pt x="1106554" y="1675773"/>
-                  </a:lnTo>
-                  <a:lnTo>
-                    <a:pt x="1178177" y="1750897"/>
-                  </a:lnTo>
-                  <a:lnTo>
-                    <a:pt x="1249799" y="1822899"/>
-                  </a:lnTo>
-                  <a:lnTo>
-                    <a:pt x="1321422" y="1891910"/>
-                  </a:lnTo>
-                  <a:lnTo>
-                    <a:pt x="1393044" y="1958052"/>
-                  </a:lnTo>
-                  <a:lnTo>
-                    <a:pt x="1464667" y="2021447"/>
-                  </a:lnTo>
-                  <a:lnTo>
-                    <a:pt x="1536289" y="2082208"/>
-                  </a:lnTo>
-                  <a:lnTo>
-                    <a:pt x="1607912" y="2140443"/>
-                  </a:lnTo>
-                  <a:lnTo>
-                    <a:pt x="1679534" y="2196259"/>
-                  </a:lnTo>
-                  <a:lnTo>
-                    <a:pt x="1751157" y="2249756"/>
-                  </a:lnTo>
-                  <a:lnTo>
-                    <a:pt x="1822779" y="2301030"/>
-                  </a:lnTo>
-                  <a:lnTo>
-                    <a:pt x="1894402" y="2350174"/>
-                  </a:lnTo>
-                  <a:lnTo>
-                    <a:pt x="1966024" y="2397275"/>
-                  </a:lnTo>
-                  <a:lnTo>
-                    <a:pt x="2037647" y="2442419"/>
-                  </a:lnTo>
-                  <a:lnTo>
-                    <a:pt x="2109269" y="2485688"/>
-                  </a:lnTo>
-                  <a:lnTo>
-                    <a:pt x="2180892" y="2527159"/>
-                  </a:lnTo>
-                  <a:lnTo>
-                    <a:pt x="2252514" y="2566906"/>
-                  </a:lnTo>
-                  <a:lnTo>
-                    <a:pt x="2324137" y="2605002"/>
-                  </a:lnTo>
-                  <a:lnTo>
-                    <a:pt x="2395760" y="2641515"/>
-                  </a:lnTo>
-                  <a:lnTo>
-                    <a:pt x="2467382" y="2676511"/>
-                  </a:lnTo>
-                  <a:lnTo>
-                    <a:pt x="2539005" y="2710053"/>
-                  </a:lnTo>
-                  <a:lnTo>
-                    <a:pt x="2610627" y="2742201"/>
-                  </a:lnTo>
-                  <a:lnTo>
-                    <a:pt x="2682250" y="2773013"/>
-                  </a:lnTo>
-                  <a:lnTo>
-                    <a:pt x="2753872" y="2802545"/>
-                  </a:lnTo>
-                  <a:lnTo>
-                    <a:pt x="2825495" y="2830850"/>
-                  </a:lnTo>
-                  <a:lnTo>
-                    <a:pt x="2897117" y="2857978"/>
-                  </a:lnTo>
-                  <a:lnTo>
-                    <a:pt x="2968740" y="2883980"/>
-                  </a:lnTo>
-                  <a:lnTo>
-                    <a:pt x="3040362" y="2908901"/>
-                  </a:lnTo>
-                  <a:lnTo>
-                    <a:pt x="3111985" y="2932786"/>
-                  </a:lnTo>
-                  <a:lnTo>
-                    <a:pt x="3183607" y="2955680"/>
-                  </a:lnTo>
-                  <a:lnTo>
-                    <a:pt x="3255230" y="2977621"/>
-                  </a:lnTo>
-                  <a:lnTo>
-                    <a:pt x="3326852" y="2998652"/>
-                  </a:lnTo>
-                  <a:lnTo>
-                    <a:pt x="3398475" y="3018808"/>
-                  </a:lnTo>
-                  <a:lnTo>
-                    <a:pt x="3470097" y="3038127"/>
-                  </a:lnTo>
-                  <a:lnTo>
-                    <a:pt x="3541720" y="3056643"/>
-                  </a:lnTo>
-                  <a:lnTo>
-                    <a:pt x="3613342" y="3074390"/>
-                  </a:lnTo>
-                  <a:lnTo>
-                    <a:pt x="3684965" y="3091399"/>
-                  </a:lnTo>
-                  <a:lnTo>
-                    <a:pt x="3756588" y="3107701"/>
-                  </a:lnTo>
-                  <a:lnTo>
-                    <a:pt x="3828210" y="3123327"/>
-                  </a:lnTo>
-                  <a:lnTo>
-                    <a:pt x="3899833" y="3138303"/>
-                  </a:lnTo>
-                  <a:lnTo>
-                    <a:pt x="3971455" y="3152656"/>
-                  </a:lnTo>
-                  <a:lnTo>
-                    <a:pt x="4043078" y="3166413"/>
-                  </a:lnTo>
-                  <a:lnTo>
-                    <a:pt x="4114700" y="3179599"/>
-                  </a:lnTo>
-                  <a:lnTo>
-                    <a:pt x="4186323" y="3192237"/>
-                  </a:lnTo>
-                  <a:lnTo>
-                    <a:pt x="4257945" y="3204349"/>
-                  </a:lnTo>
-                  <a:lnTo>
-                    <a:pt x="4329568" y="3215959"/>
-                  </a:lnTo>
-                  <a:lnTo>
-                    <a:pt x="4401190" y="3227086"/>
-                  </a:lnTo>
-                  <a:lnTo>
-                    <a:pt x="4472813" y="3237750"/>
-                  </a:lnTo>
-                  <a:lnTo>
-                    <a:pt x="4544435" y="3247972"/>
-                  </a:lnTo>
-                  <a:lnTo>
-                    <a:pt x="4616058" y="3257768"/>
-                  </a:lnTo>
-                  <a:lnTo>
-                    <a:pt x="4687680" y="3267158"/>
-                  </a:lnTo>
-                  <a:lnTo>
-                    <a:pt x="4759303" y="3276158"/>
-                  </a:lnTo>
-                  <a:lnTo>
-                    <a:pt x="4830925" y="3284783"/>
-                  </a:lnTo>
-                  <a:lnTo>
-                    <a:pt x="4902548" y="3293050"/>
-                  </a:lnTo>
-                  <a:lnTo>
-                    <a:pt x="4974170" y="3300974"/>
-                  </a:lnTo>
-                  <a:lnTo>
-                    <a:pt x="5045793" y="3308569"/>
-                  </a:lnTo>
-                  <a:lnTo>
-                    <a:pt x="5117416" y="3315847"/>
-                  </a:lnTo>
-                  <a:lnTo>
-                    <a:pt x="5189038" y="3322824"/>
-                  </a:lnTo>
-                  <a:lnTo>
-                    <a:pt x="5260661" y="3329510"/>
-                  </a:lnTo>
-                  <a:lnTo>
-                    <a:pt x="5332283" y="3335919"/>
-                  </a:lnTo>
-                  <a:lnTo>
-                    <a:pt x="5403906" y="3342062"/>
-                  </a:lnTo>
-                  <a:lnTo>
-                    <a:pt x="5475528" y="3347949"/>
-                  </a:lnTo>
-                  <a:lnTo>
-                    <a:pt x="5547151" y="3353591"/>
-                  </a:lnTo>
-                  <a:lnTo>
-                    <a:pt x="5618773" y="3358999"/>
-                  </a:lnTo>
-                  <a:lnTo>
-                    <a:pt x="5690396" y="3364183"/>
-                  </a:lnTo>
-                  <a:lnTo>
-                    <a:pt x="5762018" y="3369151"/>
-                  </a:lnTo>
-                  <a:lnTo>
-                    <a:pt x="5833641" y="3373912"/>
-                  </a:lnTo>
-                  <a:lnTo>
-                    <a:pt x="5905263" y="3378476"/>
-                  </a:lnTo>
-                  <a:lnTo>
-                    <a:pt x="5976886" y="3382850"/>
-                  </a:lnTo>
-                  <a:lnTo>
-                    <a:pt x="6048508" y="3387043"/>
-                  </a:lnTo>
-                  <a:lnTo>
-                    <a:pt x="6120131" y="3391061"/>
-                  </a:lnTo>
-                  <a:lnTo>
-                    <a:pt x="6191753" y="3394912"/>
-                  </a:lnTo>
-                  <a:lnTo>
-                    <a:pt x="6263376" y="3398603"/>
-                  </a:lnTo>
-                  <a:lnTo>
-                    <a:pt x="6334998" y="3402141"/>
-                  </a:lnTo>
-                  <a:lnTo>
-                    <a:pt x="6406621" y="3405532"/>
-                  </a:lnTo>
-                  <a:lnTo>
-                    <a:pt x="6478244" y="3408782"/>
+                    <a:pt x="31641" y="24047"/>
+                  </a:lnTo>
+                  <a:lnTo>
+                    <a:pt x="101986" y="75286"/>
+                  </a:lnTo>
+                  <a:lnTo>
+                    <a:pt x="172330" y="124396"/>
+                  </a:lnTo>
+                  <a:lnTo>
+                    <a:pt x="242675" y="171466"/>
+                  </a:lnTo>
+                  <a:lnTo>
+                    <a:pt x="313019" y="216579"/>
+                  </a:lnTo>
+                  <a:lnTo>
+                    <a:pt x="383364" y="259819"/>
+                  </a:lnTo>
+                  <a:lnTo>
+                    <a:pt x="453708" y="301261"/>
+                  </a:lnTo>
+                  <a:lnTo>
+                    <a:pt x="524053" y="340982"/>
+                  </a:lnTo>
+                  <a:lnTo>
+                    <a:pt x="594397" y="379052"/>
+                  </a:lnTo>
+                  <a:lnTo>
+                    <a:pt x="664742" y="415540"/>
+                  </a:lnTo>
+                  <a:lnTo>
+                    <a:pt x="735086" y="450513"/>
+                  </a:lnTo>
+                  <a:lnTo>
+                    <a:pt x="805431" y="484032"/>
+                  </a:lnTo>
+                  <a:lnTo>
+                    <a:pt x="875775" y="516158"/>
+                  </a:lnTo>
+                  <a:lnTo>
+                    <a:pt x="946120" y="546949"/>
+                  </a:lnTo>
+                  <a:lnTo>
+                    <a:pt x="1016464" y="576461"/>
+                  </a:lnTo>
+                  <a:lnTo>
+                    <a:pt x="1086809" y="604747"/>
+                  </a:lnTo>
+                  <a:lnTo>
+                    <a:pt x="1157153" y="631857"/>
+                  </a:lnTo>
+                  <a:lnTo>
+                    <a:pt x="1227498" y="657841"/>
+                  </a:lnTo>
+                  <a:lnTo>
+                    <a:pt x="1297842" y="682745"/>
+                  </a:lnTo>
+                  <a:lnTo>
+                    <a:pt x="1368187" y="706615"/>
+                  </a:lnTo>
+                  <a:lnTo>
+                    <a:pt x="1438531" y="729492"/>
+                  </a:lnTo>
+                  <a:lnTo>
+                    <a:pt x="1508876" y="751419"/>
+                  </a:lnTo>
+                  <a:lnTo>
+                    <a:pt x="1579220" y="772435"/>
+                  </a:lnTo>
+                  <a:lnTo>
+                    <a:pt x="1649565" y="792578"/>
+                  </a:lnTo>
+                  <a:lnTo>
+                    <a:pt x="1719909" y="811884"/>
+                  </a:lnTo>
+                  <a:lnTo>
+                    <a:pt x="1790254" y="830387"/>
+                  </a:lnTo>
+                  <a:lnTo>
+                    <a:pt x="1860598" y="848122"/>
+                  </a:lnTo>
+                  <a:lnTo>
+                    <a:pt x="1930943" y="865120"/>
+                  </a:lnTo>
+                  <a:lnTo>
+                    <a:pt x="2001287" y="881411"/>
+                  </a:lnTo>
+                  <a:lnTo>
+                    <a:pt x="2071631" y="897026"/>
+                  </a:lnTo>
+                  <a:lnTo>
+                    <a:pt x="2141976" y="911992"/>
+                  </a:lnTo>
+                  <a:lnTo>
+                    <a:pt x="2212320" y="926336"/>
+                  </a:lnTo>
+                  <a:lnTo>
+                    <a:pt x="2282665" y="940084"/>
+                  </a:lnTo>
+                  <a:lnTo>
+                    <a:pt x="2353009" y="953260"/>
+                  </a:lnTo>
+                  <a:lnTo>
+                    <a:pt x="2423354" y="965889"/>
+                  </a:lnTo>
+                  <a:lnTo>
+                    <a:pt x="2493698" y="977994"/>
+                  </a:lnTo>
+                  <a:lnTo>
+                    <a:pt x="2564043" y="989595"/>
+                  </a:lnTo>
+                  <a:lnTo>
+                    <a:pt x="2634387" y="1000715"/>
+                  </a:lnTo>
+                  <a:lnTo>
+                    <a:pt x="2704732" y="1011372"/>
+                  </a:lnTo>
+                  <a:lnTo>
+                    <a:pt x="2775076" y="1021587"/>
+                  </a:lnTo>
+                  <a:lnTo>
+                    <a:pt x="2845421" y="1031377"/>
+                  </a:lnTo>
+                  <a:lnTo>
+                    <a:pt x="2915765" y="1040760"/>
+                  </a:lnTo>
+                  <a:lnTo>
+                    <a:pt x="2986110" y="1049754"/>
+                  </a:lnTo>
+                  <a:lnTo>
+                    <a:pt x="3056454" y="1058373"/>
+                  </a:lnTo>
+                  <a:lnTo>
+                    <a:pt x="3126799" y="1066635"/>
+                  </a:lnTo>
+                  <a:lnTo>
+                    <a:pt x="3197143" y="1074553"/>
+                  </a:lnTo>
+                  <a:lnTo>
+                    <a:pt x="3267488" y="1082143"/>
+                  </a:lnTo>
+                  <a:lnTo>
+                    <a:pt x="3337832" y="1089416"/>
+                  </a:lnTo>
+                  <a:lnTo>
+                    <a:pt x="3408177" y="1096388"/>
+                  </a:lnTo>
+                  <a:lnTo>
+                    <a:pt x="3478521" y="1103070"/>
+                  </a:lnTo>
+                  <a:lnTo>
+                    <a:pt x="3548866" y="1109475"/>
+                  </a:lnTo>
+                  <a:lnTo>
+                    <a:pt x="3619210" y="1115613"/>
+                  </a:lnTo>
+                  <a:lnTo>
+                    <a:pt x="3689555" y="1121496"/>
+                  </a:lnTo>
+                  <a:lnTo>
+                    <a:pt x="3759899" y="1127135"/>
+                  </a:lnTo>
+                  <a:lnTo>
+                    <a:pt x="3830244" y="1132539"/>
+                  </a:lnTo>
+                  <a:lnTo>
+                    <a:pt x="3900588" y="1137719"/>
+                  </a:lnTo>
+                  <a:lnTo>
+                    <a:pt x="3970933" y="1142684"/>
+                  </a:lnTo>
+                  <a:lnTo>
+                    <a:pt x="4041277" y="1147442"/>
+                  </a:lnTo>
+                  <a:lnTo>
+                    <a:pt x="4111622" y="1152003"/>
+                  </a:lnTo>
+                  <a:lnTo>
+                    <a:pt x="4181966" y="1156374"/>
+                  </a:lnTo>
+                  <a:lnTo>
+                    <a:pt x="4252311" y="1160564"/>
+                  </a:lnTo>
+                  <a:lnTo>
+                    <a:pt x="4322655" y="1164579"/>
+                  </a:lnTo>
+                  <a:lnTo>
+                    <a:pt x="4393000" y="1168428"/>
+                  </a:lnTo>
+                  <a:lnTo>
+                    <a:pt x="4463344" y="1172116"/>
+                  </a:lnTo>
+                  <a:lnTo>
+                    <a:pt x="4533689" y="1175652"/>
+                  </a:lnTo>
+                  <a:lnTo>
+                    <a:pt x="4604033" y="1179040"/>
+                  </a:lnTo>
+                  <a:lnTo>
+                    <a:pt x="4674378" y="1182288"/>
+                  </a:lnTo>
+                  <a:lnTo>
+                    <a:pt x="4744722" y="1185401"/>
+                  </a:lnTo>
+                  <a:lnTo>
+                    <a:pt x="4815067" y="1188384"/>
+                  </a:lnTo>
+                  <a:lnTo>
+                    <a:pt x="4885411" y="1191244"/>
+                  </a:lnTo>
+                  <a:lnTo>
+                    <a:pt x="4955756" y="1193984"/>
+                  </a:lnTo>
+                  <a:lnTo>
+                    <a:pt x="5026100" y="1196611"/>
+                  </a:lnTo>
+                  <a:lnTo>
+                    <a:pt x="5096445" y="1199129"/>
+                  </a:lnTo>
+                  <a:lnTo>
+                    <a:pt x="5166789" y="1201542"/>
+                  </a:lnTo>
+                  <a:lnTo>
+                    <a:pt x="5237134" y="1203854"/>
+                  </a:lnTo>
+                  <a:lnTo>
+                    <a:pt x="5307478" y="1206071"/>
+                  </a:lnTo>
+                  <a:lnTo>
+                    <a:pt x="5377823" y="1208196"/>
+                  </a:lnTo>
+                  <a:lnTo>
+                    <a:pt x="5448167" y="1210232"/>
+                  </a:lnTo>
+                  <a:lnTo>
+                    <a:pt x="5518512" y="1212184"/>
+                  </a:lnTo>
+                  <a:lnTo>
+                    <a:pt x="5588856" y="1214054"/>
+                  </a:lnTo>
+                  <a:lnTo>
+                    <a:pt x="5659201" y="1215847"/>
+                  </a:lnTo>
+                  <a:lnTo>
+                    <a:pt x="5729545" y="1217565"/>
+                  </a:lnTo>
+                  <a:lnTo>
+                    <a:pt x="5799889" y="1219212"/>
+                  </a:lnTo>
+                  <a:lnTo>
+                    <a:pt x="5870234" y="1220791"/>
+                  </a:lnTo>
+                  <a:lnTo>
+                    <a:pt x="5940578" y="1222304"/>
+                  </a:lnTo>
+                  <a:lnTo>
+                    <a:pt x="6010923" y="1223754"/>
+                  </a:lnTo>
+                  <a:lnTo>
+                    <a:pt x="6081267" y="1225144"/>
+                  </a:lnTo>
+                  <a:lnTo>
+                    <a:pt x="6151612" y="1226476"/>
+                  </a:lnTo>
+                  <a:lnTo>
+                    <a:pt x="6221956" y="1227752"/>
+                  </a:lnTo>
+                  <a:lnTo>
+                    <a:pt x="6292301" y="1228976"/>
+                  </a:lnTo>
+                  <a:lnTo>
+                    <a:pt x="6362645" y="1230149"/>
                   </a:lnTo>
                 </a:path>
               </a:pathLst>
@@ -4522,27 +4557,27 @@
         </p:sp>
         <p:sp>
           <p:nvSpPr>
-            <p:cNvPr id="26" name="pl26"/>
+            <p:cNvPr id="27" name="pl27"/>
             <p:cNvSpPr/>
             <p:nvPr/>
           </p:nvSpPr>
           <p:spPr>
             <a:xfrm>
-              <a:off x="817517" y="4727786"/>
-              <a:ext cx="7799693" cy="0"/>
+              <a:off x="887106" y="3100960"/>
+              <a:ext cx="7660515" cy="0"/>
             </a:xfrm>
             <a:custGeom>
               <a:avLst/>
               <a:pathLst>
-                <a:path w="7799693" h="0">
+                <a:path w="7660515" h="0">
                   <a:moveTo>
                     <a:pt x="0" y="0"/>
                   </a:moveTo>
                   <a:lnTo>
-                    <a:pt x="7799693" y="0"/>
-                  </a:lnTo>
-                  <a:lnTo>
-                    <a:pt x="7799693" y="0"/>
+                    <a:pt x="7660515" y="0"/>
+                  </a:lnTo>
+                  <a:lnTo>
+                    <a:pt x="7660515" y="0"/>
                   </a:lnTo>
                 </a:path>
               </a:pathLst>
@@ -4565,21 +4600,21 @@
         </p:sp>
         <p:sp>
           <p:nvSpPr>
-            <p:cNvPr id="27" name="pl27"/>
+            <p:cNvPr id="28" name="pl28"/>
             <p:cNvSpPr/>
             <p:nvPr/>
           </p:nvSpPr>
           <p:spPr>
             <a:xfrm>
-              <a:off x="4205975" y="2073503"/>
-              <a:ext cx="0" cy="3649639"/>
+              <a:off x="4215100" y="2143092"/>
+              <a:ext cx="0" cy="1317069"/>
             </a:xfrm>
             <a:custGeom>
               <a:avLst/>
               <a:pathLst>
-                <a:path w="0" h="3649639">
+                <a:path w="0" h="1317069">
                   <a:moveTo>
-                    <a:pt x="0" y="3649639"/>
+                    <a:pt x="0" y="1317069"/>
                   </a:moveTo>
                   <a:lnTo>
                     <a:pt x="0" y="0"/>
@@ -4608,21 +4643,21 @@
         </p:sp>
         <p:sp>
           <p:nvSpPr>
-            <p:cNvPr id="28" name="pl28"/>
+            <p:cNvPr id="29" name="pl29"/>
             <p:cNvSpPr/>
             <p:nvPr/>
           </p:nvSpPr>
           <p:spPr>
             <a:xfrm>
-              <a:off x="3016442" y="2073503"/>
-              <a:ext cx="0" cy="3649639"/>
+              <a:off x="3046793" y="2143092"/>
+              <a:ext cx="0" cy="1317069"/>
             </a:xfrm>
             <a:custGeom>
               <a:avLst/>
               <a:pathLst>
-                <a:path w="0" h="3649639">
+                <a:path w="0" h="1317069">
                   <a:moveTo>
-                    <a:pt x="0" y="3649639"/>
+                    <a:pt x="0" y="1317069"/>
                   </a:moveTo>
                   <a:lnTo>
                     <a:pt x="0" y="0"/>
@@ -4651,21 +4686,21 @@
         </p:sp>
         <p:sp>
           <p:nvSpPr>
-            <p:cNvPr id="29" name="pl29"/>
+            <p:cNvPr id="30" name="pl30"/>
             <p:cNvSpPr/>
             <p:nvPr/>
           </p:nvSpPr>
           <p:spPr>
             <a:xfrm>
-              <a:off x="5421760" y="2073503"/>
-              <a:ext cx="0" cy="3649639"/>
+              <a:off x="5409191" y="2143092"/>
+              <a:ext cx="0" cy="1317069"/>
             </a:xfrm>
             <a:custGeom>
               <a:avLst/>
               <a:pathLst>
-                <a:path w="0" h="3649639">
+                <a:path w="0" h="1317069">
                   <a:moveTo>
-                    <a:pt x="0" y="3649639"/>
+                    <a:pt x="0" y="1317069"/>
                   </a:moveTo>
                   <a:lnTo>
                     <a:pt x="0" y="0"/>
@@ -4694,13 +4729,13 @@
         </p:sp>
         <p:sp>
           <p:nvSpPr>
-            <p:cNvPr id="30" name="tx30"/>
+            <p:cNvPr id="31" name="tx31"/>
             <p:cNvSpPr/>
             <p:nvPr/>
           </p:nvSpPr>
           <p:spPr>
             <a:xfrm>
-              <a:off x="692708" y="5517199"/>
+              <a:off x="762297" y="3360243"/>
               <a:ext cx="62179" cy="80101"/>
             </a:xfrm>
             <a:prstGeom prst="rect">
@@ -4740,13 +4775,13 @@
         </p:sp>
         <p:sp>
           <p:nvSpPr>
-            <p:cNvPr id="31" name="tx31"/>
+            <p:cNvPr id="32" name="tx32"/>
             <p:cNvSpPr/>
             <p:nvPr/>
           </p:nvSpPr>
           <p:spPr>
             <a:xfrm>
-              <a:off x="692708" y="4687735"/>
+              <a:off x="762297" y="3060909"/>
               <a:ext cx="62179" cy="80101"/>
             </a:xfrm>
             <a:prstGeom prst="rect">
@@ -4786,13 +4821,13 @@
         </p:sp>
         <p:sp>
           <p:nvSpPr>
-            <p:cNvPr id="32" name="tx32"/>
+            <p:cNvPr id="33" name="tx33"/>
             <p:cNvSpPr/>
             <p:nvPr/>
           </p:nvSpPr>
           <p:spPr>
             <a:xfrm>
-              <a:off x="692708" y="3858272"/>
+              <a:off x="762297" y="2761575"/>
               <a:ext cx="62179" cy="80101"/>
             </a:xfrm>
             <a:prstGeom prst="rect">
@@ -4832,13 +4867,13 @@
         </p:sp>
         <p:sp>
           <p:nvSpPr>
-            <p:cNvPr id="33" name="tx33"/>
+            <p:cNvPr id="34" name="tx34"/>
             <p:cNvSpPr/>
             <p:nvPr/>
           </p:nvSpPr>
           <p:spPr>
             <a:xfrm>
-              <a:off x="692708" y="3028808"/>
+              <a:off x="762297" y="2462242"/>
               <a:ext cx="62179" cy="80101"/>
             </a:xfrm>
             <a:prstGeom prst="rect">
@@ -4878,13 +4913,13 @@
         </p:sp>
         <p:sp>
           <p:nvSpPr>
-            <p:cNvPr id="34" name="tx34"/>
+            <p:cNvPr id="35" name="tx35"/>
             <p:cNvSpPr/>
             <p:nvPr/>
           </p:nvSpPr>
           <p:spPr>
             <a:xfrm>
-              <a:off x="692708" y="2199345"/>
+              <a:off x="762297" y="2162908"/>
               <a:ext cx="62179" cy="80101"/>
             </a:xfrm>
             <a:prstGeom prst="rect">
@@ -4924,13 +4959,13 @@
         </p:sp>
         <p:sp>
           <p:nvSpPr>
-            <p:cNvPr id="35" name="tx35"/>
+            <p:cNvPr id="36" name="tx36"/>
             <p:cNvSpPr/>
             <p:nvPr/>
           </p:nvSpPr>
           <p:spPr>
             <a:xfrm>
-              <a:off x="1977028" y="5785772"/>
+              <a:off x="2024485" y="3522791"/>
               <a:ext cx="161574" cy="80101"/>
             </a:xfrm>
             <a:prstGeom prst="rect">
@@ -4970,13 +5005,13 @@
         </p:sp>
         <p:sp>
           <p:nvSpPr>
-            <p:cNvPr id="36" name="tx36"/>
+            <p:cNvPr id="37" name="tx37"/>
             <p:cNvSpPr/>
             <p:nvPr/>
           </p:nvSpPr>
           <p:spPr>
             <a:xfrm>
-              <a:off x="3728813" y="5785772"/>
+              <a:off x="3745012" y="3522791"/>
               <a:ext cx="161574" cy="80101"/>
             </a:xfrm>
             <a:prstGeom prst="rect">
@@ -5016,13 +5051,13 @@
         </p:sp>
         <p:sp>
           <p:nvSpPr>
-            <p:cNvPr id="37" name="tx37"/>
+            <p:cNvPr id="38" name="tx38"/>
             <p:cNvSpPr/>
             <p:nvPr/>
           </p:nvSpPr>
           <p:spPr>
             <a:xfrm>
-              <a:off x="5530296" y="5785772"/>
+              <a:off x="5515235" y="3522791"/>
               <a:ext cx="62179" cy="80101"/>
             </a:xfrm>
             <a:prstGeom prst="rect">
@@ -5062,13 +5097,13 @@
         </p:sp>
         <p:sp>
           <p:nvSpPr>
-            <p:cNvPr id="38" name="tx38"/>
+            <p:cNvPr id="39" name="tx39"/>
             <p:cNvSpPr/>
             <p:nvPr/>
           </p:nvSpPr>
           <p:spPr>
             <a:xfrm>
-              <a:off x="7250992" y="5785772"/>
+              <a:off x="7204672" y="3522791"/>
               <a:ext cx="124358" cy="80101"/>
             </a:xfrm>
             <a:prstGeom prst="rect">
@@ -5108,13 +5143,13 @@
         </p:sp>
         <p:sp>
           <p:nvSpPr>
-            <p:cNvPr id="39" name="tx39"/>
+            <p:cNvPr id="40" name="tx40"/>
             <p:cNvSpPr/>
             <p:nvPr/>
           </p:nvSpPr>
           <p:spPr>
             <a:xfrm>
-              <a:off x="1561815" y="5925448"/>
+              <a:off x="1561815" y="3662467"/>
               <a:ext cx="6311097" cy="100218"/>
             </a:xfrm>
             <a:prstGeom prst="rect">
@@ -5154,13 +5189,13 @@
         </p:sp>
         <p:sp>
           <p:nvSpPr>
-            <p:cNvPr id="40" name="tx40"/>
+            <p:cNvPr id="41" name="tx41"/>
             <p:cNvSpPr/>
             <p:nvPr/>
           </p:nvSpPr>
           <p:spPr>
             <a:xfrm rot="-5400000">
-              <a:off x="181100" y="3848213"/>
+              <a:off x="250689" y="2751517"/>
               <a:ext cx="791596" cy="100218"/>
             </a:xfrm>
             <a:prstGeom prst="rect">
@@ -5200,13 +5235,13 @@
         </p:sp>
         <p:sp>
           <p:nvSpPr>
-            <p:cNvPr id="41" name="tx41"/>
+            <p:cNvPr id="42" name="tx42"/>
             <p:cNvSpPr/>
             <p:nvPr/>
           </p:nvSpPr>
           <p:spPr>
             <a:xfrm>
-              <a:off x="817517" y="1896563"/>
+              <a:off x="887106" y="1966152"/>
               <a:ext cx="6842363" cy="82021"/>
             </a:xfrm>
             <a:prstGeom prst="rect">
@@ -5246,13 +5281,3614 @@
         </p:sp>
         <p:sp>
           <p:nvSpPr>
-            <p:cNvPr id="42" name="tx42"/>
+            <p:cNvPr id="43" name="tx43"/>
             <p:cNvSpPr/>
             <p:nvPr/>
           </p:nvSpPr>
           <p:spPr>
             <a:xfrm>
-              <a:off x="817517" y="1669789"/>
+              <a:off x="887106" y="1739378"/>
+              <a:ext cx="2681112" cy="120152"/>
+            </a:xfrm>
+            <a:prstGeom prst="rect">
+              <a:avLst/>
+            </a:prstGeom>
+            <a:noFill/>
+          </p:spPr>
+          <p:txBody>
+            <a:bodyPr lIns="0" rIns="0" tIns="0" bIns="0" anchorCtr="1" anchor="ctr" wrap="none"/>
+            <a:lstStyle/>
+            <a:p>
+              <a:pPr algn="l" marL="0" marR="0" indent="0">
+                <a:lnSpc>
+                  <a:spcPts val="1320"/>
+                </a:lnSpc>
+                <a:spcBef>
+                  <a:spcPts val="0"/>
+                </a:spcBef>
+                <a:spcAft>
+                  <a:spcPts val="0"/>
+                </a:spcAft>
+              </a:pPr>
+              <a:r>
+                <a:rPr sz="1320">
+                  <a:solidFill>
+                    <a:srgbClr val="000000">
+                      <a:alpha val="100000"/>
+                    </a:srgbClr>
+                  </a:solidFill>
+                  <a:latin typeface="Helvetica"/>
+                  <a:cs typeface="Helvetica"/>
+                </a:rPr>
+                <a:t>90-Day Death (Cox PH) (Sensitivity)</a:t>
+              </a:r>
+            </a:p>
+          </p:txBody>
+        </p:sp>
+        <p:sp>
+          <p:nvSpPr>
+            <p:cNvPr id="44" name="pl44"/>
+            <p:cNvSpPr/>
+            <p:nvPr/>
+          </p:nvSpPr>
+          <p:spPr>
+            <a:xfrm>
+              <a:off x="887106" y="5444019"/>
+              <a:ext cx="7660515" cy="0"/>
+            </a:xfrm>
+            <a:custGeom>
+              <a:avLst/>
+              <a:pathLst>
+                <a:path w="7660515" h="0">
+                  <a:moveTo>
+                    <a:pt x="0" y="0"/>
+                  </a:moveTo>
+                  <a:lnTo>
+                    <a:pt x="7660515" y="0"/>
+                  </a:lnTo>
+                  <a:lnTo>
+                    <a:pt x="7660515" y="0"/>
+                  </a:lnTo>
+                </a:path>
+              </a:pathLst>
+            </a:custGeom>
+            <a:ln w="6775" cap="flat">
+              <a:solidFill>
+                <a:srgbClr val="EBEBEB">
+                  <a:alpha val="100000"/>
+                </a:srgbClr>
+              </a:solidFill>
+              <a:prstDash val="solid"/>
+              <a:round/>
+            </a:ln>
+          </p:spPr>
+          <p:txBody>
+            <a:bodyPr/>
+            <a:lstStyle/>
+            <a:p/>
+          </p:txBody>
+        </p:sp>
+        <p:sp>
+          <p:nvSpPr>
+            <p:cNvPr id="45" name="pl45"/>
+            <p:cNvSpPr/>
+            <p:nvPr/>
+          </p:nvSpPr>
+          <p:spPr>
+            <a:xfrm>
+              <a:off x="887106" y="5144686"/>
+              <a:ext cx="7660515" cy="0"/>
+            </a:xfrm>
+            <a:custGeom>
+              <a:avLst/>
+              <a:pathLst>
+                <a:path w="7660515" h="0">
+                  <a:moveTo>
+                    <a:pt x="0" y="0"/>
+                  </a:moveTo>
+                  <a:lnTo>
+                    <a:pt x="7660515" y="0"/>
+                  </a:lnTo>
+                  <a:lnTo>
+                    <a:pt x="7660515" y="0"/>
+                  </a:lnTo>
+                </a:path>
+              </a:pathLst>
+            </a:custGeom>
+            <a:ln w="6775" cap="flat">
+              <a:solidFill>
+                <a:srgbClr val="EBEBEB">
+                  <a:alpha val="100000"/>
+                </a:srgbClr>
+              </a:solidFill>
+              <a:prstDash val="solid"/>
+              <a:round/>
+            </a:ln>
+          </p:spPr>
+          <p:txBody>
+            <a:bodyPr/>
+            <a:lstStyle/>
+            <a:p/>
+          </p:txBody>
+        </p:sp>
+        <p:sp>
+          <p:nvSpPr>
+            <p:cNvPr id="46" name="pl46"/>
+            <p:cNvSpPr/>
+            <p:nvPr/>
+          </p:nvSpPr>
+          <p:spPr>
+            <a:xfrm>
+              <a:off x="887106" y="4845352"/>
+              <a:ext cx="7660515" cy="0"/>
+            </a:xfrm>
+            <a:custGeom>
+              <a:avLst/>
+              <a:pathLst>
+                <a:path w="7660515" h="0">
+                  <a:moveTo>
+                    <a:pt x="0" y="0"/>
+                  </a:moveTo>
+                  <a:lnTo>
+                    <a:pt x="7660515" y="0"/>
+                  </a:lnTo>
+                  <a:lnTo>
+                    <a:pt x="7660515" y="0"/>
+                  </a:lnTo>
+                </a:path>
+              </a:pathLst>
+            </a:custGeom>
+            <a:ln w="6775" cap="flat">
+              <a:solidFill>
+                <a:srgbClr val="EBEBEB">
+                  <a:alpha val="100000"/>
+                </a:srgbClr>
+              </a:solidFill>
+              <a:prstDash val="solid"/>
+              <a:round/>
+            </a:ln>
+          </p:spPr>
+          <p:txBody>
+            <a:bodyPr/>
+            <a:lstStyle/>
+            <a:p/>
+          </p:txBody>
+        </p:sp>
+        <p:sp>
+          <p:nvSpPr>
+            <p:cNvPr id="47" name="pl47"/>
+            <p:cNvSpPr/>
+            <p:nvPr/>
+          </p:nvSpPr>
+          <p:spPr>
+            <a:xfrm>
+              <a:off x="887106" y="4546018"/>
+              <a:ext cx="7660515" cy="0"/>
+            </a:xfrm>
+            <a:custGeom>
+              <a:avLst/>
+              <a:pathLst>
+                <a:path w="7660515" h="0">
+                  <a:moveTo>
+                    <a:pt x="0" y="0"/>
+                  </a:moveTo>
+                  <a:lnTo>
+                    <a:pt x="7660515" y="0"/>
+                  </a:lnTo>
+                  <a:lnTo>
+                    <a:pt x="7660515" y="0"/>
+                  </a:lnTo>
+                </a:path>
+              </a:pathLst>
+            </a:custGeom>
+            <a:ln w="6775" cap="flat">
+              <a:solidFill>
+                <a:srgbClr val="EBEBEB">
+                  <a:alpha val="100000"/>
+                </a:srgbClr>
+              </a:solidFill>
+              <a:prstDash val="solid"/>
+              <a:round/>
+            </a:ln>
+          </p:spPr>
+          <p:txBody>
+            <a:bodyPr/>
+            <a:lstStyle/>
+            <a:p/>
+          </p:txBody>
+        </p:sp>
+        <p:sp>
+          <p:nvSpPr>
+            <p:cNvPr id="48" name="pl48"/>
+            <p:cNvSpPr/>
+            <p:nvPr/>
+          </p:nvSpPr>
+          <p:spPr>
+            <a:xfrm>
+              <a:off x="1675141" y="4336484"/>
+              <a:ext cx="0" cy="1317069"/>
+            </a:xfrm>
+            <a:custGeom>
+              <a:avLst/>
+              <a:pathLst>
+                <a:path w="0" h="1317069">
+                  <a:moveTo>
+                    <a:pt x="0" y="1317069"/>
+                  </a:moveTo>
+                  <a:lnTo>
+                    <a:pt x="0" y="0"/>
+                  </a:lnTo>
+                  <a:lnTo>
+                    <a:pt x="0" y="0"/>
+                  </a:lnTo>
+                </a:path>
+              </a:pathLst>
+            </a:custGeom>
+            <a:ln w="6775" cap="flat">
+              <a:solidFill>
+                <a:srgbClr val="EBEBEB">
+                  <a:alpha val="100000"/>
+                </a:srgbClr>
+              </a:solidFill>
+              <a:prstDash val="solid"/>
+              <a:round/>
+            </a:ln>
+          </p:spPr>
+          <p:txBody>
+            <a:bodyPr/>
+            <a:lstStyle/>
+            <a:p/>
+          </p:txBody>
+        </p:sp>
+        <p:sp>
+          <p:nvSpPr>
+            <p:cNvPr id="49" name="pl49"/>
+            <p:cNvSpPr/>
+            <p:nvPr/>
+          </p:nvSpPr>
+          <p:spPr>
+            <a:xfrm>
+              <a:off x="2535404" y="4336484"/>
+              <a:ext cx="0" cy="1317069"/>
+            </a:xfrm>
+            <a:custGeom>
+              <a:avLst/>
+              <a:pathLst>
+                <a:path w="0" h="1317069">
+                  <a:moveTo>
+                    <a:pt x="0" y="1317069"/>
+                  </a:moveTo>
+                  <a:lnTo>
+                    <a:pt x="0" y="0"/>
+                  </a:lnTo>
+                  <a:lnTo>
+                    <a:pt x="0" y="0"/>
+                  </a:lnTo>
+                </a:path>
+              </a:pathLst>
+            </a:custGeom>
+            <a:ln w="6775" cap="flat">
+              <a:solidFill>
+                <a:srgbClr val="EBEBEB">
+                  <a:alpha val="100000"/>
+                </a:srgbClr>
+              </a:solidFill>
+              <a:prstDash val="solid"/>
+              <a:round/>
+            </a:ln>
+          </p:spPr>
+          <p:txBody>
+            <a:bodyPr/>
+            <a:lstStyle/>
+            <a:p/>
+          </p:txBody>
+        </p:sp>
+        <p:sp>
+          <p:nvSpPr>
+            <p:cNvPr id="50" name="pl50"/>
+            <p:cNvSpPr/>
+            <p:nvPr/>
+          </p:nvSpPr>
+          <p:spPr>
+            <a:xfrm>
+              <a:off x="3395667" y="4336484"/>
+              <a:ext cx="0" cy="1317069"/>
+            </a:xfrm>
+            <a:custGeom>
+              <a:avLst/>
+              <a:pathLst>
+                <a:path w="0" h="1317069">
+                  <a:moveTo>
+                    <a:pt x="0" y="1317069"/>
+                  </a:moveTo>
+                  <a:lnTo>
+                    <a:pt x="0" y="0"/>
+                  </a:lnTo>
+                  <a:lnTo>
+                    <a:pt x="0" y="0"/>
+                  </a:lnTo>
+                </a:path>
+              </a:pathLst>
+            </a:custGeom>
+            <a:ln w="6775" cap="flat">
+              <a:solidFill>
+                <a:srgbClr val="EBEBEB">
+                  <a:alpha val="100000"/>
+                </a:srgbClr>
+              </a:solidFill>
+              <a:prstDash val="solid"/>
+              <a:round/>
+            </a:ln>
+          </p:spPr>
+          <p:txBody>
+            <a:bodyPr/>
+            <a:lstStyle/>
+            <a:p/>
+          </p:txBody>
+        </p:sp>
+        <p:sp>
+          <p:nvSpPr>
+            <p:cNvPr id="51" name="pl51"/>
+            <p:cNvSpPr/>
+            <p:nvPr/>
+          </p:nvSpPr>
+          <p:spPr>
+            <a:xfrm>
+              <a:off x="4255930" y="4336484"/>
+              <a:ext cx="0" cy="1317069"/>
+            </a:xfrm>
+            <a:custGeom>
+              <a:avLst/>
+              <a:pathLst>
+                <a:path w="0" h="1317069">
+                  <a:moveTo>
+                    <a:pt x="0" y="1317069"/>
+                  </a:moveTo>
+                  <a:lnTo>
+                    <a:pt x="0" y="0"/>
+                  </a:lnTo>
+                  <a:lnTo>
+                    <a:pt x="0" y="0"/>
+                  </a:lnTo>
+                </a:path>
+              </a:pathLst>
+            </a:custGeom>
+            <a:ln w="6775" cap="flat">
+              <a:solidFill>
+                <a:srgbClr val="EBEBEB">
+                  <a:alpha val="100000"/>
+                </a:srgbClr>
+              </a:solidFill>
+              <a:prstDash val="solid"/>
+              <a:round/>
+            </a:ln>
+          </p:spPr>
+          <p:txBody>
+            <a:bodyPr/>
+            <a:lstStyle/>
+            <a:p/>
+          </p:txBody>
+        </p:sp>
+        <p:sp>
+          <p:nvSpPr>
+            <p:cNvPr id="52" name="pl52"/>
+            <p:cNvSpPr/>
+            <p:nvPr/>
+          </p:nvSpPr>
+          <p:spPr>
+            <a:xfrm>
+              <a:off x="5116193" y="4336484"/>
+              <a:ext cx="0" cy="1317069"/>
+            </a:xfrm>
+            <a:custGeom>
+              <a:avLst/>
+              <a:pathLst>
+                <a:path w="0" h="1317069">
+                  <a:moveTo>
+                    <a:pt x="0" y="1317069"/>
+                  </a:moveTo>
+                  <a:lnTo>
+                    <a:pt x="0" y="0"/>
+                  </a:lnTo>
+                  <a:lnTo>
+                    <a:pt x="0" y="0"/>
+                  </a:lnTo>
+                </a:path>
+              </a:pathLst>
+            </a:custGeom>
+            <a:ln w="6775" cap="flat">
+              <a:solidFill>
+                <a:srgbClr val="EBEBEB">
+                  <a:alpha val="100000"/>
+                </a:srgbClr>
+              </a:solidFill>
+              <a:prstDash val="solid"/>
+              <a:round/>
+            </a:ln>
+          </p:spPr>
+          <p:txBody>
+            <a:bodyPr/>
+            <a:lstStyle/>
+            <a:p/>
+          </p:txBody>
+        </p:sp>
+        <p:sp>
+          <p:nvSpPr>
+            <p:cNvPr id="53" name="pl53"/>
+            <p:cNvSpPr/>
+            <p:nvPr/>
+          </p:nvSpPr>
+          <p:spPr>
+            <a:xfrm>
+              <a:off x="5976457" y="4336484"/>
+              <a:ext cx="0" cy="1317069"/>
+            </a:xfrm>
+            <a:custGeom>
+              <a:avLst/>
+              <a:pathLst>
+                <a:path w="0" h="1317069">
+                  <a:moveTo>
+                    <a:pt x="0" y="1317069"/>
+                  </a:moveTo>
+                  <a:lnTo>
+                    <a:pt x="0" y="0"/>
+                  </a:lnTo>
+                  <a:lnTo>
+                    <a:pt x="0" y="0"/>
+                  </a:lnTo>
+                </a:path>
+              </a:pathLst>
+            </a:custGeom>
+            <a:ln w="6775" cap="flat">
+              <a:solidFill>
+                <a:srgbClr val="EBEBEB">
+                  <a:alpha val="100000"/>
+                </a:srgbClr>
+              </a:solidFill>
+              <a:prstDash val="solid"/>
+              <a:round/>
+            </a:ln>
+          </p:spPr>
+          <p:txBody>
+            <a:bodyPr/>
+            <a:lstStyle/>
+            <a:p/>
+          </p:txBody>
+        </p:sp>
+        <p:sp>
+          <p:nvSpPr>
+            <p:cNvPr id="54" name="pl54"/>
+            <p:cNvSpPr/>
+            <p:nvPr/>
+          </p:nvSpPr>
+          <p:spPr>
+            <a:xfrm>
+              <a:off x="6836720" y="4336484"/>
+              <a:ext cx="0" cy="1317069"/>
+            </a:xfrm>
+            <a:custGeom>
+              <a:avLst/>
+              <a:pathLst>
+                <a:path w="0" h="1317069">
+                  <a:moveTo>
+                    <a:pt x="0" y="1317069"/>
+                  </a:moveTo>
+                  <a:lnTo>
+                    <a:pt x="0" y="0"/>
+                  </a:lnTo>
+                  <a:lnTo>
+                    <a:pt x="0" y="0"/>
+                  </a:lnTo>
+                </a:path>
+              </a:pathLst>
+            </a:custGeom>
+            <a:ln w="6775" cap="flat">
+              <a:solidFill>
+                <a:srgbClr val="EBEBEB">
+                  <a:alpha val="100000"/>
+                </a:srgbClr>
+              </a:solidFill>
+              <a:prstDash val="solid"/>
+              <a:round/>
+            </a:ln>
+          </p:spPr>
+          <p:txBody>
+            <a:bodyPr/>
+            <a:lstStyle/>
+            <a:p/>
+          </p:txBody>
+        </p:sp>
+        <p:sp>
+          <p:nvSpPr>
+            <p:cNvPr id="55" name="pl55"/>
+            <p:cNvSpPr/>
+            <p:nvPr/>
+          </p:nvSpPr>
+          <p:spPr>
+            <a:xfrm>
+              <a:off x="7696983" y="4336484"/>
+              <a:ext cx="0" cy="1317069"/>
+            </a:xfrm>
+            <a:custGeom>
+              <a:avLst/>
+              <a:pathLst>
+                <a:path w="0" h="1317069">
+                  <a:moveTo>
+                    <a:pt x="0" y="1317069"/>
+                  </a:moveTo>
+                  <a:lnTo>
+                    <a:pt x="0" y="0"/>
+                  </a:lnTo>
+                  <a:lnTo>
+                    <a:pt x="0" y="0"/>
+                  </a:lnTo>
+                </a:path>
+              </a:pathLst>
+            </a:custGeom>
+            <a:ln w="6775" cap="flat">
+              <a:solidFill>
+                <a:srgbClr val="EBEBEB">
+                  <a:alpha val="100000"/>
+                </a:srgbClr>
+              </a:solidFill>
+              <a:prstDash val="solid"/>
+              <a:round/>
+            </a:ln>
+          </p:spPr>
+          <p:txBody>
+            <a:bodyPr/>
+            <a:lstStyle/>
+            <a:p/>
+          </p:txBody>
+        </p:sp>
+        <p:sp>
+          <p:nvSpPr>
+            <p:cNvPr id="56" name="pl56"/>
+            <p:cNvSpPr/>
+            <p:nvPr/>
+          </p:nvSpPr>
+          <p:spPr>
+            <a:xfrm>
+              <a:off x="887106" y="5593686"/>
+              <a:ext cx="7660515" cy="0"/>
+            </a:xfrm>
+            <a:custGeom>
+              <a:avLst/>
+              <a:pathLst>
+                <a:path w="7660515" h="0">
+                  <a:moveTo>
+                    <a:pt x="0" y="0"/>
+                  </a:moveTo>
+                  <a:lnTo>
+                    <a:pt x="7660515" y="0"/>
+                  </a:lnTo>
+                  <a:lnTo>
+                    <a:pt x="7660515" y="0"/>
+                  </a:lnTo>
+                </a:path>
+              </a:pathLst>
+            </a:custGeom>
+            <a:ln w="13550" cap="flat">
+              <a:solidFill>
+                <a:srgbClr val="EBEBEB">
+                  <a:alpha val="100000"/>
+                </a:srgbClr>
+              </a:solidFill>
+              <a:prstDash val="solid"/>
+              <a:round/>
+            </a:ln>
+          </p:spPr>
+          <p:txBody>
+            <a:bodyPr/>
+            <a:lstStyle/>
+            <a:p/>
+          </p:txBody>
+        </p:sp>
+        <p:sp>
+          <p:nvSpPr>
+            <p:cNvPr id="57" name="pl57"/>
+            <p:cNvSpPr/>
+            <p:nvPr/>
+          </p:nvSpPr>
+          <p:spPr>
+            <a:xfrm>
+              <a:off x="887106" y="5294352"/>
+              <a:ext cx="7660515" cy="0"/>
+            </a:xfrm>
+            <a:custGeom>
+              <a:avLst/>
+              <a:pathLst>
+                <a:path w="7660515" h="0">
+                  <a:moveTo>
+                    <a:pt x="0" y="0"/>
+                  </a:moveTo>
+                  <a:lnTo>
+                    <a:pt x="7660515" y="0"/>
+                  </a:lnTo>
+                  <a:lnTo>
+                    <a:pt x="7660515" y="0"/>
+                  </a:lnTo>
+                </a:path>
+              </a:pathLst>
+            </a:custGeom>
+            <a:ln w="13550" cap="flat">
+              <a:solidFill>
+                <a:srgbClr val="EBEBEB">
+                  <a:alpha val="100000"/>
+                </a:srgbClr>
+              </a:solidFill>
+              <a:prstDash val="solid"/>
+              <a:round/>
+            </a:ln>
+          </p:spPr>
+          <p:txBody>
+            <a:bodyPr/>
+            <a:lstStyle/>
+            <a:p/>
+          </p:txBody>
+        </p:sp>
+        <p:sp>
+          <p:nvSpPr>
+            <p:cNvPr id="58" name="pl58"/>
+            <p:cNvSpPr/>
+            <p:nvPr/>
+          </p:nvSpPr>
+          <p:spPr>
+            <a:xfrm>
+              <a:off x="887106" y="4995019"/>
+              <a:ext cx="7660515" cy="0"/>
+            </a:xfrm>
+            <a:custGeom>
+              <a:avLst/>
+              <a:pathLst>
+                <a:path w="7660515" h="0">
+                  <a:moveTo>
+                    <a:pt x="0" y="0"/>
+                  </a:moveTo>
+                  <a:lnTo>
+                    <a:pt x="7660515" y="0"/>
+                  </a:lnTo>
+                  <a:lnTo>
+                    <a:pt x="7660515" y="0"/>
+                  </a:lnTo>
+                </a:path>
+              </a:pathLst>
+            </a:custGeom>
+            <a:ln w="13550" cap="flat">
+              <a:solidFill>
+                <a:srgbClr val="EBEBEB">
+                  <a:alpha val="100000"/>
+                </a:srgbClr>
+              </a:solidFill>
+              <a:prstDash val="solid"/>
+              <a:round/>
+            </a:ln>
+          </p:spPr>
+          <p:txBody>
+            <a:bodyPr/>
+            <a:lstStyle/>
+            <a:p/>
+          </p:txBody>
+        </p:sp>
+        <p:sp>
+          <p:nvSpPr>
+            <p:cNvPr id="59" name="pl59"/>
+            <p:cNvSpPr/>
+            <p:nvPr/>
+          </p:nvSpPr>
+          <p:spPr>
+            <a:xfrm>
+              <a:off x="887106" y="4695685"/>
+              <a:ext cx="7660515" cy="0"/>
+            </a:xfrm>
+            <a:custGeom>
+              <a:avLst/>
+              <a:pathLst>
+                <a:path w="7660515" h="0">
+                  <a:moveTo>
+                    <a:pt x="0" y="0"/>
+                  </a:moveTo>
+                  <a:lnTo>
+                    <a:pt x="7660515" y="0"/>
+                  </a:lnTo>
+                  <a:lnTo>
+                    <a:pt x="7660515" y="0"/>
+                  </a:lnTo>
+                </a:path>
+              </a:pathLst>
+            </a:custGeom>
+            <a:ln w="13550" cap="flat">
+              <a:solidFill>
+                <a:srgbClr val="EBEBEB">
+                  <a:alpha val="100000"/>
+                </a:srgbClr>
+              </a:solidFill>
+              <a:prstDash val="solid"/>
+              <a:round/>
+            </a:ln>
+          </p:spPr>
+          <p:txBody>
+            <a:bodyPr/>
+            <a:lstStyle/>
+            <a:p/>
+          </p:txBody>
+        </p:sp>
+        <p:sp>
+          <p:nvSpPr>
+            <p:cNvPr id="60" name="pl60"/>
+            <p:cNvSpPr/>
+            <p:nvPr/>
+          </p:nvSpPr>
+          <p:spPr>
+            <a:xfrm>
+              <a:off x="887106" y="4396351"/>
+              <a:ext cx="7660515" cy="0"/>
+            </a:xfrm>
+            <a:custGeom>
+              <a:avLst/>
+              <a:pathLst>
+                <a:path w="7660515" h="0">
+                  <a:moveTo>
+                    <a:pt x="0" y="0"/>
+                  </a:moveTo>
+                  <a:lnTo>
+                    <a:pt x="7660515" y="0"/>
+                  </a:lnTo>
+                  <a:lnTo>
+                    <a:pt x="7660515" y="0"/>
+                  </a:lnTo>
+                </a:path>
+              </a:pathLst>
+            </a:custGeom>
+            <a:ln w="13550" cap="flat">
+              <a:solidFill>
+                <a:srgbClr val="EBEBEB">
+                  <a:alpha val="100000"/>
+                </a:srgbClr>
+              </a:solidFill>
+              <a:prstDash val="solid"/>
+              <a:round/>
+            </a:ln>
+          </p:spPr>
+          <p:txBody>
+            <a:bodyPr/>
+            <a:lstStyle/>
+            <a:p/>
+          </p:txBody>
+        </p:sp>
+        <p:sp>
+          <p:nvSpPr>
+            <p:cNvPr id="61" name="pl61"/>
+            <p:cNvSpPr/>
+            <p:nvPr/>
+          </p:nvSpPr>
+          <p:spPr>
+            <a:xfrm>
+              <a:off x="1245010" y="4336484"/>
+              <a:ext cx="0" cy="1317069"/>
+            </a:xfrm>
+            <a:custGeom>
+              <a:avLst/>
+              <a:pathLst>
+                <a:path w="0" h="1317069">
+                  <a:moveTo>
+                    <a:pt x="0" y="1317069"/>
+                  </a:moveTo>
+                  <a:lnTo>
+                    <a:pt x="0" y="0"/>
+                  </a:lnTo>
+                  <a:lnTo>
+                    <a:pt x="0" y="0"/>
+                  </a:lnTo>
+                </a:path>
+              </a:pathLst>
+            </a:custGeom>
+            <a:ln w="13550" cap="flat">
+              <a:solidFill>
+                <a:srgbClr val="EBEBEB">
+                  <a:alpha val="100000"/>
+                </a:srgbClr>
+              </a:solidFill>
+              <a:prstDash val="solid"/>
+              <a:round/>
+            </a:ln>
+          </p:spPr>
+          <p:txBody>
+            <a:bodyPr/>
+            <a:lstStyle/>
+            <a:p/>
+          </p:txBody>
+        </p:sp>
+        <p:sp>
+          <p:nvSpPr>
+            <p:cNvPr id="62" name="pl62"/>
+            <p:cNvSpPr/>
+            <p:nvPr/>
+          </p:nvSpPr>
+          <p:spPr>
+            <a:xfrm>
+              <a:off x="2105273" y="4336484"/>
+              <a:ext cx="0" cy="1317069"/>
+            </a:xfrm>
+            <a:custGeom>
+              <a:avLst/>
+              <a:pathLst>
+                <a:path w="0" h="1317069">
+                  <a:moveTo>
+                    <a:pt x="0" y="1317069"/>
+                  </a:moveTo>
+                  <a:lnTo>
+                    <a:pt x="0" y="0"/>
+                  </a:lnTo>
+                  <a:lnTo>
+                    <a:pt x="0" y="0"/>
+                  </a:lnTo>
+                </a:path>
+              </a:pathLst>
+            </a:custGeom>
+            <a:ln w="13550" cap="flat">
+              <a:solidFill>
+                <a:srgbClr val="EBEBEB">
+                  <a:alpha val="100000"/>
+                </a:srgbClr>
+              </a:solidFill>
+              <a:prstDash val="solid"/>
+              <a:round/>
+            </a:ln>
+          </p:spPr>
+          <p:txBody>
+            <a:bodyPr/>
+            <a:lstStyle/>
+            <a:p/>
+          </p:txBody>
+        </p:sp>
+        <p:sp>
+          <p:nvSpPr>
+            <p:cNvPr id="63" name="pl63"/>
+            <p:cNvSpPr/>
+            <p:nvPr/>
+          </p:nvSpPr>
+          <p:spPr>
+            <a:xfrm>
+              <a:off x="2965536" y="4336484"/>
+              <a:ext cx="0" cy="1317069"/>
+            </a:xfrm>
+            <a:custGeom>
+              <a:avLst/>
+              <a:pathLst>
+                <a:path w="0" h="1317069">
+                  <a:moveTo>
+                    <a:pt x="0" y="1317069"/>
+                  </a:moveTo>
+                  <a:lnTo>
+                    <a:pt x="0" y="0"/>
+                  </a:lnTo>
+                  <a:lnTo>
+                    <a:pt x="0" y="0"/>
+                  </a:lnTo>
+                </a:path>
+              </a:pathLst>
+            </a:custGeom>
+            <a:ln w="13550" cap="flat">
+              <a:solidFill>
+                <a:srgbClr val="EBEBEB">
+                  <a:alpha val="100000"/>
+                </a:srgbClr>
+              </a:solidFill>
+              <a:prstDash val="solid"/>
+              <a:round/>
+            </a:ln>
+          </p:spPr>
+          <p:txBody>
+            <a:bodyPr/>
+            <a:lstStyle/>
+            <a:p/>
+          </p:txBody>
+        </p:sp>
+        <p:sp>
+          <p:nvSpPr>
+            <p:cNvPr id="64" name="pl64"/>
+            <p:cNvSpPr/>
+            <p:nvPr/>
+          </p:nvSpPr>
+          <p:spPr>
+            <a:xfrm>
+              <a:off x="3825799" y="4336484"/>
+              <a:ext cx="0" cy="1317069"/>
+            </a:xfrm>
+            <a:custGeom>
+              <a:avLst/>
+              <a:pathLst>
+                <a:path w="0" h="1317069">
+                  <a:moveTo>
+                    <a:pt x="0" y="1317069"/>
+                  </a:moveTo>
+                  <a:lnTo>
+                    <a:pt x="0" y="0"/>
+                  </a:lnTo>
+                  <a:lnTo>
+                    <a:pt x="0" y="0"/>
+                  </a:lnTo>
+                </a:path>
+              </a:pathLst>
+            </a:custGeom>
+            <a:ln w="13550" cap="flat">
+              <a:solidFill>
+                <a:srgbClr val="EBEBEB">
+                  <a:alpha val="100000"/>
+                </a:srgbClr>
+              </a:solidFill>
+              <a:prstDash val="solid"/>
+              <a:round/>
+            </a:ln>
+          </p:spPr>
+          <p:txBody>
+            <a:bodyPr/>
+            <a:lstStyle/>
+            <a:p/>
+          </p:txBody>
+        </p:sp>
+        <p:sp>
+          <p:nvSpPr>
+            <p:cNvPr id="65" name="pl65"/>
+            <p:cNvSpPr/>
+            <p:nvPr/>
+          </p:nvSpPr>
+          <p:spPr>
+            <a:xfrm>
+              <a:off x="4686062" y="4336484"/>
+              <a:ext cx="0" cy="1317069"/>
+            </a:xfrm>
+            <a:custGeom>
+              <a:avLst/>
+              <a:pathLst>
+                <a:path w="0" h="1317069">
+                  <a:moveTo>
+                    <a:pt x="0" y="1317069"/>
+                  </a:moveTo>
+                  <a:lnTo>
+                    <a:pt x="0" y="0"/>
+                  </a:lnTo>
+                  <a:lnTo>
+                    <a:pt x="0" y="0"/>
+                  </a:lnTo>
+                </a:path>
+              </a:pathLst>
+            </a:custGeom>
+            <a:ln w="13550" cap="flat">
+              <a:solidFill>
+                <a:srgbClr val="EBEBEB">
+                  <a:alpha val="100000"/>
+                </a:srgbClr>
+              </a:solidFill>
+              <a:prstDash val="solid"/>
+              <a:round/>
+            </a:ln>
+          </p:spPr>
+          <p:txBody>
+            <a:bodyPr/>
+            <a:lstStyle/>
+            <a:p/>
+          </p:txBody>
+        </p:sp>
+        <p:sp>
+          <p:nvSpPr>
+            <p:cNvPr id="66" name="pl66"/>
+            <p:cNvSpPr/>
+            <p:nvPr/>
+          </p:nvSpPr>
+          <p:spPr>
+            <a:xfrm>
+              <a:off x="5546325" y="4336484"/>
+              <a:ext cx="0" cy="1317069"/>
+            </a:xfrm>
+            <a:custGeom>
+              <a:avLst/>
+              <a:pathLst>
+                <a:path w="0" h="1317069">
+                  <a:moveTo>
+                    <a:pt x="0" y="1317069"/>
+                  </a:moveTo>
+                  <a:lnTo>
+                    <a:pt x="0" y="0"/>
+                  </a:lnTo>
+                  <a:lnTo>
+                    <a:pt x="0" y="0"/>
+                  </a:lnTo>
+                </a:path>
+              </a:pathLst>
+            </a:custGeom>
+            <a:ln w="13550" cap="flat">
+              <a:solidFill>
+                <a:srgbClr val="EBEBEB">
+                  <a:alpha val="100000"/>
+                </a:srgbClr>
+              </a:solidFill>
+              <a:prstDash val="solid"/>
+              <a:round/>
+            </a:ln>
+          </p:spPr>
+          <p:txBody>
+            <a:bodyPr/>
+            <a:lstStyle/>
+            <a:p/>
+          </p:txBody>
+        </p:sp>
+        <p:sp>
+          <p:nvSpPr>
+            <p:cNvPr id="67" name="pl67"/>
+            <p:cNvSpPr/>
+            <p:nvPr/>
+          </p:nvSpPr>
+          <p:spPr>
+            <a:xfrm>
+              <a:off x="6406588" y="4336484"/>
+              <a:ext cx="0" cy="1317069"/>
+            </a:xfrm>
+            <a:custGeom>
+              <a:avLst/>
+              <a:pathLst>
+                <a:path w="0" h="1317069">
+                  <a:moveTo>
+                    <a:pt x="0" y="1317069"/>
+                  </a:moveTo>
+                  <a:lnTo>
+                    <a:pt x="0" y="0"/>
+                  </a:lnTo>
+                  <a:lnTo>
+                    <a:pt x="0" y="0"/>
+                  </a:lnTo>
+                </a:path>
+              </a:pathLst>
+            </a:custGeom>
+            <a:ln w="13550" cap="flat">
+              <a:solidFill>
+                <a:srgbClr val="EBEBEB">
+                  <a:alpha val="100000"/>
+                </a:srgbClr>
+              </a:solidFill>
+              <a:prstDash val="solid"/>
+              <a:round/>
+            </a:ln>
+          </p:spPr>
+          <p:txBody>
+            <a:bodyPr/>
+            <a:lstStyle/>
+            <a:p/>
+          </p:txBody>
+        </p:sp>
+        <p:sp>
+          <p:nvSpPr>
+            <p:cNvPr id="68" name="pl68"/>
+            <p:cNvSpPr/>
+            <p:nvPr/>
+          </p:nvSpPr>
+          <p:spPr>
+            <a:xfrm>
+              <a:off x="7266851" y="4336484"/>
+              <a:ext cx="0" cy="1317069"/>
+            </a:xfrm>
+            <a:custGeom>
+              <a:avLst/>
+              <a:pathLst>
+                <a:path w="0" h="1317069">
+                  <a:moveTo>
+                    <a:pt x="0" y="1317069"/>
+                  </a:moveTo>
+                  <a:lnTo>
+                    <a:pt x="0" y="0"/>
+                  </a:lnTo>
+                  <a:lnTo>
+                    <a:pt x="0" y="0"/>
+                  </a:lnTo>
+                </a:path>
+              </a:pathLst>
+            </a:custGeom>
+            <a:ln w="13550" cap="flat">
+              <a:solidFill>
+                <a:srgbClr val="EBEBEB">
+                  <a:alpha val="100000"/>
+                </a:srgbClr>
+              </a:solidFill>
+              <a:prstDash val="solid"/>
+              <a:round/>
+            </a:ln>
+          </p:spPr>
+          <p:txBody>
+            <a:bodyPr/>
+            <a:lstStyle/>
+            <a:p/>
+          </p:txBody>
+        </p:sp>
+        <p:sp>
+          <p:nvSpPr>
+            <p:cNvPr id="69" name="pl69"/>
+            <p:cNvSpPr/>
+            <p:nvPr/>
+          </p:nvSpPr>
+          <p:spPr>
+            <a:xfrm>
+              <a:off x="8127114" y="4336484"/>
+              <a:ext cx="0" cy="1317069"/>
+            </a:xfrm>
+            <a:custGeom>
+              <a:avLst/>
+              <a:pathLst>
+                <a:path w="0" h="1317069">
+                  <a:moveTo>
+                    <a:pt x="0" y="1317069"/>
+                  </a:moveTo>
+                  <a:lnTo>
+                    <a:pt x="0" y="0"/>
+                  </a:lnTo>
+                  <a:lnTo>
+                    <a:pt x="0" y="0"/>
+                  </a:lnTo>
+                </a:path>
+              </a:pathLst>
+            </a:custGeom>
+            <a:ln w="13550" cap="flat">
+              <a:solidFill>
+                <a:srgbClr val="EBEBEB">
+                  <a:alpha val="100000"/>
+                </a:srgbClr>
+              </a:solidFill>
+              <a:prstDash val="solid"/>
+              <a:round/>
+            </a:ln>
+          </p:spPr>
+          <p:txBody>
+            <a:bodyPr/>
+            <a:lstStyle/>
+            <a:p/>
+          </p:txBody>
+        </p:sp>
+        <p:sp>
+          <p:nvSpPr>
+            <p:cNvPr id="70" name="pg70"/>
+            <p:cNvSpPr/>
+            <p:nvPr/>
+          </p:nvSpPr>
+          <p:spPr>
+            <a:xfrm>
+              <a:off x="1235312" y="4336484"/>
+              <a:ext cx="6964104" cy="1247881"/>
+            </a:xfrm>
+            <a:custGeom>
+              <a:avLst/>
+              <a:pathLst>
+                <a:path w="6964104" h="1247881">
+                  <a:moveTo>
+                    <a:pt x="1331827" y="0"/>
+                  </a:moveTo>
+                  <a:lnTo>
+                    <a:pt x="1336545" y="5303"/>
+                  </a:lnTo>
+                  <a:lnTo>
+                    <a:pt x="1406889" y="79684"/>
+                  </a:lnTo>
+                  <a:lnTo>
+                    <a:pt x="1477234" y="149646"/>
+                  </a:lnTo>
+                  <a:lnTo>
+                    <a:pt x="1547578" y="215450"/>
+                  </a:lnTo>
+                  <a:lnTo>
+                    <a:pt x="1617923" y="277345"/>
+                  </a:lnTo>
+                  <a:lnTo>
+                    <a:pt x="1688267" y="335563"/>
+                  </a:lnTo>
+                  <a:lnTo>
+                    <a:pt x="1758612" y="390322"/>
+                  </a:lnTo>
+                  <a:lnTo>
+                    <a:pt x="1828956" y="441827"/>
+                  </a:lnTo>
+                  <a:lnTo>
+                    <a:pt x="1899301" y="490272"/>
+                  </a:lnTo>
+                  <a:lnTo>
+                    <a:pt x="1969645" y="535838"/>
+                  </a:lnTo>
+                  <a:lnTo>
+                    <a:pt x="2039990" y="578698"/>
+                  </a:lnTo>
+                  <a:lnTo>
+                    <a:pt x="2110334" y="619011"/>
+                  </a:lnTo>
+                  <a:lnTo>
+                    <a:pt x="2180679" y="656928"/>
+                  </a:lnTo>
+                  <a:lnTo>
+                    <a:pt x="2251023" y="692593"/>
+                  </a:lnTo>
+                  <a:lnTo>
+                    <a:pt x="2321368" y="726139"/>
+                  </a:lnTo>
+                  <a:lnTo>
+                    <a:pt x="2391712" y="757692"/>
+                  </a:lnTo>
+                  <a:lnTo>
+                    <a:pt x="2462057" y="787370"/>
+                  </a:lnTo>
+                  <a:lnTo>
+                    <a:pt x="2532401" y="815285"/>
+                  </a:lnTo>
+                  <a:lnTo>
+                    <a:pt x="2602746" y="841541"/>
+                  </a:lnTo>
+                  <a:lnTo>
+                    <a:pt x="2673090" y="866237"/>
+                  </a:lnTo>
+                  <a:lnTo>
+                    <a:pt x="2743435" y="889466"/>
+                  </a:lnTo>
+                  <a:lnTo>
+                    <a:pt x="2813779" y="911315"/>
+                  </a:lnTo>
+                  <a:lnTo>
+                    <a:pt x="2884124" y="931865"/>
+                  </a:lnTo>
+                  <a:lnTo>
+                    <a:pt x="2954468" y="951195"/>
+                  </a:lnTo>
+                  <a:lnTo>
+                    <a:pt x="3024813" y="962360"/>
+                  </a:lnTo>
+                  <a:lnTo>
+                    <a:pt x="3095157" y="969245"/>
+                  </a:lnTo>
+                  <a:lnTo>
+                    <a:pt x="3165502" y="975968"/>
+                  </a:lnTo>
+                  <a:lnTo>
+                    <a:pt x="3235846" y="982535"/>
+                  </a:lnTo>
+                  <a:lnTo>
+                    <a:pt x="3306191" y="988948"/>
+                  </a:lnTo>
+                  <a:lnTo>
+                    <a:pt x="3376535" y="995211"/>
+                  </a:lnTo>
+                  <a:lnTo>
+                    <a:pt x="3446880" y="1001329"/>
+                  </a:lnTo>
+                  <a:lnTo>
+                    <a:pt x="3517224" y="1007303"/>
+                  </a:lnTo>
+                  <a:lnTo>
+                    <a:pt x="3587569" y="1013138"/>
+                  </a:lnTo>
+                  <a:lnTo>
+                    <a:pt x="3657913" y="1018837"/>
+                  </a:lnTo>
+                  <a:lnTo>
+                    <a:pt x="3728257" y="1024402"/>
+                  </a:lnTo>
+                  <a:lnTo>
+                    <a:pt x="3798602" y="1029838"/>
+                  </a:lnTo>
+                  <a:lnTo>
+                    <a:pt x="3868946" y="1035147"/>
+                  </a:lnTo>
+                  <a:lnTo>
+                    <a:pt x="3939291" y="1040331"/>
+                  </a:lnTo>
+                  <a:lnTo>
+                    <a:pt x="4009635" y="1045395"/>
+                  </a:lnTo>
+                  <a:lnTo>
+                    <a:pt x="4079980" y="1050341"/>
+                  </a:lnTo>
+                  <a:lnTo>
+                    <a:pt x="4150324" y="1055171"/>
+                  </a:lnTo>
+                  <a:lnTo>
+                    <a:pt x="4220669" y="1059888"/>
+                  </a:lnTo>
+                  <a:lnTo>
+                    <a:pt x="4291013" y="1064495"/>
+                  </a:lnTo>
+                  <a:lnTo>
+                    <a:pt x="4361358" y="1068994"/>
+                  </a:lnTo>
+                  <a:lnTo>
+                    <a:pt x="4431702" y="1073389"/>
+                  </a:lnTo>
+                  <a:lnTo>
+                    <a:pt x="4502047" y="1077681"/>
+                  </a:lnTo>
+                  <a:lnTo>
+                    <a:pt x="4572391" y="1081872"/>
+                  </a:lnTo>
+                  <a:lnTo>
+                    <a:pt x="4642736" y="1085966"/>
+                  </a:lnTo>
+                  <a:lnTo>
+                    <a:pt x="4713080" y="1089964"/>
+                  </a:lnTo>
+                  <a:lnTo>
+                    <a:pt x="4783425" y="1093869"/>
+                  </a:lnTo>
+                  <a:lnTo>
+                    <a:pt x="4853769" y="1097683"/>
+                  </a:lnTo>
+                  <a:lnTo>
+                    <a:pt x="4924114" y="1101408"/>
+                  </a:lnTo>
+                  <a:lnTo>
+                    <a:pt x="4994458" y="1105045"/>
+                  </a:lnTo>
+                  <a:lnTo>
+                    <a:pt x="5064803" y="1108598"/>
+                  </a:lnTo>
+                  <a:lnTo>
+                    <a:pt x="5135147" y="1112068"/>
+                  </a:lnTo>
+                  <a:lnTo>
+                    <a:pt x="5205492" y="1115456"/>
+                  </a:lnTo>
+                  <a:lnTo>
+                    <a:pt x="5275836" y="1118766"/>
+                  </a:lnTo>
+                  <a:lnTo>
+                    <a:pt x="5346181" y="1121998"/>
+                  </a:lnTo>
+                  <a:lnTo>
+                    <a:pt x="5416525" y="1125155"/>
+                  </a:lnTo>
+                  <a:lnTo>
+                    <a:pt x="5486870" y="1128238"/>
+                  </a:lnTo>
+                  <a:lnTo>
+                    <a:pt x="5557214" y="1131250"/>
+                  </a:lnTo>
+                  <a:lnTo>
+                    <a:pt x="5627559" y="1134190"/>
+                  </a:lnTo>
+                  <a:lnTo>
+                    <a:pt x="5697903" y="1137063"/>
+                  </a:lnTo>
+                  <a:lnTo>
+                    <a:pt x="5768248" y="1139868"/>
+                  </a:lnTo>
+                  <a:lnTo>
+                    <a:pt x="5838592" y="1142607"/>
+                  </a:lnTo>
+                  <a:lnTo>
+                    <a:pt x="5908937" y="1145283"/>
+                  </a:lnTo>
+                  <a:lnTo>
+                    <a:pt x="5979281" y="1147896"/>
+                  </a:lnTo>
+                  <a:lnTo>
+                    <a:pt x="6049626" y="1150448"/>
+                  </a:lnTo>
+                  <a:lnTo>
+                    <a:pt x="6119970" y="1152941"/>
+                  </a:lnTo>
+                  <a:lnTo>
+                    <a:pt x="6190315" y="1155375"/>
+                  </a:lnTo>
+                  <a:lnTo>
+                    <a:pt x="6260659" y="1157753"/>
+                  </a:lnTo>
+                  <a:lnTo>
+                    <a:pt x="6331004" y="1160075"/>
+                  </a:lnTo>
+                  <a:lnTo>
+                    <a:pt x="6401348" y="1162343"/>
+                  </a:lnTo>
+                  <a:lnTo>
+                    <a:pt x="6471693" y="1164558"/>
+                  </a:lnTo>
+                  <a:lnTo>
+                    <a:pt x="6542037" y="1166721"/>
+                  </a:lnTo>
+                  <a:lnTo>
+                    <a:pt x="6612382" y="1168833"/>
+                  </a:lnTo>
+                  <a:lnTo>
+                    <a:pt x="6682726" y="1170897"/>
+                  </a:lnTo>
+                  <a:lnTo>
+                    <a:pt x="6753071" y="1172912"/>
+                  </a:lnTo>
+                  <a:lnTo>
+                    <a:pt x="6823415" y="1174880"/>
+                  </a:lnTo>
+                  <a:lnTo>
+                    <a:pt x="6893760" y="1176802"/>
+                  </a:lnTo>
+                  <a:lnTo>
+                    <a:pt x="6964104" y="1178679"/>
+                  </a:lnTo>
+                  <a:lnTo>
+                    <a:pt x="6964104" y="1247881"/>
+                  </a:lnTo>
+                  <a:lnTo>
+                    <a:pt x="6893760" y="1247293"/>
+                  </a:lnTo>
+                  <a:lnTo>
+                    <a:pt x="6823415" y="1246667"/>
+                  </a:lnTo>
+                  <a:lnTo>
+                    <a:pt x="6753071" y="1246001"/>
+                  </a:lnTo>
+                  <a:lnTo>
+                    <a:pt x="6682726" y="1245294"/>
+                  </a:lnTo>
+                  <a:lnTo>
+                    <a:pt x="6612382" y="1244541"/>
+                  </a:lnTo>
+                  <a:lnTo>
+                    <a:pt x="6542037" y="1243742"/>
+                  </a:lnTo>
+                  <a:lnTo>
+                    <a:pt x="6471693" y="1242892"/>
+                  </a:lnTo>
+                  <a:lnTo>
+                    <a:pt x="6401348" y="1241988"/>
+                  </a:lnTo>
+                  <a:lnTo>
+                    <a:pt x="6331004" y="1241027"/>
+                  </a:lnTo>
+                  <a:lnTo>
+                    <a:pt x="6260659" y="1240005"/>
+                  </a:lnTo>
+                  <a:lnTo>
+                    <a:pt x="6190315" y="1238919"/>
+                  </a:lnTo>
+                  <a:lnTo>
+                    <a:pt x="6119970" y="1237764"/>
+                  </a:lnTo>
+                  <a:lnTo>
+                    <a:pt x="6049626" y="1236536"/>
+                  </a:lnTo>
+                  <a:lnTo>
+                    <a:pt x="5979281" y="1235230"/>
+                  </a:lnTo>
+                  <a:lnTo>
+                    <a:pt x="5908937" y="1233842"/>
+                  </a:lnTo>
+                  <a:lnTo>
+                    <a:pt x="5838592" y="1232367"/>
+                  </a:lnTo>
+                  <a:lnTo>
+                    <a:pt x="5768248" y="1230798"/>
+                  </a:lnTo>
+                  <a:lnTo>
+                    <a:pt x="5697903" y="1229130"/>
+                  </a:lnTo>
+                  <a:lnTo>
+                    <a:pt x="5627559" y="1227357"/>
+                  </a:lnTo>
+                  <a:lnTo>
+                    <a:pt x="5557214" y="1225472"/>
+                  </a:lnTo>
+                  <a:lnTo>
+                    <a:pt x="5486870" y="1223468"/>
+                  </a:lnTo>
+                  <a:lnTo>
+                    <a:pt x="5416525" y="1221337"/>
+                  </a:lnTo>
+                  <a:lnTo>
+                    <a:pt x="5346181" y="1219071"/>
+                  </a:lnTo>
+                  <a:lnTo>
+                    <a:pt x="5275836" y="1216663"/>
+                  </a:lnTo>
+                  <a:lnTo>
+                    <a:pt x="5205492" y="1214102"/>
+                  </a:lnTo>
+                  <a:lnTo>
+                    <a:pt x="5135147" y="1211379"/>
+                  </a:lnTo>
+                  <a:lnTo>
+                    <a:pt x="5064803" y="1208485"/>
+                  </a:lnTo>
+                  <a:lnTo>
+                    <a:pt x="4994458" y="1205407"/>
+                  </a:lnTo>
+                  <a:lnTo>
+                    <a:pt x="4924114" y="1202136"/>
+                  </a:lnTo>
+                  <a:lnTo>
+                    <a:pt x="4853769" y="1198657"/>
+                  </a:lnTo>
+                  <a:lnTo>
+                    <a:pt x="4783425" y="1194959"/>
+                  </a:lnTo>
+                  <a:lnTo>
+                    <a:pt x="4713080" y="1191027"/>
+                  </a:lnTo>
+                  <a:lnTo>
+                    <a:pt x="4642736" y="1186847"/>
+                  </a:lnTo>
+                  <a:lnTo>
+                    <a:pt x="4572391" y="1182403"/>
+                  </a:lnTo>
+                  <a:lnTo>
+                    <a:pt x="4502047" y="1177679"/>
+                  </a:lnTo>
+                  <a:lnTo>
+                    <a:pt x="4431702" y="1172655"/>
+                  </a:lnTo>
+                  <a:lnTo>
+                    <a:pt x="4361358" y="1167315"/>
+                  </a:lnTo>
+                  <a:lnTo>
+                    <a:pt x="4291013" y="1161637"/>
+                  </a:lnTo>
+                  <a:lnTo>
+                    <a:pt x="4220669" y="1155600"/>
+                  </a:lnTo>
+                  <a:lnTo>
+                    <a:pt x="4150324" y="1149182"/>
+                  </a:lnTo>
+                  <a:lnTo>
+                    <a:pt x="4079980" y="1142359"/>
+                  </a:lnTo>
+                  <a:lnTo>
+                    <a:pt x="4009635" y="1135105"/>
+                  </a:lnTo>
+                  <a:lnTo>
+                    <a:pt x="3939291" y="1127392"/>
+                  </a:lnTo>
+                  <a:lnTo>
+                    <a:pt x="3868946" y="1119192"/>
+                  </a:lnTo>
+                  <a:lnTo>
+                    <a:pt x="3798602" y="1110474"/>
+                  </a:lnTo>
+                  <a:lnTo>
+                    <a:pt x="3728257" y="1101206"/>
+                  </a:lnTo>
+                  <a:lnTo>
+                    <a:pt x="3657913" y="1091352"/>
+                  </a:lnTo>
+                  <a:lnTo>
+                    <a:pt x="3587569" y="1080876"/>
+                  </a:lnTo>
+                  <a:lnTo>
+                    <a:pt x="3517224" y="1069738"/>
+                  </a:lnTo>
+                  <a:lnTo>
+                    <a:pt x="3446880" y="1057896"/>
+                  </a:lnTo>
+                  <a:lnTo>
+                    <a:pt x="3376535" y="1045307"/>
+                  </a:lnTo>
+                  <a:lnTo>
+                    <a:pt x="3306191" y="1031922"/>
+                  </a:lnTo>
+                  <a:lnTo>
+                    <a:pt x="3235846" y="1017691"/>
+                  </a:lnTo>
+                  <a:lnTo>
+                    <a:pt x="3165502" y="1002562"/>
+                  </a:lnTo>
+                  <a:lnTo>
+                    <a:pt x="3095157" y="986477"/>
+                  </a:lnTo>
+                  <a:lnTo>
+                    <a:pt x="3024813" y="969376"/>
+                  </a:lnTo>
+                  <a:lnTo>
+                    <a:pt x="2954468" y="955312"/>
+                  </a:lnTo>
+                  <a:lnTo>
+                    <a:pt x="2884124" y="948094"/>
+                  </a:lnTo>
+                  <a:lnTo>
+                    <a:pt x="2813779" y="940704"/>
+                  </a:lnTo>
+                  <a:lnTo>
+                    <a:pt x="2743435" y="933138"/>
+                  </a:lnTo>
+                  <a:lnTo>
+                    <a:pt x="2673090" y="925390"/>
+                  </a:lnTo>
+                  <a:lnTo>
+                    <a:pt x="2602746" y="917457"/>
+                  </a:lnTo>
+                  <a:lnTo>
+                    <a:pt x="2532401" y="909335"/>
+                  </a:lnTo>
+                  <a:lnTo>
+                    <a:pt x="2462057" y="901019"/>
+                  </a:lnTo>
+                  <a:lnTo>
+                    <a:pt x="2391712" y="892503"/>
+                  </a:lnTo>
+                  <a:lnTo>
+                    <a:pt x="2321368" y="883784"/>
+                  </a:lnTo>
+                  <a:lnTo>
+                    <a:pt x="2251023" y="874857"/>
+                  </a:lnTo>
+                  <a:lnTo>
+                    <a:pt x="2180679" y="865716"/>
+                  </a:lnTo>
+                  <a:lnTo>
+                    <a:pt x="2110334" y="856357"/>
+                  </a:lnTo>
+                  <a:lnTo>
+                    <a:pt x="2039990" y="846774"/>
+                  </a:lnTo>
+                  <a:lnTo>
+                    <a:pt x="1969645" y="836961"/>
+                  </a:lnTo>
+                  <a:lnTo>
+                    <a:pt x="1899301" y="826915"/>
+                  </a:lnTo>
+                  <a:lnTo>
+                    <a:pt x="1828956" y="816628"/>
+                  </a:lnTo>
+                  <a:lnTo>
+                    <a:pt x="1758612" y="806095"/>
+                  </a:lnTo>
+                  <a:lnTo>
+                    <a:pt x="1688267" y="795310"/>
+                  </a:lnTo>
+                  <a:lnTo>
+                    <a:pt x="1617923" y="784267"/>
+                  </a:lnTo>
+                  <a:lnTo>
+                    <a:pt x="1547578" y="772961"/>
+                  </a:lnTo>
+                  <a:lnTo>
+                    <a:pt x="1477234" y="761384"/>
+                  </a:lnTo>
+                  <a:lnTo>
+                    <a:pt x="1406889" y="749530"/>
+                  </a:lnTo>
+                  <a:lnTo>
+                    <a:pt x="1336545" y="737393"/>
+                  </a:lnTo>
+                  <a:lnTo>
+                    <a:pt x="1266200" y="724966"/>
+                  </a:lnTo>
+                  <a:lnTo>
+                    <a:pt x="1195856" y="712242"/>
+                  </a:lnTo>
+                  <a:lnTo>
+                    <a:pt x="1125511" y="699213"/>
+                  </a:lnTo>
+                  <a:lnTo>
+                    <a:pt x="1055167" y="685873"/>
+                  </a:lnTo>
+                  <a:lnTo>
+                    <a:pt x="984822" y="672214"/>
+                  </a:lnTo>
+                  <a:lnTo>
+                    <a:pt x="914478" y="658229"/>
+                  </a:lnTo>
+                  <a:lnTo>
+                    <a:pt x="844133" y="643909"/>
+                  </a:lnTo>
+                  <a:lnTo>
+                    <a:pt x="773789" y="629247"/>
+                  </a:lnTo>
+                  <a:lnTo>
+                    <a:pt x="703444" y="614234"/>
+                  </a:lnTo>
+                  <a:lnTo>
+                    <a:pt x="633100" y="598863"/>
+                  </a:lnTo>
+                  <a:lnTo>
+                    <a:pt x="562755" y="583123"/>
+                  </a:lnTo>
+                  <a:lnTo>
+                    <a:pt x="492411" y="567008"/>
+                  </a:lnTo>
+                  <a:lnTo>
+                    <a:pt x="422066" y="550507"/>
+                  </a:lnTo>
+                  <a:lnTo>
+                    <a:pt x="351722" y="533612"/>
+                  </a:lnTo>
+                  <a:lnTo>
+                    <a:pt x="281377" y="516313"/>
+                  </a:lnTo>
+                  <a:lnTo>
+                    <a:pt x="211033" y="498601"/>
+                  </a:lnTo>
+                  <a:lnTo>
+                    <a:pt x="140688" y="480465"/>
+                  </a:lnTo>
+                  <a:lnTo>
+                    <a:pt x="70344" y="461895"/>
+                  </a:lnTo>
+                  <a:lnTo>
+                    <a:pt x="0" y="442881"/>
+                  </a:lnTo>
+                  <a:close/>
+                </a:path>
+              </a:pathLst>
+            </a:custGeom>
+            <a:solidFill>
+              <a:srgbClr val="FF8C00">
+                <a:alpha val="20000"/>
+              </a:srgbClr>
+            </a:solidFill>
+          </p:spPr>
+          <p:txBody>
+            <a:bodyPr/>
+            <a:lstStyle/>
+            <a:p/>
+          </p:txBody>
+        </p:sp>
+        <p:sp>
+          <p:nvSpPr>
+            <p:cNvPr id="71" name="pl71"/>
+            <p:cNvSpPr/>
+            <p:nvPr/>
+          </p:nvSpPr>
+          <p:spPr>
+            <a:xfrm>
+              <a:off x="2567139" y="4336484"/>
+              <a:ext cx="5632277" cy="1178679"/>
+            </a:xfrm>
+            <a:custGeom>
+              <a:avLst/>
+              <a:pathLst>
+                <a:path w="5632277" h="1178679">
+                  <a:moveTo>
+                    <a:pt x="0" y="0"/>
+                  </a:moveTo>
+                  <a:lnTo>
+                    <a:pt x="4718" y="5303"/>
+                  </a:lnTo>
+                  <a:lnTo>
+                    <a:pt x="75062" y="79684"/>
+                  </a:lnTo>
+                  <a:lnTo>
+                    <a:pt x="145407" y="149646"/>
+                  </a:lnTo>
+                  <a:lnTo>
+                    <a:pt x="215751" y="215450"/>
+                  </a:lnTo>
+                  <a:lnTo>
+                    <a:pt x="286096" y="277345"/>
+                  </a:lnTo>
+                  <a:lnTo>
+                    <a:pt x="356440" y="335563"/>
+                  </a:lnTo>
+                  <a:lnTo>
+                    <a:pt x="426785" y="390322"/>
+                  </a:lnTo>
+                  <a:lnTo>
+                    <a:pt x="497129" y="441827"/>
+                  </a:lnTo>
+                  <a:lnTo>
+                    <a:pt x="567474" y="490272"/>
+                  </a:lnTo>
+                  <a:lnTo>
+                    <a:pt x="637818" y="535838"/>
+                  </a:lnTo>
+                  <a:lnTo>
+                    <a:pt x="708163" y="578698"/>
+                  </a:lnTo>
+                  <a:lnTo>
+                    <a:pt x="778507" y="619011"/>
+                  </a:lnTo>
+                  <a:lnTo>
+                    <a:pt x="848852" y="656928"/>
+                  </a:lnTo>
+                  <a:lnTo>
+                    <a:pt x="919196" y="692593"/>
+                  </a:lnTo>
+                  <a:lnTo>
+                    <a:pt x="989540" y="726139"/>
+                  </a:lnTo>
+                  <a:lnTo>
+                    <a:pt x="1059885" y="757692"/>
+                  </a:lnTo>
+                  <a:lnTo>
+                    <a:pt x="1130229" y="787370"/>
+                  </a:lnTo>
+                  <a:lnTo>
+                    <a:pt x="1200574" y="815285"/>
+                  </a:lnTo>
+                  <a:lnTo>
+                    <a:pt x="1270918" y="841541"/>
+                  </a:lnTo>
+                  <a:lnTo>
+                    <a:pt x="1341263" y="866237"/>
+                  </a:lnTo>
+                  <a:lnTo>
+                    <a:pt x="1411607" y="889466"/>
+                  </a:lnTo>
+                  <a:lnTo>
+                    <a:pt x="1481952" y="911315"/>
+                  </a:lnTo>
+                  <a:lnTo>
+                    <a:pt x="1552296" y="931865"/>
+                  </a:lnTo>
+                  <a:lnTo>
+                    <a:pt x="1622641" y="951195"/>
+                  </a:lnTo>
+                  <a:lnTo>
+                    <a:pt x="1692985" y="962360"/>
+                  </a:lnTo>
+                  <a:lnTo>
+                    <a:pt x="1763330" y="969245"/>
+                  </a:lnTo>
+                  <a:lnTo>
+                    <a:pt x="1833674" y="975968"/>
+                  </a:lnTo>
+                  <a:lnTo>
+                    <a:pt x="1904019" y="982535"/>
+                  </a:lnTo>
+                  <a:lnTo>
+                    <a:pt x="1974363" y="988948"/>
+                  </a:lnTo>
+                  <a:lnTo>
+                    <a:pt x="2044708" y="995211"/>
+                  </a:lnTo>
+                  <a:lnTo>
+                    <a:pt x="2115052" y="1001329"/>
+                  </a:lnTo>
+                  <a:lnTo>
+                    <a:pt x="2185397" y="1007303"/>
+                  </a:lnTo>
+                  <a:lnTo>
+                    <a:pt x="2255741" y="1013138"/>
+                  </a:lnTo>
+                  <a:lnTo>
+                    <a:pt x="2326086" y="1018837"/>
+                  </a:lnTo>
+                  <a:lnTo>
+                    <a:pt x="2396430" y="1024402"/>
+                  </a:lnTo>
+                  <a:lnTo>
+                    <a:pt x="2466775" y="1029838"/>
+                  </a:lnTo>
+                  <a:lnTo>
+                    <a:pt x="2537119" y="1035147"/>
+                  </a:lnTo>
+                  <a:lnTo>
+                    <a:pt x="2607464" y="1040331"/>
+                  </a:lnTo>
+                  <a:lnTo>
+                    <a:pt x="2677808" y="1045395"/>
+                  </a:lnTo>
+                  <a:lnTo>
+                    <a:pt x="2748153" y="1050341"/>
+                  </a:lnTo>
+                  <a:lnTo>
+                    <a:pt x="2818497" y="1055171"/>
+                  </a:lnTo>
+                  <a:lnTo>
+                    <a:pt x="2888842" y="1059888"/>
+                  </a:lnTo>
+                  <a:lnTo>
+                    <a:pt x="2959186" y="1064495"/>
+                  </a:lnTo>
+                  <a:lnTo>
+                    <a:pt x="3029531" y="1068994"/>
+                  </a:lnTo>
+                  <a:lnTo>
+                    <a:pt x="3099875" y="1073389"/>
+                  </a:lnTo>
+                  <a:lnTo>
+                    <a:pt x="3170220" y="1077681"/>
+                  </a:lnTo>
+                  <a:lnTo>
+                    <a:pt x="3240564" y="1081872"/>
+                  </a:lnTo>
+                  <a:lnTo>
+                    <a:pt x="3310909" y="1085966"/>
+                  </a:lnTo>
+                  <a:lnTo>
+                    <a:pt x="3381253" y="1089964"/>
+                  </a:lnTo>
+                  <a:lnTo>
+                    <a:pt x="3451598" y="1093869"/>
+                  </a:lnTo>
+                  <a:lnTo>
+                    <a:pt x="3521942" y="1097683"/>
+                  </a:lnTo>
+                  <a:lnTo>
+                    <a:pt x="3592287" y="1101408"/>
+                  </a:lnTo>
+                  <a:lnTo>
+                    <a:pt x="3662631" y="1105045"/>
+                  </a:lnTo>
+                  <a:lnTo>
+                    <a:pt x="3732976" y="1108598"/>
+                  </a:lnTo>
+                  <a:lnTo>
+                    <a:pt x="3803320" y="1112068"/>
+                  </a:lnTo>
+                  <a:lnTo>
+                    <a:pt x="3873665" y="1115456"/>
+                  </a:lnTo>
+                  <a:lnTo>
+                    <a:pt x="3944009" y="1118766"/>
+                  </a:lnTo>
+                  <a:lnTo>
+                    <a:pt x="4014354" y="1121998"/>
+                  </a:lnTo>
+                  <a:lnTo>
+                    <a:pt x="4084698" y="1125155"/>
+                  </a:lnTo>
+                  <a:lnTo>
+                    <a:pt x="4155043" y="1128238"/>
+                  </a:lnTo>
+                  <a:lnTo>
+                    <a:pt x="4225387" y="1131250"/>
+                  </a:lnTo>
+                  <a:lnTo>
+                    <a:pt x="4295732" y="1134190"/>
+                  </a:lnTo>
+                  <a:lnTo>
+                    <a:pt x="4366076" y="1137063"/>
+                  </a:lnTo>
+                  <a:lnTo>
+                    <a:pt x="4436421" y="1139868"/>
+                  </a:lnTo>
+                  <a:lnTo>
+                    <a:pt x="4506765" y="1142607"/>
+                  </a:lnTo>
+                  <a:lnTo>
+                    <a:pt x="4577110" y="1145283"/>
+                  </a:lnTo>
+                  <a:lnTo>
+                    <a:pt x="4647454" y="1147896"/>
+                  </a:lnTo>
+                  <a:lnTo>
+                    <a:pt x="4717798" y="1150448"/>
+                  </a:lnTo>
+                  <a:lnTo>
+                    <a:pt x="4788143" y="1152941"/>
+                  </a:lnTo>
+                  <a:lnTo>
+                    <a:pt x="4858487" y="1155375"/>
+                  </a:lnTo>
+                  <a:lnTo>
+                    <a:pt x="4928832" y="1157753"/>
+                  </a:lnTo>
+                  <a:lnTo>
+                    <a:pt x="4999176" y="1160075"/>
+                  </a:lnTo>
+                  <a:lnTo>
+                    <a:pt x="5069521" y="1162343"/>
+                  </a:lnTo>
+                  <a:lnTo>
+                    <a:pt x="5139865" y="1164558"/>
+                  </a:lnTo>
+                  <a:lnTo>
+                    <a:pt x="5210210" y="1166721"/>
+                  </a:lnTo>
+                  <a:lnTo>
+                    <a:pt x="5280554" y="1168833"/>
+                  </a:lnTo>
+                  <a:lnTo>
+                    <a:pt x="5350899" y="1170897"/>
+                  </a:lnTo>
+                  <a:lnTo>
+                    <a:pt x="5421243" y="1172912"/>
+                  </a:lnTo>
+                  <a:lnTo>
+                    <a:pt x="5491588" y="1174880"/>
+                  </a:lnTo>
+                  <a:lnTo>
+                    <a:pt x="5561932" y="1176802"/>
+                  </a:lnTo>
+                  <a:lnTo>
+                    <a:pt x="5632277" y="1178679"/>
+                  </a:lnTo>
+                </a:path>
+              </a:pathLst>
+            </a:custGeom>
+          </p:spPr>
+          <p:txBody>
+            <a:bodyPr/>
+            <a:lstStyle/>
+            <a:p/>
+          </p:txBody>
+        </p:sp>
+        <p:sp>
+          <p:nvSpPr>
+            <p:cNvPr id="72" name="pl72"/>
+            <p:cNvSpPr/>
+            <p:nvPr/>
+          </p:nvSpPr>
+          <p:spPr>
+            <a:xfrm>
+              <a:off x="1235312" y="4779366"/>
+              <a:ext cx="6964104" cy="805000"/>
+            </a:xfrm>
+            <a:custGeom>
+              <a:avLst/>
+              <a:pathLst>
+                <a:path w="6964104" h="805000">
+                  <a:moveTo>
+                    <a:pt x="6964104" y="805000"/>
+                  </a:moveTo>
+                  <a:lnTo>
+                    <a:pt x="6893760" y="804411"/>
+                  </a:lnTo>
+                  <a:lnTo>
+                    <a:pt x="6823415" y="803785"/>
+                  </a:lnTo>
+                  <a:lnTo>
+                    <a:pt x="6753071" y="803119"/>
+                  </a:lnTo>
+                  <a:lnTo>
+                    <a:pt x="6682726" y="802412"/>
+                  </a:lnTo>
+                  <a:lnTo>
+                    <a:pt x="6612382" y="801660"/>
+                  </a:lnTo>
+                  <a:lnTo>
+                    <a:pt x="6542037" y="800860"/>
+                  </a:lnTo>
+                  <a:lnTo>
+                    <a:pt x="6471693" y="800010"/>
+                  </a:lnTo>
+                  <a:lnTo>
+                    <a:pt x="6401348" y="799106"/>
+                  </a:lnTo>
+                  <a:lnTo>
+                    <a:pt x="6331004" y="798145"/>
+                  </a:lnTo>
+                  <a:lnTo>
+                    <a:pt x="6260659" y="797123"/>
+                  </a:lnTo>
+                  <a:lnTo>
+                    <a:pt x="6190315" y="796037"/>
+                  </a:lnTo>
+                  <a:lnTo>
+                    <a:pt x="6119970" y="794882"/>
+                  </a:lnTo>
+                  <a:lnTo>
+                    <a:pt x="6049626" y="793654"/>
+                  </a:lnTo>
+                  <a:lnTo>
+                    <a:pt x="5979281" y="792349"/>
+                  </a:lnTo>
+                  <a:lnTo>
+                    <a:pt x="5908937" y="790961"/>
+                  </a:lnTo>
+                  <a:lnTo>
+                    <a:pt x="5838592" y="789485"/>
+                  </a:lnTo>
+                  <a:lnTo>
+                    <a:pt x="5768248" y="787916"/>
+                  </a:lnTo>
+                  <a:lnTo>
+                    <a:pt x="5697903" y="786249"/>
+                  </a:lnTo>
+                  <a:lnTo>
+                    <a:pt x="5627559" y="784475"/>
+                  </a:lnTo>
+                  <a:lnTo>
+                    <a:pt x="5557214" y="782590"/>
+                  </a:lnTo>
+                  <a:lnTo>
+                    <a:pt x="5486870" y="780586"/>
+                  </a:lnTo>
+                  <a:lnTo>
+                    <a:pt x="5416525" y="778455"/>
+                  </a:lnTo>
+                  <a:lnTo>
+                    <a:pt x="5346181" y="776189"/>
+                  </a:lnTo>
+                  <a:lnTo>
+                    <a:pt x="5275836" y="773781"/>
+                  </a:lnTo>
+                  <a:lnTo>
+                    <a:pt x="5205492" y="771220"/>
+                  </a:lnTo>
+                  <a:lnTo>
+                    <a:pt x="5135147" y="768497"/>
+                  </a:lnTo>
+                  <a:lnTo>
+                    <a:pt x="5064803" y="765603"/>
+                  </a:lnTo>
+                  <a:lnTo>
+                    <a:pt x="4994458" y="762526"/>
+                  </a:lnTo>
+                  <a:lnTo>
+                    <a:pt x="4924114" y="759254"/>
+                  </a:lnTo>
+                  <a:lnTo>
+                    <a:pt x="4853769" y="755776"/>
+                  </a:lnTo>
+                  <a:lnTo>
+                    <a:pt x="4783425" y="752077"/>
+                  </a:lnTo>
+                  <a:lnTo>
+                    <a:pt x="4713080" y="748146"/>
+                  </a:lnTo>
+                  <a:lnTo>
+                    <a:pt x="4642736" y="743966"/>
+                  </a:lnTo>
+                  <a:lnTo>
+                    <a:pt x="4572391" y="739522"/>
+                  </a:lnTo>
+                  <a:lnTo>
+                    <a:pt x="4502047" y="734797"/>
+                  </a:lnTo>
+                  <a:lnTo>
+                    <a:pt x="4431702" y="729773"/>
+                  </a:lnTo>
+                  <a:lnTo>
+                    <a:pt x="4361358" y="724433"/>
+                  </a:lnTo>
+                  <a:lnTo>
+                    <a:pt x="4291013" y="718755"/>
+                  </a:lnTo>
+                  <a:lnTo>
+                    <a:pt x="4220669" y="712718"/>
+                  </a:lnTo>
+                  <a:lnTo>
+                    <a:pt x="4150324" y="706300"/>
+                  </a:lnTo>
+                  <a:lnTo>
+                    <a:pt x="4079980" y="699477"/>
+                  </a:lnTo>
+                  <a:lnTo>
+                    <a:pt x="4009635" y="692223"/>
+                  </a:lnTo>
+                  <a:lnTo>
+                    <a:pt x="3939291" y="684510"/>
+                  </a:lnTo>
+                  <a:lnTo>
+                    <a:pt x="3868946" y="676310"/>
+                  </a:lnTo>
+                  <a:lnTo>
+                    <a:pt x="3798602" y="667593"/>
+                  </a:lnTo>
+                  <a:lnTo>
+                    <a:pt x="3728257" y="658324"/>
+                  </a:lnTo>
+                  <a:lnTo>
+                    <a:pt x="3657913" y="648470"/>
+                  </a:lnTo>
+                  <a:lnTo>
+                    <a:pt x="3587569" y="637994"/>
+                  </a:lnTo>
+                  <a:lnTo>
+                    <a:pt x="3517224" y="626856"/>
+                  </a:lnTo>
+                  <a:lnTo>
+                    <a:pt x="3446880" y="615015"/>
+                  </a:lnTo>
+                  <a:lnTo>
+                    <a:pt x="3376535" y="602425"/>
+                  </a:lnTo>
+                  <a:lnTo>
+                    <a:pt x="3306191" y="589040"/>
+                  </a:lnTo>
+                  <a:lnTo>
+                    <a:pt x="3235846" y="574810"/>
+                  </a:lnTo>
+                  <a:lnTo>
+                    <a:pt x="3165502" y="559680"/>
+                  </a:lnTo>
+                  <a:lnTo>
+                    <a:pt x="3095157" y="543596"/>
+                  </a:lnTo>
+                  <a:lnTo>
+                    <a:pt x="3024813" y="526495"/>
+                  </a:lnTo>
+                  <a:lnTo>
+                    <a:pt x="2954468" y="512430"/>
+                  </a:lnTo>
+                  <a:lnTo>
+                    <a:pt x="2884124" y="505212"/>
+                  </a:lnTo>
+                  <a:lnTo>
+                    <a:pt x="2813779" y="497823"/>
+                  </a:lnTo>
+                  <a:lnTo>
+                    <a:pt x="2743435" y="490256"/>
+                  </a:lnTo>
+                  <a:lnTo>
+                    <a:pt x="2673090" y="482508"/>
+                  </a:lnTo>
+                  <a:lnTo>
+                    <a:pt x="2602746" y="474576"/>
+                  </a:lnTo>
+                  <a:lnTo>
+                    <a:pt x="2532401" y="466453"/>
+                  </a:lnTo>
+                  <a:lnTo>
+                    <a:pt x="2462057" y="458137"/>
+                  </a:lnTo>
+                  <a:lnTo>
+                    <a:pt x="2391712" y="449621"/>
+                  </a:lnTo>
+                  <a:lnTo>
+                    <a:pt x="2321368" y="440902"/>
+                  </a:lnTo>
+                  <a:lnTo>
+                    <a:pt x="2251023" y="431975"/>
+                  </a:lnTo>
+                  <a:lnTo>
+                    <a:pt x="2180679" y="422834"/>
+                  </a:lnTo>
+                  <a:lnTo>
+                    <a:pt x="2110334" y="413475"/>
+                  </a:lnTo>
+                  <a:lnTo>
+                    <a:pt x="2039990" y="403892"/>
+                  </a:lnTo>
+                  <a:lnTo>
+                    <a:pt x="1969645" y="394080"/>
+                  </a:lnTo>
+                  <a:lnTo>
+                    <a:pt x="1899301" y="384033"/>
+                  </a:lnTo>
+                  <a:lnTo>
+                    <a:pt x="1828956" y="373746"/>
+                  </a:lnTo>
+                  <a:lnTo>
+                    <a:pt x="1758612" y="363213"/>
+                  </a:lnTo>
+                  <a:lnTo>
+                    <a:pt x="1688267" y="352428"/>
+                  </a:lnTo>
+                  <a:lnTo>
+                    <a:pt x="1617923" y="341386"/>
+                  </a:lnTo>
+                  <a:lnTo>
+                    <a:pt x="1547578" y="330079"/>
+                  </a:lnTo>
+                  <a:lnTo>
+                    <a:pt x="1477234" y="318502"/>
+                  </a:lnTo>
+                  <a:lnTo>
+                    <a:pt x="1406889" y="306648"/>
+                  </a:lnTo>
+                  <a:lnTo>
+                    <a:pt x="1336545" y="294511"/>
+                  </a:lnTo>
+                  <a:lnTo>
+                    <a:pt x="1266200" y="282084"/>
+                  </a:lnTo>
+                  <a:lnTo>
+                    <a:pt x="1195856" y="269360"/>
+                  </a:lnTo>
+                  <a:lnTo>
+                    <a:pt x="1125511" y="256331"/>
+                  </a:lnTo>
+                  <a:lnTo>
+                    <a:pt x="1055167" y="242991"/>
+                  </a:lnTo>
+                  <a:lnTo>
+                    <a:pt x="984822" y="229332"/>
+                  </a:lnTo>
+                  <a:lnTo>
+                    <a:pt x="914478" y="215347"/>
+                  </a:lnTo>
+                  <a:lnTo>
+                    <a:pt x="844133" y="201027"/>
+                  </a:lnTo>
+                  <a:lnTo>
+                    <a:pt x="773789" y="186365"/>
+                  </a:lnTo>
+                  <a:lnTo>
+                    <a:pt x="703444" y="171352"/>
+                  </a:lnTo>
+                  <a:lnTo>
+                    <a:pt x="633100" y="155981"/>
+                  </a:lnTo>
+                  <a:lnTo>
+                    <a:pt x="562755" y="140242"/>
+                  </a:lnTo>
+                  <a:lnTo>
+                    <a:pt x="492411" y="124126"/>
+                  </a:lnTo>
+                  <a:lnTo>
+                    <a:pt x="422066" y="107626"/>
+                  </a:lnTo>
+                  <a:lnTo>
+                    <a:pt x="351722" y="90731"/>
+                  </a:lnTo>
+                  <a:lnTo>
+                    <a:pt x="281377" y="73431"/>
+                  </a:lnTo>
+                  <a:lnTo>
+                    <a:pt x="211033" y="55719"/>
+                  </a:lnTo>
+                  <a:lnTo>
+                    <a:pt x="140688" y="37583"/>
+                  </a:lnTo>
+                  <a:lnTo>
+                    <a:pt x="70344" y="19013"/>
+                  </a:lnTo>
+                  <a:lnTo>
+                    <a:pt x="0" y="0"/>
+                  </a:lnTo>
+                </a:path>
+              </a:pathLst>
+            </a:custGeom>
+          </p:spPr>
+          <p:txBody>
+            <a:bodyPr/>
+            <a:lstStyle/>
+            <a:p/>
+          </p:txBody>
+        </p:sp>
+        <p:sp>
+          <p:nvSpPr>
+            <p:cNvPr id="73" name="pl73"/>
+            <p:cNvSpPr/>
+            <p:nvPr/>
+          </p:nvSpPr>
+          <p:spPr>
+            <a:xfrm>
+              <a:off x="1836770" y="4336484"/>
+              <a:ext cx="6362645" cy="1230149"/>
+            </a:xfrm>
+            <a:custGeom>
+              <a:avLst/>
+              <a:pathLst>
+                <a:path w="6362645" h="1230149">
+                  <a:moveTo>
+                    <a:pt x="0" y="0"/>
+                  </a:moveTo>
+                  <a:lnTo>
+                    <a:pt x="31641" y="24047"/>
+                  </a:lnTo>
+                  <a:lnTo>
+                    <a:pt x="101986" y="75286"/>
+                  </a:lnTo>
+                  <a:lnTo>
+                    <a:pt x="172330" y="124396"/>
+                  </a:lnTo>
+                  <a:lnTo>
+                    <a:pt x="242675" y="171466"/>
+                  </a:lnTo>
+                  <a:lnTo>
+                    <a:pt x="313019" y="216579"/>
+                  </a:lnTo>
+                  <a:lnTo>
+                    <a:pt x="383364" y="259819"/>
+                  </a:lnTo>
+                  <a:lnTo>
+                    <a:pt x="453708" y="301261"/>
+                  </a:lnTo>
+                  <a:lnTo>
+                    <a:pt x="524053" y="340982"/>
+                  </a:lnTo>
+                  <a:lnTo>
+                    <a:pt x="594397" y="379052"/>
+                  </a:lnTo>
+                  <a:lnTo>
+                    <a:pt x="664742" y="415540"/>
+                  </a:lnTo>
+                  <a:lnTo>
+                    <a:pt x="735086" y="450513"/>
+                  </a:lnTo>
+                  <a:lnTo>
+                    <a:pt x="805431" y="484032"/>
+                  </a:lnTo>
+                  <a:lnTo>
+                    <a:pt x="875775" y="516158"/>
+                  </a:lnTo>
+                  <a:lnTo>
+                    <a:pt x="946120" y="546949"/>
+                  </a:lnTo>
+                  <a:lnTo>
+                    <a:pt x="1016464" y="576461"/>
+                  </a:lnTo>
+                  <a:lnTo>
+                    <a:pt x="1086809" y="604747"/>
+                  </a:lnTo>
+                  <a:lnTo>
+                    <a:pt x="1157153" y="631857"/>
+                  </a:lnTo>
+                  <a:lnTo>
+                    <a:pt x="1227498" y="657841"/>
+                  </a:lnTo>
+                  <a:lnTo>
+                    <a:pt x="1297842" y="682745"/>
+                  </a:lnTo>
+                  <a:lnTo>
+                    <a:pt x="1368187" y="706615"/>
+                  </a:lnTo>
+                  <a:lnTo>
+                    <a:pt x="1438531" y="729492"/>
+                  </a:lnTo>
+                  <a:lnTo>
+                    <a:pt x="1508876" y="751419"/>
+                  </a:lnTo>
+                  <a:lnTo>
+                    <a:pt x="1579220" y="772435"/>
+                  </a:lnTo>
+                  <a:lnTo>
+                    <a:pt x="1649565" y="792578"/>
+                  </a:lnTo>
+                  <a:lnTo>
+                    <a:pt x="1719909" y="811884"/>
+                  </a:lnTo>
+                  <a:lnTo>
+                    <a:pt x="1790254" y="830387"/>
+                  </a:lnTo>
+                  <a:lnTo>
+                    <a:pt x="1860598" y="848122"/>
+                  </a:lnTo>
+                  <a:lnTo>
+                    <a:pt x="1930943" y="865120"/>
+                  </a:lnTo>
+                  <a:lnTo>
+                    <a:pt x="2001287" y="881411"/>
+                  </a:lnTo>
+                  <a:lnTo>
+                    <a:pt x="2071631" y="897026"/>
+                  </a:lnTo>
+                  <a:lnTo>
+                    <a:pt x="2141976" y="911992"/>
+                  </a:lnTo>
+                  <a:lnTo>
+                    <a:pt x="2212320" y="926336"/>
+                  </a:lnTo>
+                  <a:lnTo>
+                    <a:pt x="2282665" y="940084"/>
+                  </a:lnTo>
+                  <a:lnTo>
+                    <a:pt x="2353009" y="953260"/>
+                  </a:lnTo>
+                  <a:lnTo>
+                    <a:pt x="2423354" y="965889"/>
+                  </a:lnTo>
+                  <a:lnTo>
+                    <a:pt x="2493698" y="977994"/>
+                  </a:lnTo>
+                  <a:lnTo>
+                    <a:pt x="2564043" y="989595"/>
+                  </a:lnTo>
+                  <a:lnTo>
+                    <a:pt x="2634387" y="1000715"/>
+                  </a:lnTo>
+                  <a:lnTo>
+                    <a:pt x="2704732" y="1011372"/>
+                  </a:lnTo>
+                  <a:lnTo>
+                    <a:pt x="2775076" y="1021587"/>
+                  </a:lnTo>
+                  <a:lnTo>
+                    <a:pt x="2845421" y="1031377"/>
+                  </a:lnTo>
+                  <a:lnTo>
+                    <a:pt x="2915765" y="1040760"/>
+                  </a:lnTo>
+                  <a:lnTo>
+                    <a:pt x="2986110" y="1049754"/>
+                  </a:lnTo>
+                  <a:lnTo>
+                    <a:pt x="3056454" y="1058373"/>
+                  </a:lnTo>
+                  <a:lnTo>
+                    <a:pt x="3126799" y="1066635"/>
+                  </a:lnTo>
+                  <a:lnTo>
+                    <a:pt x="3197143" y="1074553"/>
+                  </a:lnTo>
+                  <a:lnTo>
+                    <a:pt x="3267488" y="1082143"/>
+                  </a:lnTo>
+                  <a:lnTo>
+                    <a:pt x="3337832" y="1089416"/>
+                  </a:lnTo>
+                  <a:lnTo>
+                    <a:pt x="3408177" y="1096388"/>
+                  </a:lnTo>
+                  <a:lnTo>
+                    <a:pt x="3478521" y="1103070"/>
+                  </a:lnTo>
+                  <a:lnTo>
+                    <a:pt x="3548866" y="1109475"/>
+                  </a:lnTo>
+                  <a:lnTo>
+                    <a:pt x="3619210" y="1115613"/>
+                  </a:lnTo>
+                  <a:lnTo>
+                    <a:pt x="3689555" y="1121496"/>
+                  </a:lnTo>
+                  <a:lnTo>
+                    <a:pt x="3759899" y="1127135"/>
+                  </a:lnTo>
+                  <a:lnTo>
+                    <a:pt x="3830244" y="1132539"/>
+                  </a:lnTo>
+                  <a:lnTo>
+                    <a:pt x="3900588" y="1137719"/>
+                  </a:lnTo>
+                  <a:lnTo>
+                    <a:pt x="3970933" y="1142684"/>
+                  </a:lnTo>
+                  <a:lnTo>
+                    <a:pt x="4041277" y="1147442"/>
+                  </a:lnTo>
+                  <a:lnTo>
+                    <a:pt x="4111622" y="1152003"/>
+                  </a:lnTo>
+                  <a:lnTo>
+                    <a:pt x="4181966" y="1156374"/>
+                  </a:lnTo>
+                  <a:lnTo>
+                    <a:pt x="4252311" y="1160564"/>
+                  </a:lnTo>
+                  <a:lnTo>
+                    <a:pt x="4322655" y="1164579"/>
+                  </a:lnTo>
+                  <a:lnTo>
+                    <a:pt x="4393000" y="1168428"/>
+                  </a:lnTo>
+                  <a:lnTo>
+                    <a:pt x="4463344" y="1172116"/>
+                  </a:lnTo>
+                  <a:lnTo>
+                    <a:pt x="4533689" y="1175652"/>
+                  </a:lnTo>
+                  <a:lnTo>
+                    <a:pt x="4604033" y="1179040"/>
+                  </a:lnTo>
+                  <a:lnTo>
+                    <a:pt x="4674378" y="1182288"/>
+                  </a:lnTo>
+                  <a:lnTo>
+                    <a:pt x="4744722" y="1185401"/>
+                  </a:lnTo>
+                  <a:lnTo>
+                    <a:pt x="4815067" y="1188384"/>
+                  </a:lnTo>
+                  <a:lnTo>
+                    <a:pt x="4885411" y="1191244"/>
+                  </a:lnTo>
+                  <a:lnTo>
+                    <a:pt x="4955756" y="1193984"/>
+                  </a:lnTo>
+                  <a:lnTo>
+                    <a:pt x="5026100" y="1196611"/>
+                  </a:lnTo>
+                  <a:lnTo>
+                    <a:pt x="5096445" y="1199129"/>
+                  </a:lnTo>
+                  <a:lnTo>
+                    <a:pt x="5166789" y="1201542"/>
+                  </a:lnTo>
+                  <a:lnTo>
+                    <a:pt x="5237134" y="1203854"/>
+                  </a:lnTo>
+                  <a:lnTo>
+                    <a:pt x="5307478" y="1206071"/>
+                  </a:lnTo>
+                  <a:lnTo>
+                    <a:pt x="5377823" y="1208196"/>
+                  </a:lnTo>
+                  <a:lnTo>
+                    <a:pt x="5448167" y="1210232"/>
+                  </a:lnTo>
+                  <a:lnTo>
+                    <a:pt x="5518512" y="1212184"/>
+                  </a:lnTo>
+                  <a:lnTo>
+                    <a:pt x="5588856" y="1214054"/>
+                  </a:lnTo>
+                  <a:lnTo>
+                    <a:pt x="5659201" y="1215847"/>
+                  </a:lnTo>
+                  <a:lnTo>
+                    <a:pt x="5729545" y="1217565"/>
+                  </a:lnTo>
+                  <a:lnTo>
+                    <a:pt x="5799889" y="1219212"/>
+                  </a:lnTo>
+                  <a:lnTo>
+                    <a:pt x="5870234" y="1220791"/>
+                  </a:lnTo>
+                  <a:lnTo>
+                    <a:pt x="5940578" y="1222304"/>
+                  </a:lnTo>
+                  <a:lnTo>
+                    <a:pt x="6010923" y="1223754"/>
+                  </a:lnTo>
+                  <a:lnTo>
+                    <a:pt x="6081267" y="1225144"/>
+                  </a:lnTo>
+                  <a:lnTo>
+                    <a:pt x="6151612" y="1226476"/>
+                  </a:lnTo>
+                  <a:lnTo>
+                    <a:pt x="6221956" y="1227752"/>
+                  </a:lnTo>
+                  <a:lnTo>
+                    <a:pt x="6292301" y="1228976"/>
+                  </a:lnTo>
+                  <a:lnTo>
+                    <a:pt x="6362645" y="1230149"/>
+                  </a:lnTo>
+                </a:path>
+              </a:pathLst>
+            </a:custGeom>
+            <a:ln w="27101" cap="flat">
+              <a:solidFill>
+                <a:srgbClr val="FF8C00">
+                  <a:alpha val="100000"/>
+                </a:srgbClr>
+              </a:solidFill>
+              <a:prstDash val="solid"/>
+              <a:round/>
+            </a:ln>
+          </p:spPr>
+          <p:txBody>
+            <a:bodyPr/>
+            <a:lstStyle/>
+            <a:p/>
+          </p:txBody>
+        </p:sp>
+        <p:sp>
+          <p:nvSpPr>
+            <p:cNvPr id="74" name="pl74"/>
+            <p:cNvSpPr/>
+            <p:nvPr/>
+          </p:nvSpPr>
+          <p:spPr>
+            <a:xfrm>
+              <a:off x="887106" y="5294352"/>
+              <a:ext cx="7660515" cy="0"/>
+            </a:xfrm>
+            <a:custGeom>
+              <a:avLst/>
+              <a:pathLst>
+                <a:path w="7660515" h="0">
+                  <a:moveTo>
+                    <a:pt x="0" y="0"/>
+                  </a:moveTo>
+                  <a:lnTo>
+                    <a:pt x="7660515" y="0"/>
+                  </a:lnTo>
+                  <a:lnTo>
+                    <a:pt x="7660515" y="0"/>
+                  </a:lnTo>
+                </a:path>
+              </a:pathLst>
+            </a:custGeom>
+            <a:ln w="13550" cap="flat">
+              <a:solidFill>
+                <a:srgbClr val="7F7F7F">
+                  <a:alpha val="100000"/>
+                </a:srgbClr>
+              </a:solidFill>
+              <a:prstDash val="dash"/>
+              <a:round/>
+            </a:ln>
+          </p:spPr>
+          <p:txBody>
+            <a:bodyPr/>
+            <a:lstStyle/>
+            <a:p/>
+          </p:txBody>
+        </p:sp>
+        <p:sp>
+          <p:nvSpPr>
+            <p:cNvPr id="75" name="pl75"/>
+            <p:cNvSpPr/>
+            <p:nvPr/>
+          </p:nvSpPr>
+          <p:spPr>
+            <a:xfrm>
+              <a:off x="4215100" y="4336484"/>
+              <a:ext cx="0" cy="1317069"/>
+            </a:xfrm>
+            <a:custGeom>
+              <a:avLst/>
+              <a:pathLst>
+                <a:path w="0" h="1317069">
+                  <a:moveTo>
+                    <a:pt x="0" y="1317069"/>
+                  </a:moveTo>
+                  <a:lnTo>
+                    <a:pt x="0" y="0"/>
+                  </a:lnTo>
+                  <a:lnTo>
+                    <a:pt x="0" y="0"/>
+                  </a:lnTo>
+                </a:path>
+              </a:pathLst>
+            </a:custGeom>
+            <a:ln w="13550" cap="flat">
+              <a:solidFill>
+                <a:srgbClr val="666666">
+                  <a:alpha val="100000"/>
+                </a:srgbClr>
+              </a:solidFill>
+              <a:prstDash val="dot"/>
+              <a:round/>
+            </a:ln>
+          </p:spPr>
+          <p:txBody>
+            <a:bodyPr/>
+            <a:lstStyle/>
+            <a:p/>
+          </p:txBody>
+        </p:sp>
+        <p:sp>
+          <p:nvSpPr>
+            <p:cNvPr id="76" name="pl76"/>
+            <p:cNvSpPr/>
+            <p:nvPr/>
+          </p:nvSpPr>
+          <p:spPr>
+            <a:xfrm>
+              <a:off x="3046793" y="4336484"/>
+              <a:ext cx="0" cy="1317069"/>
+            </a:xfrm>
+            <a:custGeom>
+              <a:avLst/>
+              <a:pathLst>
+                <a:path w="0" h="1317069">
+                  <a:moveTo>
+                    <a:pt x="0" y="1317069"/>
+                  </a:moveTo>
+                  <a:lnTo>
+                    <a:pt x="0" y="0"/>
+                  </a:lnTo>
+                  <a:lnTo>
+                    <a:pt x="0" y="0"/>
+                  </a:lnTo>
+                </a:path>
+              </a:pathLst>
+            </a:custGeom>
+            <a:ln w="13550" cap="flat">
+              <a:solidFill>
+                <a:srgbClr val="4682B4">
+                  <a:alpha val="69803"/>
+                </a:srgbClr>
+              </a:solidFill>
+              <a:prstDash val="dash"/>
+              <a:round/>
+            </a:ln>
+          </p:spPr>
+          <p:txBody>
+            <a:bodyPr/>
+            <a:lstStyle/>
+            <a:p/>
+          </p:txBody>
+        </p:sp>
+        <p:sp>
+          <p:nvSpPr>
+            <p:cNvPr id="77" name="pl77"/>
+            <p:cNvSpPr/>
+            <p:nvPr/>
+          </p:nvSpPr>
+          <p:spPr>
+            <a:xfrm>
+              <a:off x="5409191" y="4336484"/>
+              <a:ext cx="0" cy="1317069"/>
+            </a:xfrm>
+            <a:custGeom>
+              <a:avLst/>
+              <a:pathLst>
+                <a:path w="0" h="1317069">
+                  <a:moveTo>
+                    <a:pt x="0" y="1317069"/>
+                  </a:moveTo>
+                  <a:lnTo>
+                    <a:pt x="0" y="0"/>
+                  </a:lnTo>
+                  <a:lnTo>
+                    <a:pt x="0" y="0"/>
+                  </a:lnTo>
+                </a:path>
+              </a:pathLst>
+            </a:custGeom>
+            <a:ln w="13550" cap="flat">
+              <a:solidFill>
+                <a:srgbClr val="4682B4">
+                  <a:alpha val="69803"/>
+                </a:srgbClr>
+              </a:solidFill>
+              <a:prstDash val="dash"/>
+              <a:round/>
+            </a:ln>
+          </p:spPr>
+          <p:txBody>
+            <a:bodyPr/>
+            <a:lstStyle/>
+            <a:p/>
+          </p:txBody>
+        </p:sp>
+        <p:sp>
+          <p:nvSpPr>
+            <p:cNvPr id="78" name="tx78"/>
+            <p:cNvSpPr/>
+            <p:nvPr/>
+          </p:nvSpPr>
+          <p:spPr>
+            <a:xfrm>
+              <a:off x="762297" y="5553636"/>
+              <a:ext cx="62179" cy="80101"/>
+            </a:xfrm>
+            <a:prstGeom prst="rect">
+              <a:avLst/>
+            </a:prstGeom>
+            <a:noFill/>
+          </p:spPr>
+          <p:txBody>
+            <a:bodyPr lIns="0" rIns="0" tIns="0" bIns="0" anchorCtr="1" anchor="ctr" wrap="none"/>
+            <a:lstStyle/>
+            <a:p>
+              <a:pPr algn="l" marL="0" marR="0" indent="0">
+                <a:lnSpc>
+                  <a:spcPts val="880"/>
+                </a:lnSpc>
+                <a:spcBef>
+                  <a:spcPts val="0"/>
+                </a:spcBef>
+                <a:spcAft>
+                  <a:spcPts val="0"/>
+                </a:spcAft>
+              </a:pPr>
+              <a:r>
+                <a:rPr sz="880">
+                  <a:solidFill>
+                    <a:srgbClr val="4D4D4D">
+                      <a:alpha val="100000"/>
+                    </a:srgbClr>
+                  </a:solidFill>
+                  <a:latin typeface="Helvetica"/>
+                  <a:cs typeface="Helvetica"/>
+                </a:rPr>
+                <a:t>0</a:t>
+              </a:r>
+            </a:p>
+          </p:txBody>
+        </p:sp>
+        <p:sp>
+          <p:nvSpPr>
+            <p:cNvPr id="79" name="tx79"/>
+            <p:cNvSpPr/>
+            <p:nvPr/>
+          </p:nvSpPr>
+          <p:spPr>
+            <a:xfrm>
+              <a:off x="762297" y="5254302"/>
+              <a:ext cx="62179" cy="80101"/>
+            </a:xfrm>
+            <a:prstGeom prst="rect">
+              <a:avLst/>
+            </a:prstGeom>
+            <a:noFill/>
+          </p:spPr>
+          <p:txBody>
+            <a:bodyPr lIns="0" rIns="0" tIns="0" bIns="0" anchorCtr="1" anchor="ctr" wrap="none"/>
+            <a:lstStyle/>
+            <a:p>
+              <a:pPr algn="l" marL="0" marR="0" indent="0">
+                <a:lnSpc>
+                  <a:spcPts val="880"/>
+                </a:lnSpc>
+                <a:spcBef>
+                  <a:spcPts val="0"/>
+                </a:spcBef>
+                <a:spcAft>
+                  <a:spcPts val="0"/>
+                </a:spcAft>
+              </a:pPr>
+              <a:r>
+                <a:rPr sz="880">
+                  <a:solidFill>
+                    <a:srgbClr val="4D4D4D">
+                      <a:alpha val="100000"/>
+                    </a:srgbClr>
+                  </a:solidFill>
+                  <a:latin typeface="Helvetica"/>
+                  <a:cs typeface="Helvetica"/>
+                </a:rPr>
+                <a:t>1</a:t>
+              </a:r>
+            </a:p>
+          </p:txBody>
+        </p:sp>
+        <p:sp>
+          <p:nvSpPr>
+            <p:cNvPr id="80" name="tx80"/>
+            <p:cNvSpPr/>
+            <p:nvPr/>
+          </p:nvSpPr>
+          <p:spPr>
+            <a:xfrm>
+              <a:off x="762297" y="4954968"/>
+              <a:ext cx="62179" cy="80101"/>
+            </a:xfrm>
+            <a:prstGeom prst="rect">
+              <a:avLst/>
+            </a:prstGeom>
+            <a:noFill/>
+          </p:spPr>
+          <p:txBody>
+            <a:bodyPr lIns="0" rIns="0" tIns="0" bIns="0" anchorCtr="1" anchor="ctr" wrap="none"/>
+            <a:lstStyle/>
+            <a:p>
+              <a:pPr algn="l" marL="0" marR="0" indent="0">
+                <a:lnSpc>
+                  <a:spcPts val="880"/>
+                </a:lnSpc>
+                <a:spcBef>
+                  <a:spcPts val="0"/>
+                </a:spcBef>
+                <a:spcAft>
+                  <a:spcPts val="0"/>
+                </a:spcAft>
+              </a:pPr>
+              <a:r>
+                <a:rPr sz="880">
+                  <a:solidFill>
+                    <a:srgbClr val="4D4D4D">
+                      <a:alpha val="100000"/>
+                    </a:srgbClr>
+                  </a:solidFill>
+                  <a:latin typeface="Helvetica"/>
+                  <a:cs typeface="Helvetica"/>
+                </a:rPr>
+                <a:t>2</a:t>
+              </a:r>
+            </a:p>
+          </p:txBody>
+        </p:sp>
+        <p:sp>
+          <p:nvSpPr>
+            <p:cNvPr id="81" name="tx81"/>
+            <p:cNvSpPr/>
+            <p:nvPr/>
+          </p:nvSpPr>
+          <p:spPr>
+            <a:xfrm>
+              <a:off x="762297" y="4655634"/>
+              <a:ext cx="62179" cy="80101"/>
+            </a:xfrm>
+            <a:prstGeom prst="rect">
+              <a:avLst/>
+            </a:prstGeom>
+            <a:noFill/>
+          </p:spPr>
+          <p:txBody>
+            <a:bodyPr lIns="0" rIns="0" tIns="0" bIns="0" anchorCtr="1" anchor="ctr" wrap="none"/>
+            <a:lstStyle/>
+            <a:p>
+              <a:pPr algn="l" marL="0" marR="0" indent="0">
+                <a:lnSpc>
+                  <a:spcPts val="880"/>
+                </a:lnSpc>
+                <a:spcBef>
+                  <a:spcPts val="0"/>
+                </a:spcBef>
+                <a:spcAft>
+                  <a:spcPts val="0"/>
+                </a:spcAft>
+              </a:pPr>
+              <a:r>
+                <a:rPr sz="880">
+                  <a:solidFill>
+                    <a:srgbClr val="4D4D4D">
+                      <a:alpha val="100000"/>
+                    </a:srgbClr>
+                  </a:solidFill>
+                  <a:latin typeface="Helvetica"/>
+                  <a:cs typeface="Helvetica"/>
+                </a:rPr>
+                <a:t>3</a:t>
+              </a:r>
+            </a:p>
+          </p:txBody>
+        </p:sp>
+        <p:sp>
+          <p:nvSpPr>
+            <p:cNvPr id="82" name="tx82"/>
+            <p:cNvSpPr/>
+            <p:nvPr/>
+          </p:nvSpPr>
+          <p:spPr>
+            <a:xfrm>
+              <a:off x="762297" y="4356300"/>
+              <a:ext cx="62179" cy="80101"/>
+            </a:xfrm>
+            <a:prstGeom prst="rect">
+              <a:avLst/>
+            </a:prstGeom>
+            <a:noFill/>
+          </p:spPr>
+          <p:txBody>
+            <a:bodyPr lIns="0" rIns="0" tIns="0" bIns="0" anchorCtr="1" anchor="ctr" wrap="none"/>
+            <a:lstStyle/>
+            <a:p>
+              <a:pPr algn="l" marL="0" marR="0" indent="0">
+                <a:lnSpc>
+                  <a:spcPts val="880"/>
+                </a:lnSpc>
+                <a:spcBef>
+                  <a:spcPts val="0"/>
+                </a:spcBef>
+                <a:spcAft>
+                  <a:spcPts val="0"/>
+                </a:spcAft>
+              </a:pPr>
+              <a:r>
+                <a:rPr sz="880">
+                  <a:solidFill>
+                    <a:srgbClr val="4D4D4D">
+                      <a:alpha val="100000"/>
+                    </a:srgbClr>
+                  </a:solidFill>
+                  <a:latin typeface="Helvetica"/>
+                  <a:cs typeface="Helvetica"/>
+                </a:rPr>
+                <a:t>4</a:t>
+              </a:r>
+            </a:p>
+          </p:txBody>
+        </p:sp>
+        <p:sp>
+          <p:nvSpPr>
+            <p:cNvPr id="83" name="tx83"/>
+            <p:cNvSpPr/>
+            <p:nvPr/>
+          </p:nvSpPr>
+          <p:spPr>
+            <a:xfrm>
+              <a:off x="1164222" y="5716183"/>
+              <a:ext cx="161574" cy="80101"/>
+            </a:xfrm>
+            <a:prstGeom prst="rect">
+              <a:avLst/>
+            </a:prstGeom>
+            <a:noFill/>
+          </p:spPr>
+          <p:txBody>
+            <a:bodyPr lIns="0" rIns="0" tIns="0" bIns="0" anchorCtr="1" anchor="ctr" wrap="none"/>
+            <a:lstStyle/>
+            <a:p>
+              <a:pPr algn="l" marL="0" marR="0" indent="0">
+                <a:lnSpc>
+                  <a:spcPts val="880"/>
+                </a:lnSpc>
+                <a:spcBef>
+                  <a:spcPts val="0"/>
+                </a:spcBef>
+                <a:spcAft>
+                  <a:spcPts val="0"/>
+                </a:spcAft>
+              </a:pPr>
+              <a:r>
+                <a:rPr sz="880">
+                  <a:solidFill>
+                    <a:srgbClr val="4D4D4D">
+                      <a:alpha val="100000"/>
+                    </a:srgbClr>
+                  </a:solidFill>
+                  <a:latin typeface="Helvetica"/>
+                  <a:cs typeface="Helvetica"/>
+                </a:rPr>
+                <a:t>-50</a:t>
+              </a:r>
+            </a:p>
+          </p:txBody>
+        </p:sp>
+        <p:sp>
+          <p:nvSpPr>
+            <p:cNvPr id="84" name="tx84"/>
+            <p:cNvSpPr/>
+            <p:nvPr/>
+          </p:nvSpPr>
+          <p:spPr>
+            <a:xfrm>
+              <a:off x="2024485" y="5716183"/>
+              <a:ext cx="161574" cy="80101"/>
+            </a:xfrm>
+            <a:prstGeom prst="rect">
+              <a:avLst/>
+            </a:prstGeom>
+            <a:noFill/>
+          </p:spPr>
+          <p:txBody>
+            <a:bodyPr lIns="0" rIns="0" tIns="0" bIns="0" anchorCtr="1" anchor="ctr" wrap="none"/>
+            <a:lstStyle/>
+            <a:p>
+              <a:pPr algn="l" marL="0" marR="0" indent="0">
+                <a:lnSpc>
+                  <a:spcPts val="880"/>
+                </a:lnSpc>
+                <a:spcBef>
+                  <a:spcPts val="0"/>
+                </a:spcBef>
+                <a:spcAft>
+                  <a:spcPts val="0"/>
+                </a:spcAft>
+              </a:pPr>
+              <a:r>
+                <a:rPr sz="880">
+                  <a:solidFill>
+                    <a:srgbClr val="4D4D4D">
+                      <a:alpha val="100000"/>
+                    </a:srgbClr>
+                  </a:solidFill>
+                  <a:latin typeface="Helvetica"/>
+                  <a:cs typeface="Helvetica"/>
+                </a:rPr>
+                <a:t>-40</a:t>
+              </a:r>
+            </a:p>
+          </p:txBody>
+        </p:sp>
+        <p:sp>
+          <p:nvSpPr>
+            <p:cNvPr id="85" name="tx85"/>
+            <p:cNvSpPr/>
+            <p:nvPr/>
+          </p:nvSpPr>
+          <p:spPr>
+            <a:xfrm>
+              <a:off x="2884749" y="5716183"/>
+              <a:ext cx="161574" cy="80101"/>
+            </a:xfrm>
+            <a:prstGeom prst="rect">
+              <a:avLst/>
+            </a:prstGeom>
+            <a:noFill/>
+          </p:spPr>
+          <p:txBody>
+            <a:bodyPr lIns="0" rIns="0" tIns="0" bIns="0" anchorCtr="1" anchor="ctr" wrap="none"/>
+            <a:lstStyle/>
+            <a:p>
+              <a:pPr algn="l" marL="0" marR="0" indent="0">
+                <a:lnSpc>
+                  <a:spcPts val="880"/>
+                </a:lnSpc>
+                <a:spcBef>
+                  <a:spcPts val="0"/>
+                </a:spcBef>
+                <a:spcAft>
+                  <a:spcPts val="0"/>
+                </a:spcAft>
+              </a:pPr>
+              <a:r>
+                <a:rPr sz="880">
+                  <a:solidFill>
+                    <a:srgbClr val="4D4D4D">
+                      <a:alpha val="100000"/>
+                    </a:srgbClr>
+                  </a:solidFill>
+                  <a:latin typeface="Helvetica"/>
+                  <a:cs typeface="Helvetica"/>
+                </a:rPr>
+                <a:t>-30</a:t>
+              </a:r>
+            </a:p>
+          </p:txBody>
+        </p:sp>
+        <p:sp>
+          <p:nvSpPr>
+            <p:cNvPr id="86" name="tx86"/>
+            <p:cNvSpPr/>
+            <p:nvPr/>
+          </p:nvSpPr>
+          <p:spPr>
+            <a:xfrm>
+              <a:off x="3745012" y="5716183"/>
+              <a:ext cx="161574" cy="80101"/>
+            </a:xfrm>
+            <a:prstGeom prst="rect">
+              <a:avLst/>
+            </a:prstGeom>
+            <a:noFill/>
+          </p:spPr>
+          <p:txBody>
+            <a:bodyPr lIns="0" rIns="0" tIns="0" bIns="0" anchorCtr="1" anchor="ctr" wrap="none"/>
+            <a:lstStyle/>
+            <a:p>
+              <a:pPr algn="l" marL="0" marR="0" indent="0">
+                <a:lnSpc>
+                  <a:spcPts val="880"/>
+                </a:lnSpc>
+                <a:spcBef>
+                  <a:spcPts val="0"/>
+                </a:spcBef>
+                <a:spcAft>
+                  <a:spcPts val="0"/>
+                </a:spcAft>
+              </a:pPr>
+              <a:r>
+                <a:rPr sz="880">
+                  <a:solidFill>
+                    <a:srgbClr val="4D4D4D">
+                      <a:alpha val="100000"/>
+                    </a:srgbClr>
+                  </a:solidFill>
+                  <a:latin typeface="Helvetica"/>
+                  <a:cs typeface="Helvetica"/>
+                </a:rPr>
+                <a:t>-20</a:t>
+              </a:r>
+            </a:p>
+          </p:txBody>
+        </p:sp>
+        <p:sp>
+          <p:nvSpPr>
+            <p:cNvPr id="87" name="tx87"/>
+            <p:cNvSpPr/>
+            <p:nvPr/>
+          </p:nvSpPr>
+          <p:spPr>
+            <a:xfrm>
+              <a:off x="4605275" y="5716183"/>
+              <a:ext cx="161574" cy="80101"/>
+            </a:xfrm>
+            <a:prstGeom prst="rect">
+              <a:avLst/>
+            </a:prstGeom>
+            <a:noFill/>
+          </p:spPr>
+          <p:txBody>
+            <a:bodyPr lIns="0" rIns="0" tIns="0" bIns="0" anchorCtr="1" anchor="ctr" wrap="none"/>
+            <a:lstStyle/>
+            <a:p>
+              <a:pPr algn="l" marL="0" marR="0" indent="0">
+                <a:lnSpc>
+                  <a:spcPts val="880"/>
+                </a:lnSpc>
+                <a:spcBef>
+                  <a:spcPts val="0"/>
+                </a:spcBef>
+                <a:spcAft>
+                  <a:spcPts val="0"/>
+                </a:spcAft>
+              </a:pPr>
+              <a:r>
+                <a:rPr sz="880">
+                  <a:solidFill>
+                    <a:srgbClr val="4D4D4D">
+                      <a:alpha val="100000"/>
+                    </a:srgbClr>
+                  </a:solidFill>
+                  <a:latin typeface="Helvetica"/>
+                  <a:cs typeface="Helvetica"/>
+                </a:rPr>
+                <a:t>-10</a:t>
+              </a:r>
+            </a:p>
+          </p:txBody>
+        </p:sp>
+        <p:sp>
+          <p:nvSpPr>
+            <p:cNvPr id="88" name="tx88"/>
+            <p:cNvSpPr/>
+            <p:nvPr/>
+          </p:nvSpPr>
+          <p:spPr>
+            <a:xfrm>
+              <a:off x="5515235" y="5716183"/>
+              <a:ext cx="62179" cy="80101"/>
+            </a:xfrm>
+            <a:prstGeom prst="rect">
+              <a:avLst/>
+            </a:prstGeom>
+            <a:noFill/>
+          </p:spPr>
+          <p:txBody>
+            <a:bodyPr lIns="0" rIns="0" tIns="0" bIns="0" anchorCtr="1" anchor="ctr" wrap="none"/>
+            <a:lstStyle/>
+            <a:p>
+              <a:pPr algn="l" marL="0" marR="0" indent="0">
+                <a:lnSpc>
+                  <a:spcPts val="880"/>
+                </a:lnSpc>
+                <a:spcBef>
+                  <a:spcPts val="0"/>
+                </a:spcBef>
+                <a:spcAft>
+                  <a:spcPts val="0"/>
+                </a:spcAft>
+              </a:pPr>
+              <a:r>
+                <a:rPr sz="880">
+                  <a:solidFill>
+                    <a:srgbClr val="4D4D4D">
+                      <a:alpha val="100000"/>
+                    </a:srgbClr>
+                  </a:solidFill>
+                  <a:latin typeface="Helvetica"/>
+                  <a:cs typeface="Helvetica"/>
+                </a:rPr>
+                <a:t>0</a:t>
+              </a:r>
+            </a:p>
+          </p:txBody>
+        </p:sp>
+        <p:sp>
+          <p:nvSpPr>
+            <p:cNvPr id="89" name="tx89"/>
+            <p:cNvSpPr/>
+            <p:nvPr/>
+          </p:nvSpPr>
+          <p:spPr>
+            <a:xfrm>
+              <a:off x="6344409" y="5716183"/>
+              <a:ext cx="124358" cy="80101"/>
+            </a:xfrm>
+            <a:prstGeom prst="rect">
+              <a:avLst/>
+            </a:prstGeom>
+            <a:noFill/>
+          </p:spPr>
+          <p:txBody>
+            <a:bodyPr lIns="0" rIns="0" tIns="0" bIns="0" anchorCtr="1" anchor="ctr" wrap="none"/>
+            <a:lstStyle/>
+            <a:p>
+              <a:pPr algn="l" marL="0" marR="0" indent="0">
+                <a:lnSpc>
+                  <a:spcPts val="880"/>
+                </a:lnSpc>
+                <a:spcBef>
+                  <a:spcPts val="0"/>
+                </a:spcBef>
+                <a:spcAft>
+                  <a:spcPts val="0"/>
+                </a:spcAft>
+              </a:pPr>
+              <a:r>
+                <a:rPr sz="880">
+                  <a:solidFill>
+                    <a:srgbClr val="4D4D4D">
+                      <a:alpha val="100000"/>
+                    </a:srgbClr>
+                  </a:solidFill>
+                  <a:latin typeface="Helvetica"/>
+                  <a:cs typeface="Helvetica"/>
+                </a:rPr>
+                <a:t>10</a:t>
+              </a:r>
+            </a:p>
+          </p:txBody>
+        </p:sp>
+        <p:sp>
+          <p:nvSpPr>
+            <p:cNvPr id="90" name="tx90"/>
+            <p:cNvSpPr/>
+            <p:nvPr/>
+          </p:nvSpPr>
+          <p:spPr>
+            <a:xfrm>
+              <a:off x="7204672" y="5716183"/>
+              <a:ext cx="124358" cy="80101"/>
+            </a:xfrm>
+            <a:prstGeom prst="rect">
+              <a:avLst/>
+            </a:prstGeom>
+            <a:noFill/>
+          </p:spPr>
+          <p:txBody>
+            <a:bodyPr lIns="0" rIns="0" tIns="0" bIns="0" anchorCtr="1" anchor="ctr" wrap="none"/>
+            <a:lstStyle/>
+            <a:p>
+              <a:pPr algn="l" marL="0" marR="0" indent="0">
+                <a:lnSpc>
+                  <a:spcPts val="880"/>
+                </a:lnSpc>
+                <a:spcBef>
+                  <a:spcPts val="0"/>
+                </a:spcBef>
+                <a:spcAft>
+                  <a:spcPts val="0"/>
+                </a:spcAft>
+              </a:pPr>
+              <a:r>
+                <a:rPr sz="880">
+                  <a:solidFill>
+                    <a:srgbClr val="4D4D4D">
+                      <a:alpha val="100000"/>
+                    </a:srgbClr>
+                  </a:solidFill>
+                  <a:latin typeface="Helvetica"/>
+                  <a:cs typeface="Helvetica"/>
+                </a:rPr>
+                <a:t>20</a:t>
+              </a:r>
+            </a:p>
+          </p:txBody>
+        </p:sp>
+        <p:sp>
+          <p:nvSpPr>
+            <p:cNvPr id="91" name="tx91"/>
+            <p:cNvSpPr/>
+            <p:nvPr/>
+          </p:nvSpPr>
+          <p:spPr>
+            <a:xfrm>
+              <a:off x="8064935" y="5716183"/>
+              <a:ext cx="124358" cy="80101"/>
+            </a:xfrm>
+            <a:prstGeom prst="rect">
+              <a:avLst/>
+            </a:prstGeom>
+            <a:noFill/>
+          </p:spPr>
+          <p:txBody>
+            <a:bodyPr lIns="0" rIns="0" tIns="0" bIns="0" anchorCtr="1" anchor="ctr" wrap="none"/>
+            <a:lstStyle/>
+            <a:p>
+              <a:pPr algn="l" marL="0" marR="0" indent="0">
+                <a:lnSpc>
+                  <a:spcPts val="880"/>
+                </a:lnSpc>
+                <a:spcBef>
+                  <a:spcPts val="0"/>
+                </a:spcBef>
+                <a:spcAft>
+                  <a:spcPts val="0"/>
+                </a:spcAft>
+              </a:pPr>
+              <a:r>
+                <a:rPr sz="880">
+                  <a:solidFill>
+                    <a:srgbClr val="4D4D4D">
+                      <a:alpha val="100000"/>
+                    </a:srgbClr>
+                  </a:solidFill>
+                  <a:latin typeface="Helvetica"/>
+                  <a:cs typeface="Helvetica"/>
+                </a:rPr>
+                <a:t>30</a:t>
+              </a:r>
+            </a:p>
+          </p:txBody>
+        </p:sp>
+        <p:sp>
+          <p:nvSpPr>
+            <p:cNvPr id="92" name="tx92"/>
+            <p:cNvSpPr/>
+            <p:nvPr/>
+          </p:nvSpPr>
+          <p:spPr>
+            <a:xfrm>
+              <a:off x="1561815" y="5855859"/>
+              <a:ext cx="6311097" cy="100218"/>
+            </a:xfrm>
+            <a:prstGeom prst="rect">
+              <a:avLst/>
+            </a:prstGeom>
+            <a:noFill/>
+          </p:spPr>
+          <p:txBody>
+            <a:bodyPr lIns="0" rIns="0" tIns="0" bIns="0" anchorCtr="1" anchor="ctr" wrap="none"/>
+            <a:lstStyle/>
+            <a:p>
+              <a:pPr algn="l" marL="0" marR="0" indent="0">
+                <a:lnSpc>
+                  <a:spcPts val="1100"/>
+                </a:lnSpc>
+                <a:spcBef>
+                  <a:spcPts val="0"/>
+                </a:spcBef>
+                <a:spcAft>
+                  <a:spcPts val="0"/>
+                </a:spcAft>
+              </a:pPr>
+              <a:r>
+                <a:rPr sz="1100">
+                  <a:solidFill>
+                    <a:srgbClr val="000000">
+                      <a:alpha val="100000"/>
+                    </a:srgbClr>
+                  </a:solidFill>
+                  <a:latin typeface="Helvetica"/>
+                  <a:cs typeface="Helvetica"/>
+                </a:rPr>
+                <a:t>Sensitivity eGFR Difference (%): 100 × (CKD-EPI 2012 CysC − CKD-EPI 2021 Cr) / CKD-EPI 2021 Cr</a:t>
+              </a:r>
+            </a:p>
+          </p:txBody>
+        </p:sp>
+        <p:sp>
+          <p:nvSpPr>
+            <p:cNvPr id="93" name="tx93"/>
+            <p:cNvSpPr/>
+            <p:nvPr/>
+          </p:nvSpPr>
+          <p:spPr>
+            <a:xfrm rot="-5400000">
+              <a:off x="250689" y="4944909"/>
+              <a:ext cx="791596" cy="100218"/>
+            </a:xfrm>
+            <a:prstGeom prst="rect">
+              <a:avLst/>
+            </a:prstGeom>
+            <a:noFill/>
+          </p:spPr>
+          <p:txBody>
+            <a:bodyPr lIns="0" rIns="0" tIns="0" bIns="0" anchorCtr="1" anchor="ctr" wrap="none"/>
+            <a:lstStyle/>
+            <a:p>
+              <a:pPr algn="l" marL="0" marR="0" indent="0">
+                <a:lnSpc>
+                  <a:spcPts val="1100"/>
+                </a:lnSpc>
+                <a:spcBef>
+                  <a:spcPts val="0"/>
+                </a:spcBef>
+                <a:spcAft>
+                  <a:spcPts val="0"/>
+                </a:spcAft>
+              </a:pPr>
+              <a:r>
+                <a:rPr sz="1100">
+                  <a:solidFill>
+                    <a:srgbClr val="000000">
+                      <a:alpha val="100000"/>
+                    </a:srgbClr>
+                  </a:solidFill>
+                  <a:latin typeface="Helvetica"/>
+                  <a:cs typeface="Helvetica"/>
+                </a:rPr>
+                <a:t>HR (95% CI)</a:t>
+              </a:r>
+            </a:p>
+          </p:txBody>
+        </p:sp>
+        <p:sp>
+          <p:nvSpPr>
+            <p:cNvPr id="94" name="tx94"/>
+            <p:cNvSpPr/>
+            <p:nvPr/>
+          </p:nvSpPr>
+          <p:spPr>
+            <a:xfrm>
+              <a:off x="887106" y="4159544"/>
+              <a:ext cx="6842363" cy="82021"/>
+            </a:xfrm>
+            <a:prstGeom prst="rect">
+              <a:avLst/>
+            </a:prstGeom>
+            <a:noFill/>
+          </p:spPr>
+          <p:txBody>
+            <a:bodyPr lIns="0" rIns="0" tIns="0" bIns="0" anchorCtr="1" anchor="ctr" wrap="none"/>
+            <a:lstStyle/>
+            <a:p>
+              <a:pPr algn="l" marL="0" marR="0" indent="0">
+                <a:lnSpc>
+                  <a:spcPts val="900"/>
+                </a:lnSpc>
+                <a:spcBef>
+                  <a:spcPts val="0"/>
+                </a:spcBef>
+                <a:spcAft>
+                  <a:spcPts val="0"/>
+                </a:spcAft>
+              </a:pPr>
+              <a:r>
+                <a:rPr sz="900">
+                  <a:solidFill>
+                    <a:srgbClr val="404040">
+                      <a:alpha val="100000"/>
+                    </a:srgbClr>
+                  </a:solidFill>
+                  <a:latin typeface="Helvetica"/>
+                  <a:cs typeface="Helvetica"/>
+                </a:rPr>
+                <a:t>HR per 10 % decline: 1.68 (1.33-2.12), p_Bonf = &lt;0.001 (n = 6)  |  per IQR decline (Δ = 27.5 %): 4.16 (2.21-7.82)  |  IQR: [-29.1, -1.6] %</a:t>
+              </a:r>
+            </a:p>
+          </p:txBody>
+        </p:sp>
+        <p:sp>
+          <p:nvSpPr>
+            <p:cNvPr id="95" name="tx95"/>
+            <p:cNvSpPr/>
+            <p:nvPr/>
+          </p:nvSpPr>
+          <p:spPr>
+            <a:xfrm>
+              <a:off x="887106" y="3932770"/>
               <a:ext cx="2681112" cy="120152"/>
             </a:xfrm>
             <a:prstGeom prst="rect">
